--- a/benchmarks/osworld/results/agent_computer_sonnet5/a669ef01-ded5-4099-9ea9-25e99b569840/run_2/Writing-Outlines.pptx
+++ b/benchmarks/osworld/results/agent_computer_sonnet5/a669ef01-ded5-4099-9ea9-25e99b569840/run_2/Writing-Outlines.pptx
@@ -77,12 +77,12 @@
               <a:buNone/>
             </a:pPr>
             <a:r>
-              <a:rPr b="0" lang="en-HK" sz="4400" spc="-1" strike="noStrike">
+              <a:rPr b="0" lang="en-US" sz="4400" spc="-1" strike="noStrike">
                 <a:latin typeface="Arial"/>
               </a:rPr>
               <a:t>Click to move the slide</a:t>
             </a:r>
-            <a:endParaRPr b="0" lang="en-HK" sz="4400" spc="-1" strike="noStrike">
+            <a:endParaRPr b="0" lang="en-US" sz="4400" spc="-1" strike="noStrike">
               <a:latin typeface="Arial"/>
             </a:endParaRPr>
           </a:p>
@@ -117,12 +117,12 @@
           </a:bodyPr>
           <a:p>
             <a:r>
-              <a:rPr b="0" lang="en-HK" sz="2000" spc="-1" strike="noStrike">
+              <a:rPr b="0" lang="en-US" sz="2000" spc="-1" strike="noStrike">
                 <a:latin typeface="Arial"/>
               </a:rPr>
               <a:t>Click to edit the notes format</a:t>
             </a:r>
-            <a:endParaRPr b="0" lang="en-HK" sz="2000" spc="-1" strike="noStrike">
+            <a:endParaRPr b="0" lang="en-US" sz="2000" spc="-1" strike="noStrike">
               <a:latin typeface="Arial"/>
             </a:endParaRPr>
           </a:p>
@@ -157,12 +157,12 @@
           </a:bodyPr>
           <a:p>
             <a:r>
-              <a:rPr b="0" lang="en-HK" sz="1400" spc="-1" strike="noStrike">
+              <a:rPr b="0" lang="en-US" sz="1400" spc="-1" strike="noStrike">
                 <a:latin typeface="Times New Roman"/>
               </a:rPr>
               <a:t>&lt;header&gt;</a:t>
             </a:r>
-            <a:endParaRPr b="0" lang="en-HK" sz="1400" spc="-1" strike="noStrike">
+            <a:endParaRPr b="0" lang="en-US" sz="1400" spc="-1" strike="noStrike">
               <a:latin typeface="Times New Roman"/>
             </a:endParaRPr>
           </a:p>
@@ -198,7 +198,7 @@
           <a:lstStyle>
             <a:lvl1pPr algn="r">
               <a:buNone/>
-              <a:defRPr b="0" lang="en-HK" sz="1400" spc="-1" strike="noStrike">
+              <a:defRPr b="0" lang="en-US" sz="1400" spc="-1" strike="noStrike">
                 <a:latin typeface="Times New Roman"/>
               </a:defRPr>
             </a:lvl1pPr>
@@ -208,12 +208,12 @@
               <a:buNone/>
             </a:pPr>
             <a:r>
-              <a:rPr b="0" lang="en-HK" sz="1400" spc="-1" strike="noStrike">
+              <a:rPr b="0" lang="en-US" sz="1400" spc="-1" strike="noStrike">
                 <a:latin typeface="Times New Roman"/>
               </a:rPr>
               <a:t>&lt;date/time&gt;</a:t>
             </a:r>
-            <a:endParaRPr b="0" lang="en-HK" sz="1400" spc="-1" strike="noStrike">
+            <a:endParaRPr b="0" lang="en-US" sz="1400" spc="-1" strike="noStrike">
               <a:latin typeface="Times New Roman"/>
             </a:endParaRPr>
           </a:p>
@@ -248,19 +248,19 @@
           </a:bodyPr>
           <a:lstStyle>
             <a:lvl1pPr>
-              <a:defRPr b="0" lang="en-HK" sz="1400" spc="-1" strike="noStrike">
+              <a:defRPr b="0" lang="en-US" sz="1400" spc="-1" strike="noStrike">
                 <a:latin typeface="Times New Roman"/>
               </a:defRPr>
             </a:lvl1pPr>
           </a:lstStyle>
           <a:p>
             <a:r>
-              <a:rPr b="0" lang="en-HK" sz="1400" spc="-1" strike="noStrike">
+              <a:rPr b="0" lang="en-US" sz="1400" spc="-1" strike="noStrike">
                 <a:latin typeface="Times New Roman"/>
               </a:rPr>
               <a:t>&lt;footer&gt;</a:t>
             </a:r>
-            <a:endParaRPr b="0" lang="en-HK" sz="1400" spc="-1" strike="noStrike">
+            <a:endParaRPr b="0" lang="en-US" sz="1400" spc="-1" strike="noStrike">
               <a:latin typeface="Times New Roman"/>
             </a:endParaRPr>
           </a:p>
@@ -296,7 +296,7 @@
           <a:lstStyle>
             <a:lvl1pPr algn="r">
               <a:buNone/>
-              <a:defRPr b="0" lang="en-HK" sz="1400" spc="-1" strike="noStrike">
+              <a:defRPr b="0" lang="en-US" sz="1400" spc="-1" strike="noStrike">
                 <a:latin typeface="Times New Roman"/>
               </a:defRPr>
             </a:lvl1pPr>
@@ -305,13 +305,13 @@
             <a:pPr algn="r">
               <a:buNone/>
             </a:pPr>
-            <a:fld id="{A435FD00-C94D-43AF-ADF6-48D70C4DE4AC}" type="slidenum">
-              <a:rPr b="0" lang="en-HK" sz="1400" spc="-1" strike="noStrike">
+            <a:fld id="{A9C6A755-AF06-494E-BBB1-7614D7E2A391}" type="slidenum">
+              <a:rPr b="0" lang="en-US" sz="1400" spc="-1" strike="noStrike">
                 <a:latin typeface="Times New Roman"/>
               </a:rPr>
               <a:t>&lt;number&gt;</a:t>
             </a:fld>
-            <a:endParaRPr b="0" lang="en-HK" sz="1400" spc="-1" strike="noStrike">
+            <a:endParaRPr b="0" lang="en-US" sz="1400" spc="-1" strike="noStrike">
               <a:latin typeface="Times New Roman"/>
             </a:endParaRPr>
           </a:p>
@@ -353,7 +353,7 @@
         <p:spPr>
           <a:xfrm>
             <a:off x="381240" y="685800"/>
-            <a:ext cx="6093720" cy="3426840"/>
+            <a:ext cx="6093360" cy="3426480"/>
           </a:xfrm>
           <a:prstGeom prst="rect">
             <a:avLst/>
@@ -376,7 +376,7 @@
         <p:spPr>
           <a:xfrm>
             <a:off x="685800" y="4343400"/>
-            <a:ext cx="5484240" cy="4112640"/>
+            <a:ext cx="5483880" cy="4112280"/>
           </a:xfrm>
           <a:prstGeom prst="rect">
             <a:avLst/>
@@ -407,7 +407,7 @@
               </a:rPr>
               <a:t>Participants add this information to their concept map graphic organizer</a:t>
             </a:r>
-            <a:endParaRPr b="0" lang="en-HK" sz="1100" spc="-1" strike="noStrike">
+            <a:endParaRPr b="0" lang="en-US" sz="1100" spc="-1" strike="noStrike">
               <a:latin typeface="Arial"/>
             </a:endParaRPr>
           </a:p>
@@ -448,7 +448,7 @@
         <p:spPr>
           <a:xfrm>
             <a:off x="380880" y="685800"/>
-            <a:ext cx="6093720" cy="3426840"/>
+            <a:ext cx="6093360" cy="3426480"/>
           </a:xfrm>
           <a:prstGeom prst="rect">
             <a:avLst/>
@@ -471,7 +471,7 @@
         <p:spPr>
           <a:xfrm>
             <a:off x="685800" y="4343400"/>
-            <a:ext cx="5484240" cy="4112640"/>
+            <a:ext cx="5483880" cy="4112280"/>
           </a:xfrm>
           <a:prstGeom prst="rect">
             <a:avLst/>
@@ -502,7 +502,7 @@
               </a:rPr>
               <a:t>Easy to have students make their own: draw one larger circle in the middle, then lines to connecting ideas</a:t>
             </a:r>
-            <a:endParaRPr b="0" lang="en-HK" sz="1100" spc="-1" strike="noStrike">
+            <a:endParaRPr b="0" lang="en-US" sz="1100" spc="-1" strike="noStrike">
               <a:latin typeface="Arial"/>
             </a:endParaRPr>
           </a:p>
@@ -523,7 +523,7 @@
               </a:rPr>
               <a:t>Participants can do this as we go through the presentation; main idea = graphic organizers, related concepts are the various types of graphic organizers</a:t>
             </a:r>
-            <a:endParaRPr b="0" lang="en-HK" sz="1100" spc="-1" strike="noStrike">
+            <a:endParaRPr b="0" lang="en-US" sz="1100" spc="-1" strike="noStrike">
               <a:latin typeface="Arial"/>
             </a:endParaRPr>
           </a:p>
@@ -564,7 +564,7 @@
         <p:spPr>
           <a:xfrm>
             <a:off x="381240" y="685800"/>
-            <a:ext cx="6093720" cy="3426840"/>
+            <a:ext cx="6093360" cy="3426480"/>
           </a:xfrm>
           <a:prstGeom prst="rect">
             <a:avLst/>
@@ -587,7 +587,7 @@
         <p:spPr>
           <a:xfrm>
             <a:off x="685800" y="4343400"/>
-            <a:ext cx="5484240" cy="4112640"/>
+            <a:ext cx="5483880" cy="4112280"/>
           </a:xfrm>
           <a:prstGeom prst="rect">
             <a:avLst/>
@@ -618,7 +618,7 @@
               </a:rPr>
               <a:t>Tip to focus information, try to  develop your topic sentences for each paragraph as a part of the outline instead of just a bulleted word/topic. </a:t>
             </a:r>
-            <a:endParaRPr b="0" lang="en-HK" sz="1100" spc="-1" strike="noStrike">
+            <a:endParaRPr b="0" lang="en-US" sz="1100" spc="-1" strike="noStrike">
               <a:latin typeface="Arial"/>
             </a:endParaRPr>
           </a:p>
@@ -659,7 +659,7 @@
         <p:spPr>
           <a:xfrm>
             <a:off x="381240" y="685800"/>
-            <a:ext cx="6093720" cy="3426840"/>
+            <a:ext cx="6093360" cy="3426480"/>
           </a:xfrm>
           <a:prstGeom prst="rect">
             <a:avLst/>
@@ -682,7 +682,7 @@
         <p:spPr>
           <a:xfrm>
             <a:off x="685800" y="4343400"/>
-            <a:ext cx="5484240" cy="4112640"/>
+            <a:ext cx="5483880" cy="4112280"/>
           </a:xfrm>
           <a:prstGeom prst="rect">
             <a:avLst/>
@@ -713,7 +713,7 @@
               </a:rPr>
               <a:t>*Exact content depends on the journal you’ve selected, i.e. OS vs discipline-specific</a:t>
             </a:r>
-            <a:endParaRPr b="0" lang="en-HK" sz="1100" spc="-1" strike="noStrike">
+            <a:endParaRPr b="0" lang="en-US" sz="1100" spc="-1" strike="noStrike">
               <a:latin typeface="Arial"/>
             </a:endParaRPr>
           </a:p>
@@ -754,7 +754,7 @@
         <p:spPr>
           <a:xfrm>
             <a:off x="381240" y="685800"/>
-            <a:ext cx="6093720" cy="3426840"/>
+            <a:ext cx="6093360" cy="3426480"/>
           </a:xfrm>
           <a:prstGeom prst="rect">
             <a:avLst/>
@@ -777,7 +777,7 @@
         <p:spPr>
           <a:xfrm>
             <a:off x="685800" y="4343400"/>
-            <a:ext cx="5484240" cy="4112640"/>
+            <a:ext cx="5483880" cy="4112280"/>
           </a:xfrm>
           <a:prstGeom prst="rect">
             <a:avLst/>
@@ -808,7 +808,7 @@
               </a:rPr>
               <a:t>Participants add the sequence information to their concept map graphic organizer</a:t>
             </a:r>
-            <a:endParaRPr b="0" lang="en-HK" sz="1100" spc="-1" strike="noStrike">
+            <a:endParaRPr b="0" lang="en-US" sz="1100" spc="-1" strike="noStrike">
               <a:latin typeface="Arial"/>
             </a:endParaRPr>
           </a:p>
@@ -829,7 +829,7 @@
               </a:rPr>
               <a:t>One example: pictures for lower levels, area to write for higher levels</a:t>
             </a:r>
-            <a:endParaRPr b="0" lang="en-HK" sz="1100" spc="-1" strike="noStrike">
+            <a:endParaRPr b="0" lang="en-US" sz="1100" spc="-1" strike="noStrike">
               <a:latin typeface="Arial"/>
             </a:endParaRPr>
           </a:p>
@@ -843,7 +843,7 @@
                 <a:tab algn="l" pos="0"/>
               </a:tabLst>
             </a:pPr>
-            <a:endParaRPr b="0" lang="en-HK" sz="1100" spc="-1" strike="noStrike">
+            <a:endParaRPr b="0" lang="en-US" sz="1100" spc="-1" strike="noStrike">
               <a:latin typeface="Arial"/>
             </a:endParaRPr>
           </a:p>
@@ -884,7 +884,7 @@
         <p:spPr>
           <a:xfrm>
             <a:off x="381240" y="685800"/>
-            <a:ext cx="6093720" cy="3426840"/>
+            <a:ext cx="6093360" cy="3426480"/>
           </a:xfrm>
           <a:prstGeom prst="rect">
             <a:avLst/>
@@ -907,7 +907,7 @@
         <p:spPr>
           <a:xfrm>
             <a:off x="685800" y="4343400"/>
-            <a:ext cx="5484240" cy="4112640"/>
+            <a:ext cx="5483880" cy="4112280"/>
           </a:xfrm>
           <a:prstGeom prst="rect">
             <a:avLst/>
@@ -938,7 +938,7 @@
               </a:rPr>
               <a:t>Participants add story map information to graphic organizer</a:t>
             </a:r>
-            <a:endParaRPr b="0" lang="en-HK" sz="1100" spc="-1" strike="noStrike">
+            <a:endParaRPr b="0" lang="en-US" sz="1100" spc="-1" strike="noStrike">
               <a:latin typeface="Arial"/>
             </a:endParaRPr>
           </a:p>
@@ -959,7 +959,7 @@
               </a:rPr>
               <a:t>Discuss various parts of the story: character, setting, plot, conflict, resolution, falling action/end</a:t>
             </a:r>
-            <a:endParaRPr b="0" lang="en-HK" sz="1100" spc="-1" strike="noStrike">
+            <a:endParaRPr b="0" lang="en-US" sz="1100" spc="-1" strike="noStrike">
               <a:latin typeface="Arial"/>
             </a:endParaRPr>
           </a:p>
@@ -980,7 +980,7 @@
               </a:rPr>
               <a:t>Pictures or words can be used by students</a:t>
             </a:r>
-            <a:endParaRPr b="0" lang="en-HK" sz="1100" spc="-1" strike="noStrike">
+            <a:endParaRPr b="0" lang="en-US" sz="1100" spc="-1" strike="noStrike">
               <a:latin typeface="Arial"/>
             </a:endParaRPr>
           </a:p>
@@ -1022,7 +1022,7 @@
         <p:txBody>
           <a:bodyPr/>
           <a:p>
-            <a:fld id="{44CF30A6-FB07-4DBC-84B1-9A090B76154E}" type="slidenum">
+            <a:fld id="{443768F6-502E-4FB9-ACCD-7FFD98181D41}" type="slidenum">
               <a:t>&lt;#&gt;</a:t>
             </a:fld>
           </a:p>
@@ -1081,7 +1081,7 @@
             <a:pPr algn="ctr">
               <a:buNone/>
             </a:pPr>
-            <a:endParaRPr b="0" lang="en-HK" sz="4400" spc="-1" strike="noStrike">
+            <a:endParaRPr b="0" lang="en-US" sz="4400" spc="-1" strike="noStrike">
               <a:latin typeface="Arial"/>
             </a:endParaRPr>
           </a:p>
@@ -1115,7 +1115,7 @@
             <a:normAutofit/>
           </a:bodyPr>
           <a:p>
-            <a:endParaRPr b="0" lang="en-HK" sz="3200" spc="-1" strike="noStrike">
+            <a:endParaRPr b="0" lang="en-US" sz="3200" spc="-1" strike="noStrike">
               <a:latin typeface="Arial"/>
             </a:endParaRPr>
           </a:p>
@@ -1149,7 +1149,7 @@
             <a:normAutofit/>
           </a:bodyPr>
           <a:p>
-            <a:endParaRPr b="0" lang="en-HK" sz="3200" spc="-1" strike="noStrike">
+            <a:endParaRPr b="0" lang="en-US" sz="3200" spc="-1" strike="noStrike">
               <a:latin typeface="Arial"/>
             </a:endParaRPr>
           </a:p>
@@ -1169,7 +1169,7 @@
         <p:txBody>
           <a:bodyPr/>
           <a:p>
-            <a:fld id="{CC7C7044-8C1C-4F7D-A5A1-98468541126C}" type="slidenum">
+            <a:fld id="{C9053521-15C4-4D7F-B8A9-D26B1D35F152}" type="slidenum">
               <a:t>&lt;#&gt;</a:t>
             </a:fld>
           </a:p>
@@ -1228,7 +1228,7 @@
             <a:pPr algn="ctr">
               <a:buNone/>
             </a:pPr>
-            <a:endParaRPr b="0" lang="en-HK" sz="4400" spc="-1" strike="noStrike">
+            <a:endParaRPr b="0" lang="en-US" sz="4400" spc="-1" strike="noStrike">
               <a:latin typeface="Arial"/>
             </a:endParaRPr>
           </a:p>
@@ -1262,7 +1262,7 @@
             <a:normAutofit/>
           </a:bodyPr>
           <a:p>
-            <a:endParaRPr b="0" lang="en-HK" sz="3200" spc="-1" strike="noStrike">
+            <a:endParaRPr b="0" lang="en-US" sz="3200" spc="-1" strike="noStrike">
               <a:latin typeface="Arial"/>
             </a:endParaRPr>
           </a:p>
@@ -1296,7 +1296,7 @@
             <a:normAutofit/>
           </a:bodyPr>
           <a:p>
-            <a:endParaRPr b="0" lang="en-HK" sz="3200" spc="-1" strike="noStrike">
+            <a:endParaRPr b="0" lang="en-US" sz="3200" spc="-1" strike="noStrike">
               <a:latin typeface="Arial"/>
             </a:endParaRPr>
           </a:p>
@@ -1330,7 +1330,7 @@
             <a:normAutofit/>
           </a:bodyPr>
           <a:p>
-            <a:endParaRPr b="0" lang="en-HK" sz="3200" spc="-1" strike="noStrike">
+            <a:endParaRPr b="0" lang="en-US" sz="3200" spc="-1" strike="noStrike">
               <a:latin typeface="Arial"/>
             </a:endParaRPr>
           </a:p>
@@ -1364,7 +1364,7 @@
             <a:normAutofit/>
           </a:bodyPr>
           <a:p>
-            <a:endParaRPr b="0" lang="en-HK" sz="3200" spc="-1" strike="noStrike">
+            <a:endParaRPr b="0" lang="en-US" sz="3200" spc="-1" strike="noStrike">
               <a:latin typeface="Arial"/>
             </a:endParaRPr>
           </a:p>
@@ -1384,7 +1384,7 @@
         <p:txBody>
           <a:bodyPr/>
           <a:p>
-            <a:fld id="{D9FF6474-6DD8-4C91-B8EA-2B3EE327CAA9}" type="slidenum">
+            <a:fld id="{496C709A-0357-49D1-BA01-792D80C317DF}" type="slidenum">
               <a:t>&lt;#&gt;</a:t>
             </a:fld>
           </a:p>
@@ -1443,7 +1443,7 @@
             <a:pPr algn="ctr">
               <a:buNone/>
             </a:pPr>
-            <a:endParaRPr b="0" lang="en-HK" sz="4400" spc="-1" strike="noStrike">
+            <a:endParaRPr b="0" lang="en-US" sz="4400" spc="-1" strike="noStrike">
               <a:latin typeface="Arial"/>
             </a:endParaRPr>
           </a:p>
@@ -1477,7 +1477,7 @@
             <a:normAutofit/>
           </a:bodyPr>
           <a:p>
-            <a:endParaRPr b="0" lang="en-HK" sz="3200" spc="-1" strike="noStrike">
+            <a:endParaRPr b="0" lang="en-US" sz="3200" spc="-1" strike="noStrike">
               <a:latin typeface="Arial"/>
             </a:endParaRPr>
           </a:p>
@@ -1511,7 +1511,7 @@
             <a:normAutofit/>
           </a:bodyPr>
           <a:p>
-            <a:endParaRPr b="0" lang="en-HK" sz="3200" spc="-1" strike="noStrike">
+            <a:endParaRPr b="0" lang="en-US" sz="3200" spc="-1" strike="noStrike">
               <a:latin typeface="Arial"/>
             </a:endParaRPr>
           </a:p>
@@ -1545,7 +1545,7 @@
             <a:normAutofit/>
           </a:bodyPr>
           <a:p>
-            <a:endParaRPr b="0" lang="en-HK" sz="3200" spc="-1" strike="noStrike">
+            <a:endParaRPr b="0" lang="en-US" sz="3200" spc="-1" strike="noStrike">
               <a:latin typeface="Arial"/>
             </a:endParaRPr>
           </a:p>
@@ -1579,7 +1579,7 @@
             <a:normAutofit/>
           </a:bodyPr>
           <a:p>
-            <a:endParaRPr b="0" lang="en-HK" sz="3200" spc="-1" strike="noStrike">
+            <a:endParaRPr b="0" lang="en-US" sz="3200" spc="-1" strike="noStrike">
               <a:latin typeface="Arial"/>
             </a:endParaRPr>
           </a:p>
@@ -1613,7 +1613,7 @@
             <a:normAutofit/>
           </a:bodyPr>
           <a:p>
-            <a:endParaRPr b="0" lang="en-HK" sz="3200" spc="-1" strike="noStrike">
+            <a:endParaRPr b="0" lang="en-US" sz="3200" spc="-1" strike="noStrike">
               <a:latin typeface="Arial"/>
             </a:endParaRPr>
           </a:p>
@@ -1647,7 +1647,7 @@
             <a:normAutofit/>
           </a:bodyPr>
           <a:p>
-            <a:endParaRPr b="0" lang="en-HK" sz="3200" spc="-1" strike="noStrike">
+            <a:endParaRPr b="0" lang="en-US" sz="3200" spc="-1" strike="noStrike">
               <a:latin typeface="Arial"/>
             </a:endParaRPr>
           </a:p>
@@ -1667,7 +1667,7 @@
         <p:txBody>
           <a:bodyPr/>
           <a:p>
-            <a:fld id="{2B6C2A9E-25AE-4E58-9DAA-2DCE4D51B9F3}" type="slidenum">
+            <a:fld id="{826529F9-6BA7-42BD-8847-14FDC3561B24}" type="slidenum">
               <a:t>&lt;#&gt;</a:t>
             </a:fld>
           </a:p>
@@ -1709,7 +1709,7 @@
         <p:txBody>
           <a:bodyPr/>
           <a:p>
-            <a:fld id="{C0893844-F420-4AF1-94D0-53D73BCBF537}" type="slidenum">
+            <a:fld id="{8E0A07A3-9F83-4BCE-B62A-5ECFA41092DE}" type="slidenum">
               <a:t>&lt;#&gt;</a:t>
             </a:fld>
           </a:p>
@@ -1768,7 +1768,7 @@
             <a:pPr algn="ctr">
               <a:buNone/>
             </a:pPr>
-            <a:endParaRPr b="0" lang="en-HK" sz="4400" spc="-1" strike="noStrike">
+            <a:endParaRPr b="0" lang="en-US" sz="4400" spc="-1" strike="noStrike">
               <a:latin typeface="Arial"/>
             </a:endParaRPr>
           </a:p>
@@ -1805,7 +1805,7 @@
             <a:pPr algn="ctr">
               <a:buNone/>
             </a:pPr>
-            <a:endParaRPr b="0" lang="en-HK" sz="3200" spc="-1" strike="noStrike">
+            <a:endParaRPr b="0" lang="en-US" sz="3200" spc="-1" strike="noStrike">
               <a:latin typeface="Arial"/>
             </a:endParaRPr>
           </a:p>
@@ -1825,7 +1825,7 @@
         <p:txBody>
           <a:bodyPr/>
           <a:p>
-            <a:fld id="{3960498F-11DC-4804-8575-196D86C310A5}" type="slidenum">
+            <a:fld id="{81ABEBB7-59D1-4DF8-9762-98E61AF09E70}" type="slidenum">
               <a:t>&lt;#&gt;</a:t>
             </a:fld>
           </a:p>
@@ -1884,7 +1884,7 @@
             <a:pPr algn="ctr">
               <a:buNone/>
             </a:pPr>
-            <a:endParaRPr b="0" lang="en-HK" sz="4400" spc="-1" strike="noStrike">
+            <a:endParaRPr b="0" lang="en-US" sz="4400" spc="-1" strike="noStrike">
               <a:latin typeface="Arial"/>
             </a:endParaRPr>
           </a:p>
@@ -1918,7 +1918,7 @@
             <a:normAutofit/>
           </a:bodyPr>
           <a:p>
-            <a:endParaRPr b="0" lang="en-HK" sz="3200" spc="-1" strike="noStrike">
+            <a:endParaRPr b="0" lang="en-US" sz="3200" spc="-1" strike="noStrike">
               <a:latin typeface="Arial"/>
             </a:endParaRPr>
           </a:p>
@@ -1938,7 +1938,7 @@
         <p:txBody>
           <a:bodyPr/>
           <a:p>
-            <a:fld id="{1530905A-0DB5-4673-A8D9-9560A97A5FA5}" type="slidenum">
+            <a:fld id="{B45B2F7C-B80B-4A8E-8D2B-9C7B33A0EA09}" type="slidenum">
               <a:t>&lt;#&gt;</a:t>
             </a:fld>
           </a:p>
@@ -1997,7 +1997,7 @@
             <a:pPr algn="ctr">
               <a:buNone/>
             </a:pPr>
-            <a:endParaRPr b="0" lang="en-HK" sz="4400" spc="-1" strike="noStrike">
+            <a:endParaRPr b="0" lang="en-US" sz="4400" spc="-1" strike="noStrike">
               <a:latin typeface="Arial"/>
             </a:endParaRPr>
           </a:p>
@@ -2031,7 +2031,7 @@
             <a:normAutofit/>
           </a:bodyPr>
           <a:p>
-            <a:endParaRPr b="0" lang="en-HK" sz="3200" spc="-1" strike="noStrike">
+            <a:endParaRPr b="0" lang="en-US" sz="3200" spc="-1" strike="noStrike">
               <a:latin typeface="Arial"/>
             </a:endParaRPr>
           </a:p>
@@ -2065,7 +2065,7 @@
             <a:normAutofit/>
           </a:bodyPr>
           <a:p>
-            <a:endParaRPr b="0" lang="en-HK" sz="3200" spc="-1" strike="noStrike">
+            <a:endParaRPr b="0" lang="en-US" sz="3200" spc="-1" strike="noStrike">
               <a:latin typeface="Arial"/>
             </a:endParaRPr>
           </a:p>
@@ -2085,7 +2085,7 @@
         <p:txBody>
           <a:bodyPr/>
           <a:p>
-            <a:fld id="{1F67DBD9-4C68-4722-AD89-5B6502DD684A}" type="slidenum">
+            <a:fld id="{069EF1ED-5B39-4C33-B29E-FD07D99FCBD9}" type="slidenum">
               <a:t>&lt;#&gt;</a:t>
             </a:fld>
           </a:p>
@@ -2144,7 +2144,7 @@
             <a:pPr algn="ctr">
               <a:buNone/>
             </a:pPr>
-            <a:endParaRPr b="0" lang="en-HK" sz="4400" spc="-1" strike="noStrike">
+            <a:endParaRPr b="0" lang="en-US" sz="4400" spc="-1" strike="noStrike">
               <a:latin typeface="Arial"/>
             </a:endParaRPr>
           </a:p>
@@ -2164,7 +2164,7 @@
         <p:txBody>
           <a:bodyPr/>
           <a:p>
-            <a:fld id="{0697E33F-A6AF-4D53-B543-CD89B56E02E8}" type="slidenum">
+            <a:fld id="{87417AF5-85DF-4FA8-8907-82D4996524FF}" type="slidenum">
               <a:t>&lt;#&gt;</a:t>
             </a:fld>
           </a:p>
@@ -2223,7 +2223,7 @@
             <a:pPr algn="ctr">
               <a:buNone/>
             </a:pPr>
-            <a:endParaRPr b="0" lang="en-HK" sz="3200" spc="-1" strike="noStrike">
+            <a:endParaRPr b="0" lang="en-US" sz="3200" spc="-1" strike="noStrike">
               <a:latin typeface="Arial"/>
             </a:endParaRPr>
           </a:p>
@@ -2243,7 +2243,7 @@
         <p:txBody>
           <a:bodyPr/>
           <a:p>
-            <a:fld id="{4CEC82D7-C9E2-40BC-96A4-1C04D896E763}" type="slidenum">
+            <a:fld id="{389C3CEB-F4E5-4DD0-BB24-961ABAE423AE}" type="slidenum">
               <a:t>&lt;#&gt;</a:t>
             </a:fld>
           </a:p>
@@ -2302,7 +2302,7 @@
             <a:pPr algn="ctr">
               <a:buNone/>
             </a:pPr>
-            <a:endParaRPr b="0" lang="en-HK" sz="4400" spc="-1" strike="noStrike">
+            <a:endParaRPr b="0" lang="en-US" sz="4400" spc="-1" strike="noStrike">
               <a:latin typeface="Arial"/>
             </a:endParaRPr>
           </a:p>
@@ -2336,7 +2336,7 @@
             <a:normAutofit/>
           </a:bodyPr>
           <a:p>
-            <a:endParaRPr b="0" lang="en-HK" sz="3200" spc="-1" strike="noStrike">
+            <a:endParaRPr b="0" lang="en-US" sz="3200" spc="-1" strike="noStrike">
               <a:latin typeface="Arial"/>
             </a:endParaRPr>
           </a:p>
@@ -2370,7 +2370,7 @@
             <a:normAutofit/>
           </a:bodyPr>
           <a:p>
-            <a:endParaRPr b="0" lang="en-HK" sz="3200" spc="-1" strike="noStrike">
+            <a:endParaRPr b="0" lang="en-US" sz="3200" spc="-1" strike="noStrike">
               <a:latin typeface="Arial"/>
             </a:endParaRPr>
           </a:p>
@@ -2404,7 +2404,7 @@
             <a:normAutofit/>
           </a:bodyPr>
           <a:p>
-            <a:endParaRPr b="0" lang="en-HK" sz="3200" spc="-1" strike="noStrike">
+            <a:endParaRPr b="0" lang="en-US" sz="3200" spc="-1" strike="noStrike">
               <a:latin typeface="Arial"/>
             </a:endParaRPr>
           </a:p>
@@ -2424,7 +2424,7 @@
         <p:txBody>
           <a:bodyPr/>
           <a:p>
-            <a:fld id="{A515A172-3EA7-4C07-945E-6CC38A3241DB}" type="slidenum">
+            <a:fld id="{472A84A3-B328-44F6-8CE7-74C41F54F107}" type="slidenum">
               <a:t>&lt;#&gt;</a:t>
             </a:fld>
           </a:p>
@@ -2483,7 +2483,7 @@
             <a:pPr algn="ctr">
               <a:buNone/>
             </a:pPr>
-            <a:endParaRPr b="0" lang="en-HK" sz="4400" spc="-1" strike="noStrike">
+            <a:endParaRPr b="0" lang="en-US" sz="4400" spc="-1" strike="noStrike">
               <a:latin typeface="Arial"/>
             </a:endParaRPr>
           </a:p>
@@ -2520,7 +2520,7 @@
             <a:pPr algn="ctr">
               <a:buNone/>
             </a:pPr>
-            <a:endParaRPr b="0" lang="en-HK" sz="3200" spc="-1" strike="noStrike">
+            <a:endParaRPr b="0" lang="en-US" sz="3200" spc="-1" strike="noStrike">
               <a:latin typeface="Arial"/>
             </a:endParaRPr>
           </a:p>
@@ -2540,7 +2540,7 @@
         <p:txBody>
           <a:bodyPr/>
           <a:p>
-            <a:fld id="{DD9DB037-F642-4561-B8A9-D7479ECD0C57}" type="slidenum">
+            <a:fld id="{C3887C20-4425-45D0-9243-679A05B82743}" type="slidenum">
               <a:t>&lt;#&gt;</a:t>
             </a:fld>
           </a:p>
@@ -2599,7 +2599,7 @@
             <a:pPr algn="ctr">
               <a:buNone/>
             </a:pPr>
-            <a:endParaRPr b="0" lang="en-HK" sz="4400" spc="-1" strike="noStrike">
+            <a:endParaRPr b="0" lang="en-US" sz="4400" spc="-1" strike="noStrike">
               <a:latin typeface="Arial"/>
             </a:endParaRPr>
           </a:p>
@@ -2633,7 +2633,7 @@
             <a:normAutofit/>
           </a:bodyPr>
           <a:p>
-            <a:endParaRPr b="0" lang="en-HK" sz="3200" spc="-1" strike="noStrike">
+            <a:endParaRPr b="0" lang="en-US" sz="3200" spc="-1" strike="noStrike">
               <a:latin typeface="Arial"/>
             </a:endParaRPr>
           </a:p>
@@ -2667,7 +2667,7 @@
             <a:normAutofit/>
           </a:bodyPr>
           <a:p>
-            <a:endParaRPr b="0" lang="en-HK" sz="3200" spc="-1" strike="noStrike">
+            <a:endParaRPr b="0" lang="en-US" sz="3200" spc="-1" strike="noStrike">
               <a:latin typeface="Arial"/>
             </a:endParaRPr>
           </a:p>
@@ -2701,7 +2701,7 @@
             <a:normAutofit/>
           </a:bodyPr>
           <a:p>
-            <a:endParaRPr b="0" lang="en-HK" sz="3200" spc="-1" strike="noStrike">
+            <a:endParaRPr b="0" lang="en-US" sz="3200" spc="-1" strike="noStrike">
               <a:latin typeface="Arial"/>
             </a:endParaRPr>
           </a:p>
@@ -2721,7 +2721,7 @@
         <p:txBody>
           <a:bodyPr/>
           <a:p>
-            <a:fld id="{D28F2D49-FD92-4B21-9DE3-A05481B1D704}" type="slidenum">
+            <a:fld id="{C3C1E90B-E291-4FE0-923B-EA60690CDE7B}" type="slidenum">
               <a:t>&lt;#&gt;</a:t>
             </a:fld>
           </a:p>
@@ -2780,7 +2780,7 @@
             <a:pPr algn="ctr">
               <a:buNone/>
             </a:pPr>
-            <a:endParaRPr b="0" lang="en-HK" sz="4400" spc="-1" strike="noStrike">
+            <a:endParaRPr b="0" lang="en-US" sz="4400" spc="-1" strike="noStrike">
               <a:latin typeface="Arial"/>
             </a:endParaRPr>
           </a:p>
@@ -2814,7 +2814,7 @@
             <a:normAutofit/>
           </a:bodyPr>
           <a:p>
-            <a:endParaRPr b="0" lang="en-HK" sz="3200" spc="-1" strike="noStrike">
+            <a:endParaRPr b="0" lang="en-US" sz="3200" spc="-1" strike="noStrike">
               <a:latin typeface="Arial"/>
             </a:endParaRPr>
           </a:p>
@@ -2848,7 +2848,7 @@
             <a:normAutofit/>
           </a:bodyPr>
           <a:p>
-            <a:endParaRPr b="0" lang="en-HK" sz="3200" spc="-1" strike="noStrike">
+            <a:endParaRPr b="0" lang="en-US" sz="3200" spc="-1" strike="noStrike">
               <a:latin typeface="Arial"/>
             </a:endParaRPr>
           </a:p>
@@ -2882,7 +2882,7 @@
             <a:normAutofit/>
           </a:bodyPr>
           <a:p>
-            <a:endParaRPr b="0" lang="en-HK" sz="3200" spc="-1" strike="noStrike">
+            <a:endParaRPr b="0" lang="en-US" sz="3200" spc="-1" strike="noStrike">
               <a:latin typeface="Arial"/>
             </a:endParaRPr>
           </a:p>
@@ -2902,7 +2902,7 @@
         <p:txBody>
           <a:bodyPr/>
           <a:p>
-            <a:fld id="{7501D255-005E-49A3-947C-206D734B649C}" type="slidenum">
+            <a:fld id="{073DAC05-88B5-41EB-A95A-B71686A325FD}" type="slidenum">
               <a:t>&lt;#&gt;</a:t>
             </a:fld>
           </a:p>
@@ -2961,7 +2961,7 @@
             <a:pPr algn="ctr">
               <a:buNone/>
             </a:pPr>
-            <a:endParaRPr b="0" lang="en-HK" sz="4400" spc="-1" strike="noStrike">
+            <a:endParaRPr b="0" lang="en-US" sz="4400" spc="-1" strike="noStrike">
               <a:latin typeface="Arial"/>
             </a:endParaRPr>
           </a:p>
@@ -2995,7 +2995,7 @@
             <a:normAutofit/>
           </a:bodyPr>
           <a:p>
-            <a:endParaRPr b="0" lang="en-HK" sz="3200" spc="-1" strike="noStrike">
+            <a:endParaRPr b="0" lang="en-US" sz="3200" spc="-1" strike="noStrike">
               <a:latin typeface="Arial"/>
             </a:endParaRPr>
           </a:p>
@@ -3029,7 +3029,7 @@
             <a:normAutofit/>
           </a:bodyPr>
           <a:p>
-            <a:endParaRPr b="0" lang="en-HK" sz="3200" spc="-1" strike="noStrike">
+            <a:endParaRPr b="0" lang="en-US" sz="3200" spc="-1" strike="noStrike">
               <a:latin typeface="Arial"/>
             </a:endParaRPr>
           </a:p>
@@ -3049,7 +3049,7 @@
         <p:txBody>
           <a:bodyPr/>
           <a:p>
-            <a:fld id="{6CDCCDF2-D2DD-44AF-BD5E-6AC98AC57DFD}" type="slidenum">
+            <a:fld id="{CAA2716F-F793-40FE-A63A-14281ACEEEF8}" type="slidenum">
               <a:t>&lt;#&gt;</a:t>
             </a:fld>
           </a:p>
@@ -3108,7 +3108,7 @@
             <a:pPr algn="ctr">
               <a:buNone/>
             </a:pPr>
-            <a:endParaRPr b="0" lang="en-HK" sz="4400" spc="-1" strike="noStrike">
+            <a:endParaRPr b="0" lang="en-US" sz="4400" spc="-1" strike="noStrike">
               <a:latin typeface="Arial"/>
             </a:endParaRPr>
           </a:p>
@@ -3142,7 +3142,7 @@
             <a:normAutofit/>
           </a:bodyPr>
           <a:p>
-            <a:endParaRPr b="0" lang="en-HK" sz="3200" spc="-1" strike="noStrike">
+            <a:endParaRPr b="0" lang="en-US" sz="3200" spc="-1" strike="noStrike">
               <a:latin typeface="Arial"/>
             </a:endParaRPr>
           </a:p>
@@ -3176,7 +3176,7 @@
             <a:normAutofit/>
           </a:bodyPr>
           <a:p>
-            <a:endParaRPr b="0" lang="en-HK" sz="3200" spc="-1" strike="noStrike">
+            <a:endParaRPr b="0" lang="en-US" sz="3200" spc="-1" strike="noStrike">
               <a:latin typeface="Arial"/>
             </a:endParaRPr>
           </a:p>
@@ -3210,7 +3210,7 @@
             <a:normAutofit/>
           </a:bodyPr>
           <a:p>
-            <a:endParaRPr b="0" lang="en-HK" sz="3200" spc="-1" strike="noStrike">
+            <a:endParaRPr b="0" lang="en-US" sz="3200" spc="-1" strike="noStrike">
               <a:latin typeface="Arial"/>
             </a:endParaRPr>
           </a:p>
@@ -3244,7 +3244,7 @@
             <a:normAutofit/>
           </a:bodyPr>
           <a:p>
-            <a:endParaRPr b="0" lang="en-HK" sz="3200" spc="-1" strike="noStrike">
+            <a:endParaRPr b="0" lang="en-US" sz="3200" spc="-1" strike="noStrike">
               <a:latin typeface="Arial"/>
             </a:endParaRPr>
           </a:p>
@@ -3264,7 +3264,7 @@
         <p:txBody>
           <a:bodyPr/>
           <a:p>
-            <a:fld id="{DF566A50-5891-4B56-B806-DAD40EAF0BDD}" type="slidenum">
+            <a:fld id="{0B09EC62-6922-4062-A1B9-2316457FD71C}" type="slidenum">
               <a:t>&lt;#&gt;</a:t>
             </a:fld>
           </a:p>
@@ -3323,7 +3323,7 @@
             <a:pPr algn="ctr">
               <a:buNone/>
             </a:pPr>
-            <a:endParaRPr b="0" lang="en-HK" sz="4400" spc="-1" strike="noStrike">
+            <a:endParaRPr b="0" lang="en-US" sz="4400" spc="-1" strike="noStrike">
               <a:latin typeface="Arial"/>
             </a:endParaRPr>
           </a:p>
@@ -3357,7 +3357,7 @@
             <a:normAutofit/>
           </a:bodyPr>
           <a:p>
-            <a:endParaRPr b="0" lang="en-HK" sz="3200" spc="-1" strike="noStrike">
+            <a:endParaRPr b="0" lang="en-US" sz="3200" spc="-1" strike="noStrike">
               <a:latin typeface="Arial"/>
             </a:endParaRPr>
           </a:p>
@@ -3391,7 +3391,7 @@
             <a:normAutofit/>
           </a:bodyPr>
           <a:p>
-            <a:endParaRPr b="0" lang="en-HK" sz="3200" spc="-1" strike="noStrike">
+            <a:endParaRPr b="0" lang="en-US" sz="3200" spc="-1" strike="noStrike">
               <a:latin typeface="Arial"/>
             </a:endParaRPr>
           </a:p>
@@ -3425,7 +3425,7 @@
             <a:normAutofit/>
           </a:bodyPr>
           <a:p>
-            <a:endParaRPr b="0" lang="en-HK" sz="3200" spc="-1" strike="noStrike">
+            <a:endParaRPr b="0" lang="en-US" sz="3200" spc="-1" strike="noStrike">
               <a:latin typeface="Arial"/>
             </a:endParaRPr>
           </a:p>
@@ -3459,7 +3459,7 @@
             <a:normAutofit/>
           </a:bodyPr>
           <a:p>
-            <a:endParaRPr b="0" lang="en-HK" sz="3200" spc="-1" strike="noStrike">
+            <a:endParaRPr b="0" lang="en-US" sz="3200" spc="-1" strike="noStrike">
               <a:latin typeface="Arial"/>
             </a:endParaRPr>
           </a:p>
@@ -3493,7 +3493,7 @@
             <a:normAutofit/>
           </a:bodyPr>
           <a:p>
-            <a:endParaRPr b="0" lang="en-HK" sz="3200" spc="-1" strike="noStrike">
+            <a:endParaRPr b="0" lang="en-US" sz="3200" spc="-1" strike="noStrike">
               <a:latin typeface="Arial"/>
             </a:endParaRPr>
           </a:p>
@@ -3527,7 +3527,7 @@
             <a:normAutofit/>
           </a:bodyPr>
           <a:p>
-            <a:endParaRPr b="0" lang="en-HK" sz="3200" spc="-1" strike="noStrike">
+            <a:endParaRPr b="0" lang="en-US" sz="3200" spc="-1" strike="noStrike">
               <a:latin typeface="Arial"/>
             </a:endParaRPr>
           </a:p>
@@ -3547,7 +3547,7 @@
         <p:txBody>
           <a:bodyPr/>
           <a:p>
-            <a:fld id="{15D6CAAE-2CB6-470A-BB6D-A025DAE345EA}" type="slidenum">
+            <a:fld id="{3D23563C-13B2-4B95-BE34-5EAF678F5D50}" type="slidenum">
               <a:t>&lt;#&gt;</a:t>
             </a:fld>
           </a:p>
@@ -3609,7 +3609,7 @@
         <p:txBody>
           <a:bodyPr/>
           <a:p>
-            <a:fld id="{D557D868-2EEE-4461-9CC9-AF53C919DADC}" type="slidenum">
+            <a:fld id="{21FAFD35-CB55-418C-8ACD-C8D1E5C976E5}" type="slidenum">
               <a:t>&lt;#&gt;</a:t>
             </a:fld>
           </a:p>
@@ -3630,7 +3630,7 @@
           <a:bodyPr/>
           <a:p>
             <a:r>
-              <a:rPr lang="en-HK"/>
+              <a:rPr lang="en-US"/>
               <a:t/>
             </a:r>
           </a:p>
@@ -3689,7 +3689,7 @@
             <a:pPr algn="ctr">
               <a:buNone/>
             </a:pPr>
-            <a:endParaRPr b="0" lang="en-HK" sz="4400" spc="-1" strike="noStrike">
+            <a:endParaRPr b="0" lang="en-US" sz="4400" spc="-1" strike="noStrike">
               <a:latin typeface="Arial"/>
             </a:endParaRPr>
           </a:p>
@@ -3726,7 +3726,7 @@
             <a:pPr algn="ctr">
               <a:buNone/>
             </a:pPr>
-            <a:endParaRPr b="0" lang="en-HK" sz="3200" spc="-1" strike="noStrike">
+            <a:endParaRPr b="0" lang="en-US" sz="3200" spc="-1" strike="noStrike">
               <a:latin typeface="Arial"/>
             </a:endParaRPr>
           </a:p>
@@ -3766,7 +3766,7 @@
         <p:txBody>
           <a:bodyPr/>
           <a:p>
-            <a:fld id="{F604C3DF-B525-4161-B396-D01DE32D5752}" type="slidenum">
+            <a:fld id="{1B1B9F16-D863-45F9-B565-7C363922C301}" type="slidenum">
               <a:t>&lt;#&gt;</a:t>
             </a:fld>
           </a:p>
@@ -3787,7 +3787,7 @@
           <a:bodyPr/>
           <a:p>
             <a:r>
-              <a:rPr lang="en-HK"/>
+              <a:rPr lang="en-US"/>
               <a:t/>
             </a:r>
           </a:p>
@@ -3846,7 +3846,7 @@
             <a:pPr algn="ctr">
               <a:buNone/>
             </a:pPr>
-            <a:endParaRPr b="0" lang="en-HK" sz="4400" spc="-1" strike="noStrike">
+            <a:endParaRPr b="0" lang="en-US" sz="4400" spc="-1" strike="noStrike">
               <a:latin typeface="Arial"/>
             </a:endParaRPr>
           </a:p>
@@ -3880,7 +3880,7 @@
             <a:normAutofit/>
           </a:bodyPr>
           <a:p>
-            <a:endParaRPr b="0" lang="en-HK" sz="3200" spc="-1" strike="noStrike">
+            <a:endParaRPr b="0" lang="en-US" sz="3200" spc="-1" strike="noStrike">
               <a:latin typeface="Arial"/>
             </a:endParaRPr>
           </a:p>
@@ -3920,7 +3920,7 @@
         <p:txBody>
           <a:bodyPr/>
           <a:p>
-            <a:fld id="{96AEB0B1-4922-4738-9555-E6B03E59EEE9}" type="slidenum">
+            <a:fld id="{9066F552-85EE-4DFE-8476-274DFAC8589D}" type="slidenum">
               <a:t>&lt;#&gt;</a:t>
             </a:fld>
           </a:p>
@@ -3941,7 +3941,7 @@
           <a:bodyPr/>
           <a:p>
             <a:r>
-              <a:rPr lang="en-HK"/>
+              <a:rPr lang="en-US"/>
               <a:t/>
             </a:r>
           </a:p>
@@ -4000,7 +4000,7 @@
             <a:pPr algn="ctr">
               <a:buNone/>
             </a:pPr>
-            <a:endParaRPr b="0" lang="en-HK" sz="4400" spc="-1" strike="noStrike">
+            <a:endParaRPr b="0" lang="en-US" sz="4400" spc="-1" strike="noStrike">
               <a:latin typeface="Arial"/>
             </a:endParaRPr>
           </a:p>
@@ -4034,7 +4034,7 @@
             <a:normAutofit/>
           </a:bodyPr>
           <a:p>
-            <a:endParaRPr b="0" lang="en-HK" sz="3200" spc="-1" strike="noStrike">
+            <a:endParaRPr b="0" lang="en-US" sz="3200" spc="-1" strike="noStrike">
               <a:latin typeface="Arial"/>
             </a:endParaRPr>
           </a:p>
@@ -4068,7 +4068,7 @@
             <a:normAutofit/>
           </a:bodyPr>
           <a:p>
-            <a:endParaRPr b="0" lang="en-HK" sz="3200" spc="-1" strike="noStrike">
+            <a:endParaRPr b="0" lang="en-US" sz="3200" spc="-1" strike="noStrike">
               <a:latin typeface="Arial"/>
             </a:endParaRPr>
           </a:p>
@@ -4108,7 +4108,7 @@
         <p:txBody>
           <a:bodyPr/>
           <a:p>
-            <a:fld id="{BD688D63-4D65-4F8E-AB99-0C2E02CAFC20}" type="slidenum">
+            <a:fld id="{02970E09-D5F0-42C3-A0E9-A144A853F19C}" type="slidenum">
               <a:t>&lt;#&gt;</a:t>
             </a:fld>
           </a:p>
@@ -4129,7 +4129,7 @@
           <a:bodyPr/>
           <a:p>
             <a:r>
-              <a:rPr lang="en-HK"/>
+              <a:rPr lang="en-US"/>
               <a:t/>
             </a:r>
           </a:p>
@@ -4188,7 +4188,7 @@
             <a:pPr algn="ctr">
               <a:buNone/>
             </a:pPr>
-            <a:endParaRPr b="0" lang="en-HK" sz="4400" spc="-1" strike="noStrike">
+            <a:endParaRPr b="0" lang="en-US" sz="4400" spc="-1" strike="noStrike">
               <a:latin typeface="Arial"/>
             </a:endParaRPr>
           </a:p>
@@ -4228,7 +4228,7 @@
         <p:txBody>
           <a:bodyPr/>
           <a:p>
-            <a:fld id="{6AB10676-7855-4D18-8FF3-A96AA02A9EFB}" type="slidenum">
+            <a:fld id="{AE866074-3314-4CE1-83E5-0497983F8B03}" type="slidenum">
               <a:t>&lt;#&gt;</a:t>
             </a:fld>
           </a:p>
@@ -4249,7 +4249,7 @@
           <a:bodyPr/>
           <a:p>
             <a:r>
-              <a:rPr lang="en-HK"/>
+              <a:rPr lang="en-US"/>
               <a:t/>
             </a:r>
           </a:p>
@@ -4308,7 +4308,7 @@
             <a:pPr algn="ctr">
               <a:buNone/>
             </a:pPr>
-            <a:endParaRPr b="0" lang="en-HK" sz="4400" spc="-1" strike="noStrike">
+            <a:endParaRPr b="0" lang="en-US" sz="4400" spc="-1" strike="noStrike">
               <a:latin typeface="Arial"/>
             </a:endParaRPr>
           </a:p>
@@ -4342,7 +4342,7 @@
             <a:normAutofit/>
           </a:bodyPr>
           <a:p>
-            <a:endParaRPr b="0" lang="en-HK" sz="3200" spc="-1" strike="noStrike">
+            <a:endParaRPr b="0" lang="en-US" sz="3200" spc="-1" strike="noStrike">
               <a:latin typeface="Arial"/>
             </a:endParaRPr>
           </a:p>
@@ -4362,7 +4362,7 @@
         <p:txBody>
           <a:bodyPr/>
           <a:p>
-            <a:fld id="{63117777-887D-4F4C-AD81-C2AE694672EA}" type="slidenum">
+            <a:fld id="{0097AEA2-9DFB-49CA-84D2-E648D5B72490}" type="slidenum">
               <a:t>&lt;#&gt;</a:t>
             </a:fld>
           </a:p>
@@ -4421,7 +4421,7 @@
             <a:pPr algn="ctr">
               <a:buNone/>
             </a:pPr>
-            <a:endParaRPr b="0" lang="en-HK" sz="3200" spc="-1" strike="noStrike">
+            <a:endParaRPr b="0" lang="en-US" sz="3200" spc="-1" strike="noStrike">
               <a:latin typeface="Arial"/>
             </a:endParaRPr>
           </a:p>
@@ -4461,7 +4461,7 @@
         <p:txBody>
           <a:bodyPr/>
           <a:p>
-            <a:fld id="{26E525FF-E48E-48CC-B439-A64D233F23C3}" type="slidenum">
+            <a:fld id="{1CAAC2DE-7827-4CBC-8530-89A81D1FE44B}" type="slidenum">
               <a:t>&lt;#&gt;</a:t>
             </a:fld>
           </a:p>
@@ -4482,7 +4482,7 @@
           <a:bodyPr/>
           <a:p>
             <a:r>
-              <a:rPr lang="en-HK"/>
+              <a:rPr lang="en-US"/>
               <a:t/>
             </a:r>
           </a:p>
@@ -4541,7 +4541,7 @@
             <a:pPr algn="ctr">
               <a:buNone/>
             </a:pPr>
-            <a:endParaRPr b="0" lang="en-HK" sz="4400" spc="-1" strike="noStrike">
+            <a:endParaRPr b="0" lang="en-US" sz="4400" spc="-1" strike="noStrike">
               <a:latin typeface="Arial"/>
             </a:endParaRPr>
           </a:p>
@@ -4575,7 +4575,7 @@
             <a:normAutofit/>
           </a:bodyPr>
           <a:p>
-            <a:endParaRPr b="0" lang="en-HK" sz="3200" spc="-1" strike="noStrike">
+            <a:endParaRPr b="0" lang="en-US" sz="3200" spc="-1" strike="noStrike">
               <a:latin typeface="Arial"/>
             </a:endParaRPr>
           </a:p>
@@ -4609,7 +4609,7 @@
             <a:normAutofit/>
           </a:bodyPr>
           <a:p>
-            <a:endParaRPr b="0" lang="en-HK" sz="3200" spc="-1" strike="noStrike">
+            <a:endParaRPr b="0" lang="en-US" sz="3200" spc="-1" strike="noStrike">
               <a:latin typeface="Arial"/>
             </a:endParaRPr>
           </a:p>
@@ -4643,7 +4643,7 @@
             <a:normAutofit/>
           </a:bodyPr>
           <a:p>
-            <a:endParaRPr b="0" lang="en-HK" sz="3200" spc="-1" strike="noStrike">
+            <a:endParaRPr b="0" lang="en-US" sz="3200" spc="-1" strike="noStrike">
               <a:latin typeface="Arial"/>
             </a:endParaRPr>
           </a:p>
@@ -4683,7 +4683,7 @@
         <p:txBody>
           <a:bodyPr/>
           <a:p>
-            <a:fld id="{3AD0CD50-5339-4467-BA69-E6A1E57E38D5}" type="slidenum">
+            <a:fld id="{822A1C63-D305-4AAF-B4DA-FDAB69E376D0}" type="slidenum">
               <a:t>&lt;#&gt;</a:t>
             </a:fld>
           </a:p>
@@ -4704,7 +4704,7 @@
           <a:bodyPr/>
           <a:p>
             <a:r>
-              <a:rPr lang="en-HK"/>
+              <a:rPr lang="en-US"/>
               <a:t/>
             </a:r>
           </a:p>
@@ -4763,7 +4763,7 @@
             <a:pPr algn="ctr">
               <a:buNone/>
             </a:pPr>
-            <a:endParaRPr b="0" lang="en-HK" sz="4400" spc="-1" strike="noStrike">
+            <a:endParaRPr b="0" lang="en-US" sz="4400" spc="-1" strike="noStrike">
               <a:latin typeface="Arial"/>
             </a:endParaRPr>
           </a:p>
@@ -4797,7 +4797,7 @@
             <a:normAutofit/>
           </a:bodyPr>
           <a:p>
-            <a:endParaRPr b="0" lang="en-HK" sz="3200" spc="-1" strike="noStrike">
+            <a:endParaRPr b="0" lang="en-US" sz="3200" spc="-1" strike="noStrike">
               <a:latin typeface="Arial"/>
             </a:endParaRPr>
           </a:p>
@@ -4831,7 +4831,7 @@
             <a:normAutofit/>
           </a:bodyPr>
           <a:p>
-            <a:endParaRPr b="0" lang="en-HK" sz="3200" spc="-1" strike="noStrike">
+            <a:endParaRPr b="0" lang="en-US" sz="3200" spc="-1" strike="noStrike">
               <a:latin typeface="Arial"/>
             </a:endParaRPr>
           </a:p>
@@ -4865,7 +4865,7 @@
             <a:normAutofit/>
           </a:bodyPr>
           <a:p>
-            <a:endParaRPr b="0" lang="en-HK" sz="3200" spc="-1" strike="noStrike">
+            <a:endParaRPr b="0" lang="en-US" sz="3200" spc="-1" strike="noStrike">
               <a:latin typeface="Arial"/>
             </a:endParaRPr>
           </a:p>
@@ -4905,7 +4905,7 @@
         <p:txBody>
           <a:bodyPr/>
           <a:p>
-            <a:fld id="{EAB3A09D-FE2E-4DC3-96CC-56A3A1AB08D7}" type="slidenum">
+            <a:fld id="{3F4E893E-77D6-487D-B3F8-EB81B2C7E2D9}" type="slidenum">
               <a:t>&lt;#&gt;</a:t>
             </a:fld>
           </a:p>
@@ -4926,7 +4926,7 @@
           <a:bodyPr/>
           <a:p>
             <a:r>
-              <a:rPr lang="en-HK"/>
+              <a:rPr lang="en-US"/>
               <a:t/>
             </a:r>
           </a:p>
@@ -4985,7 +4985,7 @@
             <a:pPr algn="ctr">
               <a:buNone/>
             </a:pPr>
-            <a:endParaRPr b="0" lang="en-HK" sz="4400" spc="-1" strike="noStrike">
+            <a:endParaRPr b="0" lang="en-US" sz="4400" spc="-1" strike="noStrike">
               <a:latin typeface="Arial"/>
             </a:endParaRPr>
           </a:p>
@@ -5019,7 +5019,7 @@
             <a:normAutofit/>
           </a:bodyPr>
           <a:p>
-            <a:endParaRPr b="0" lang="en-HK" sz="3200" spc="-1" strike="noStrike">
+            <a:endParaRPr b="0" lang="en-US" sz="3200" spc="-1" strike="noStrike">
               <a:latin typeface="Arial"/>
             </a:endParaRPr>
           </a:p>
@@ -5053,7 +5053,7 @@
             <a:normAutofit/>
           </a:bodyPr>
           <a:p>
-            <a:endParaRPr b="0" lang="en-HK" sz="3200" spc="-1" strike="noStrike">
+            <a:endParaRPr b="0" lang="en-US" sz="3200" spc="-1" strike="noStrike">
               <a:latin typeface="Arial"/>
             </a:endParaRPr>
           </a:p>
@@ -5087,7 +5087,7 @@
             <a:normAutofit/>
           </a:bodyPr>
           <a:p>
-            <a:endParaRPr b="0" lang="en-HK" sz="3200" spc="-1" strike="noStrike">
+            <a:endParaRPr b="0" lang="en-US" sz="3200" spc="-1" strike="noStrike">
               <a:latin typeface="Arial"/>
             </a:endParaRPr>
           </a:p>
@@ -5127,7 +5127,7 @@
         <p:txBody>
           <a:bodyPr/>
           <a:p>
-            <a:fld id="{2658218E-00A6-4876-A43E-CE4935979F75}" type="slidenum">
+            <a:fld id="{A751473C-E60C-4A95-87EA-B96A2547E5A8}" type="slidenum">
               <a:t>&lt;#&gt;</a:t>
             </a:fld>
           </a:p>
@@ -5148,7 +5148,7 @@
           <a:bodyPr/>
           <a:p>
             <a:r>
-              <a:rPr lang="en-HK"/>
+              <a:rPr lang="en-US"/>
               <a:t/>
             </a:r>
           </a:p>
@@ -5207,7 +5207,7 @@
             <a:pPr algn="ctr">
               <a:buNone/>
             </a:pPr>
-            <a:endParaRPr b="0" lang="en-HK" sz="4400" spc="-1" strike="noStrike">
+            <a:endParaRPr b="0" lang="en-US" sz="4400" spc="-1" strike="noStrike">
               <a:latin typeface="Arial"/>
             </a:endParaRPr>
           </a:p>
@@ -5241,7 +5241,7 @@
             <a:normAutofit/>
           </a:bodyPr>
           <a:p>
-            <a:endParaRPr b="0" lang="en-HK" sz="3200" spc="-1" strike="noStrike">
+            <a:endParaRPr b="0" lang="en-US" sz="3200" spc="-1" strike="noStrike">
               <a:latin typeface="Arial"/>
             </a:endParaRPr>
           </a:p>
@@ -5275,7 +5275,7 @@
             <a:normAutofit/>
           </a:bodyPr>
           <a:p>
-            <a:endParaRPr b="0" lang="en-HK" sz="3200" spc="-1" strike="noStrike">
+            <a:endParaRPr b="0" lang="en-US" sz="3200" spc="-1" strike="noStrike">
               <a:latin typeface="Arial"/>
             </a:endParaRPr>
           </a:p>
@@ -5315,7 +5315,7 @@
         <p:txBody>
           <a:bodyPr/>
           <a:p>
-            <a:fld id="{B63D30B9-90F0-4E97-BD37-6975DD088838}" type="slidenum">
+            <a:fld id="{451B7909-3043-4FB8-BB68-FA759B5120BD}" type="slidenum">
               <a:t>&lt;#&gt;</a:t>
             </a:fld>
           </a:p>
@@ -5336,7 +5336,7 @@
           <a:bodyPr/>
           <a:p>
             <a:r>
-              <a:rPr lang="en-HK"/>
+              <a:rPr lang="en-US"/>
               <a:t/>
             </a:r>
           </a:p>
@@ -5395,7 +5395,7 @@
             <a:pPr algn="ctr">
               <a:buNone/>
             </a:pPr>
-            <a:endParaRPr b="0" lang="en-HK" sz="4400" spc="-1" strike="noStrike">
+            <a:endParaRPr b="0" lang="en-US" sz="4400" spc="-1" strike="noStrike">
               <a:latin typeface="Arial"/>
             </a:endParaRPr>
           </a:p>
@@ -5429,7 +5429,7 @@
             <a:normAutofit/>
           </a:bodyPr>
           <a:p>
-            <a:endParaRPr b="0" lang="en-HK" sz="3200" spc="-1" strike="noStrike">
+            <a:endParaRPr b="0" lang="en-US" sz="3200" spc="-1" strike="noStrike">
               <a:latin typeface="Arial"/>
             </a:endParaRPr>
           </a:p>
@@ -5463,7 +5463,7 @@
             <a:normAutofit/>
           </a:bodyPr>
           <a:p>
-            <a:endParaRPr b="0" lang="en-HK" sz="3200" spc="-1" strike="noStrike">
+            <a:endParaRPr b="0" lang="en-US" sz="3200" spc="-1" strike="noStrike">
               <a:latin typeface="Arial"/>
             </a:endParaRPr>
           </a:p>
@@ -5497,7 +5497,7 @@
             <a:normAutofit/>
           </a:bodyPr>
           <a:p>
-            <a:endParaRPr b="0" lang="en-HK" sz="3200" spc="-1" strike="noStrike">
+            <a:endParaRPr b="0" lang="en-US" sz="3200" spc="-1" strike="noStrike">
               <a:latin typeface="Arial"/>
             </a:endParaRPr>
           </a:p>
@@ -5531,7 +5531,7 @@
             <a:normAutofit/>
           </a:bodyPr>
           <a:p>
-            <a:endParaRPr b="0" lang="en-HK" sz="3200" spc="-1" strike="noStrike">
+            <a:endParaRPr b="0" lang="en-US" sz="3200" spc="-1" strike="noStrike">
               <a:latin typeface="Arial"/>
             </a:endParaRPr>
           </a:p>
@@ -5571,7 +5571,7 @@
         <p:txBody>
           <a:bodyPr/>
           <a:p>
-            <a:fld id="{3BAF7D90-FDB4-456B-9AB1-C1CCF7A0892E}" type="slidenum">
+            <a:fld id="{A513CE61-30EF-4D4A-806F-ED24324A72B7}" type="slidenum">
               <a:t>&lt;#&gt;</a:t>
             </a:fld>
           </a:p>
@@ -5592,7 +5592,7 @@
           <a:bodyPr/>
           <a:p>
             <a:r>
-              <a:rPr lang="en-HK"/>
+              <a:rPr lang="en-US"/>
               <a:t/>
             </a:r>
           </a:p>
@@ -5651,7 +5651,7 @@
             <a:pPr algn="ctr">
               <a:buNone/>
             </a:pPr>
-            <a:endParaRPr b="0" lang="en-HK" sz="4400" spc="-1" strike="noStrike">
+            <a:endParaRPr b="0" lang="en-US" sz="4400" spc="-1" strike="noStrike">
               <a:latin typeface="Arial"/>
             </a:endParaRPr>
           </a:p>
@@ -5685,7 +5685,7 @@
             <a:normAutofit/>
           </a:bodyPr>
           <a:p>
-            <a:endParaRPr b="0" lang="en-HK" sz="3200" spc="-1" strike="noStrike">
+            <a:endParaRPr b="0" lang="en-US" sz="3200" spc="-1" strike="noStrike">
               <a:latin typeface="Arial"/>
             </a:endParaRPr>
           </a:p>
@@ -5719,7 +5719,7 @@
             <a:normAutofit/>
           </a:bodyPr>
           <a:p>
-            <a:endParaRPr b="0" lang="en-HK" sz="3200" spc="-1" strike="noStrike">
+            <a:endParaRPr b="0" lang="en-US" sz="3200" spc="-1" strike="noStrike">
               <a:latin typeface="Arial"/>
             </a:endParaRPr>
           </a:p>
@@ -5753,7 +5753,7 @@
             <a:normAutofit/>
           </a:bodyPr>
           <a:p>
-            <a:endParaRPr b="0" lang="en-HK" sz="3200" spc="-1" strike="noStrike">
+            <a:endParaRPr b="0" lang="en-US" sz="3200" spc="-1" strike="noStrike">
               <a:latin typeface="Arial"/>
             </a:endParaRPr>
           </a:p>
@@ -5787,7 +5787,7 @@
             <a:normAutofit/>
           </a:bodyPr>
           <a:p>
-            <a:endParaRPr b="0" lang="en-HK" sz="3200" spc="-1" strike="noStrike">
+            <a:endParaRPr b="0" lang="en-US" sz="3200" spc="-1" strike="noStrike">
               <a:latin typeface="Arial"/>
             </a:endParaRPr>
           </a:p>
@@ -5821,7 +5821,7 @@
             <a:normAutofit/>
           </a:bodyPr>
           <a:p>
-            <a:endParaRPr b="0" lang="en-HK" sz="3200" spc="-1" strike="noStrike">
+            <a:endParaRPr b="0" lang="en-US" sz="3200" spc="-1" strike="noStrike">
               <a:latin typeface="Arial"/>
             </a:endParaRPr>
           </a:p>
@@ -5855,7 +5855,7 @@
             <a:normAutofit/>
           </a:bodyPr>
           <a:p>
-            <a:endParaRPr b="0" lang="en-HK" sz="3200" spc="-1" strike="noStrike">
+            <a:endParaRPr b="0" lang="en-US" sz="3200" spc="-1" strike="noStrike">
               <a:latin typeface="Arial"/>
             </a:endParaRPr>
           </a:p>
@@ -5895,7 +5895,7 @@
         <p:txBody>
           <a:bodyPr/>
           <a:p>
-            <a:fld id="{1D9EA866-C16E-4840-97B9-C5A20C87189A}" type="slidenum">
+            <a:fld id="{0E02B341-AA24-40E5-AE63-FB4897F85245}" type="slidenum">
               <a:t>&lt;#&gt;</a:t>
             </a:fld>
           </a:p>
@@ -5916,7 +5916,7 @@
           <a:bodyPr/>
           <a:p>
             <a:r>
-              <a:rPr lang="en-HK"/>
+              <a:rPr lang="en-US"/>
               <a:t/>
             </a:r>
           </a:p>
@@ -5958,7 +5958,7 @@
         <p:txBody>
           <a:bodyPr/>
           <a:p>
-            <a:fld id="{BFCB013C-E9F5-4A7D-A0E7-52665702DE2B}" type="slidenum">
+            <a:fld id="{E26DA6C6-C93B-4B48-A180-F1F373D4B074}" type="slidenum">
               <a:t>&lt;#&gt;</a:t>
             </a:fld>
           </a:p>
@@ -6017,7 +6017,7 @@
             <a:pPr algn="ctr">
               <a:buNone/>
             </a:pPr>
-            <a:endParaRPr b="0" lang="en-HK" sz="4400" spc="-1" strike="noStrike">
+            <a:endParaRPr b="0" lang="en-US" sz="4400" spc="-1" strike="noStrike">
               <a:latin typeface="Arial"/>
             </a:endParaRPr>
           </a:p>
@@ -6054,7 +6054,7 @@
             <a:pPr algn="ctr">
               <a:buNone/>
             </a:pPr>
-            <a:endParaRPr b="0" lang="en-HK" sz="3200" spc="-1" strike="noStrike">
+            <a:endParaRPr b="0" lang="en-US" sz="3200" spc="-1" strike="noStrike">
               <a:latin typeface="Arial"/>
             </a:endParaRPr>
           </a:p>
@@ -6074,7 +6074,7 @@
         <p:txBody>
           <a:bodyPr/>
           <a:p>
-            <a:fld id="{D671083A-6028-4C7B-96B3-103B6E616A6D}" type="slidenum">
+            <a:fld id="{3D0B6D71-FE6B-4704-89D3-A112FCFA8157}" type="slidenum">
               <a:t>&lt;#&gt;</a:t>
             </a:fld>
           </a:p>
@@ -6133,7 +6133,7 @@
             <a:pPr algn="ctr">
               <a:buNone/>
             </a:pPr>
-            <a:endParaRPr b="0" lang="en-HK" sz="4400" spc="-1" strike="noStrike">
+            <a:endParaRPr b="0" lang="en-US" sz="4400" spc="-1" strike="noStrike">
               <a:latin typeface="Arial"/>
             </a:endParaRPr>
           </a:p>
@@ -6167,7 +6167,7 @@
             <a:normAutofit/>
           </a:bodyPr>
           <a:p>
-            <a:endParaRPr b="0" lang="en-HK" sz="3200" spc="-1" strike="noStrike">
+            <a:endParaRPr b="0" lang="en-US" sz="3200" spc="-1" strike="noStrike">
               <a:latin typeface="Arial"/>
             </a:endParaRPr>
           </a:p>
@@ -6187,7 +6187,7 @@
         <p:txBody>
           <a:bodyPr/>
           <a:p>
-            <a:fld id="{EFABEAA5-69F9-44E4-B84C-8322F16DC357}" type="slidenum">
+            <a:fld id="{407C7853-91A3-4868-98F3-5BDADC992CC1}" type="slidenum">
               <a:t>&lt;#&gt;</a:t>
             </a:fld>
           </a:p>
@@ -6246,7 +6246,7 @@
             <a:pPr algn="ctr">
               <a:buNone/>
             </a:pPr>
-            <a:endParaRPr b="0" lang="en-HK" sz="4400" spc="-1" strike="noStrike">
+            <a:endParaRPr b="0" lang="en-US" sz="4400" spc="-1" strike="noStrike">
               <a:latin typeface="Arial"/>
             </a:endParaRPr>
           </a:p>
@@ -6280,7 +6280,7 @@
             <a:normAutofit/>
           </a:bodyPr>
           <a:p>
-            <a:endParaRPr b="0" lang="en-HK" sz="3200" spc="-1" strike="noStrike">
+            <a:endParaRPr b="0" lang="en-US" sz="3200" spc="-1" strike="noStrike">
               <a:latin typeface="Arial"/>
             </a:endParaRPr>
           </a:p>
@@ -6314,7 +6314,7 @@
             <a:normAutofit/>
           </a:bodyPr>
           <a:p>
-            <a:endParaRPr b="0" lang="en-HK" sz="3200" spc="-1" strike="noStrike">
+            <a:endParaRPr b="0" lang="en-US" sz="3200" spc="-1" strike="noStrike">
               <a:latin typeface="Arial"/>
             </a:endParaRPr>
           </a:p>
@@ -6334,7 +6334,7 @@
         <p:txBody>
           <a:bodyPr/>
           <a:p>
-            <a:fld id="{113FAECC-3EE8-48D5-B294-2259540B2F0F}" type="slidenum">
+            <a:fld id="{948DE896-4A61-4F1C-B047-13C0FD42AC52}" type="slidenum">
               <a:t>&lt;#&gt;</a:t>
             </a:fld>
           </a:p>
@@ -6393,7 +6393,7 @@
             <a:pPr algn="ctr">
               <a:buNone/>
             </a:pPr>
-            <a:endParaRPr b="0" lang="en-HK" sz="4400" spc="-1" strike="noStrike">
+            <a:endParaRPr b="0" lang="en-US" sz="4400" spc="-1" strike="noStrike">
               <a:latin typeface="Arial"/>
             </a:endParaRPr>
           </a:p>
@@ -6427,7 +6427,7 @@
             <a:normAutofit/>
           </a:bodyPr>
           <a:p>
-            <a:endParaRPr b="0" lang="en-HK" sz="3200" spc="-1" strike="noStrike">
+            <a:endParaRPr b="0" lang="en-US" sz="3200" spc="-1" strike="noStrike">
               <a:latin typeface="Arial"/>
             </a:endParaRPr>
           </a:p>
@@ -6461,7 +6461,7 @@
             <a:normAutofit/>
           </a:bodyPr>
           <a:p>
-            <a:endParaRPr b="0" lang="en-HK" sz="3200" spc="-1" strike="noStrike">
+            <a:endParaRPr b="0" lang="en-US" sz="3200" spc="-1" strike="noStrike">
               <a:latin typeface="Arial"/>
             </a:endParaRPr>
           </a:p>
@@ -6481,7 +6481,7 @@
         <p:txBody>
           <a:bodyPr/>
           <a:p>
-            <a:fld id="{140EF8C6-F7BF-4D04-8DC5-D84927716586}" type="slidenum">
+            <a:fld id="{B6234DB5-20FE-45C8-A6B0-FE69A6018AAD}" type="slidenum">
               <a:t>&lt;#&gt;</a:t>
             </a:fld>
           </a:p>
@@ -6540,7 +6540,7 @@
             <a:pPr algn="ctr">
               <a:buNone/>
             </a:pPr>
-            <a:endParaRPr b="0" lang="en-HK" sz="4400" spc="-1" strike="noStrike">
+            <a:endParaRPr b="0" lang="en-US" sz="4400" spc="-1" strike="noStrike">
               <a:latin typeface="Arial"/>
             </a:endParaRPr>
           </a:p>
@@ -6560,7 +6560,7 @@
         <p:txBody>
           <a:bodyPr/>
           <a:p>
-            <a:fld id="{9B6E73C3-8EB6-4824-9389-6073FE35BC4D}" type="slidenum">
+            <a:fld id="{BFEF5CAC-5BC4-4EE7-A2EE-42E38F5071BA}" type="slidenum">
               <a:t>&lt;#&gt;</a:t>
             </a:fld>
           </a:p>
@@ -6619,7 +6619,7 @@
             <a:pPr algn="ctr">
               <a:buNone/>
             </a:pPr>
-            <a:endParaRPr b="0" lang="en-HK" sz="3200" spc="-1" strike="noStrike">
+            <a:endParaRPr b="0" lang="en-US" sz="3200" spc="-1" strike="noStrike">
               <a:latin typeface="Arial"/>
             </a:endParaRPr>
           </a:p>
@@ -6639,7 +6639,7 @@
         <p:txBody>
           <a:bodyPr/>
           <a:p>
-            <a:fld id="{A6C666B4-1FBA-4812-B67D-36A93094C113}" type="slidenum">
+            <a:fld id="{00EB54AC-956A-4B71-8857-EF6E1828A8D7}" type="slidenum">
               <a:t>&lt;#&gt;</a:t>
             </a:fld>
           </a:p>
@@ -6698,7 +6698,7 @@
             <a:pPr algn="ctr">
               <a:buNone/>
             </a:pPr>
-            <a:endParaRPr b="0" lang="en-HK" sz="4400" spc="-1" strike="noStrike">
+            <a:endParaRPr b="0" lang="en-US" sz="4400" spc="-1" strike="noStrike">
               <a:latin typeface="Arial"/>
             </a:endParaRPr>
           </a:p>
@@ -6732,7 +6732,7 @@
             <a:normAutofit/>
           </a:bodyPr>
           <a:p>
-            <a:endParaRPr b="0" lang="en-HK" sz="3200" spc="-1" strike="noStrike">
+            <a:endParaRPr b="0" lang="en-US" sz="3200" spc="-1" strike="noStrike">
               <a:latin typeface="Arial"/>
             </a:endParaRPr>
           </a:p>
@@ -6766,7 +6766,7 @@
             <a:normAutofit/>
           </a:bodyPr>
           <a:p>
-            <a:endParaRPr b="0" lang="en-HK" sz="3200" spc="-1" strike="noStrike">
+            <a:endParaRPr b="0" lang="en-US" sz="3200" spc="-1" strike="noStrike">
               <a:latin typeface="Arial"/>
             </a:endParaRPr>
           </a:p>
@@ -6800,7 +6800,7 @@
             <a:normAutofit/>
           </a:bodyPr>
           <a:p>
-            <a:endParaRPr b="0" lang="en-HK" sz="3200" spc="-1" strike="noStrike">
+            <a:endParaRPr b="0" lang="en-US" sz="3200" spc="-1" strike="noStrike">
               <a:latin typeface="Arial"/>
             </a:endParaRPr>
           </a:p>
@@ -6820,7 +6820,7 @@
         <p:txBody>
           <a:bodyPr/>
           <a:p>
-            <a:fld id="{C413F827-C2DB-4C9B-8257-D8732AAB8502}" type="slidenum">
+            <a:fld id="{632CD9AB-F86F-4308-B3B5-A4EBC418E09B}" type="slidenum">
               <a:t>&lt;#&gt;</a:t>
             </a:fld>
           </a:p>
@@ -6879,7 +6879,7 @@
             <a:pPr algn="ctr">
               <a:buNone/>
             </a:pPr>
-            <a:endParaRPr b="0" lang="en-HK" sz="4400" spc="-1" strike="noStrike">
+            <a:endParaRPr b="0" lang="en-US" sz="4400" spc="-1" strike="noStrike">
               <a:latin typeface="Arial"/>
             </a:endParaRPr>
           </a:p>
@@ -6913,7 +6913,7 @@
             <a:normAutofit/>
           </a:bodyPr>
           <a:p>
-            <a:endParaRPr b="0" lang="en-HK" sz="3200" spc="-1" strike="noStrike">
+            <a:endParaRPr b="0" lang="en-US" sz="3200" spc="-1" strike="noStrike">
               <a:latin typeface="Arial"/>
             </a:endParaRPr>
           </a:p>
@@ -6947,7 +6947,7 @@
             <a:normAutofit/>
           </a:bodyPr>
           <a:p>
-            <a:endParaRPr b="0" lang="en-HK" sz="3200" spc="-1" strike="noStrike">
+            <a:endParaRPr b="0" lang="en-US" sz="3200" spc="-1" strike="noStrike">
               <a:latin typeface="Arial"/>
             </a:endParaRPr>
           </a:p>
@@ -6981,7 +6981,7 @@
             <a:normAutofit/>
           </a:bodyPr>
           <a:p>
-            <a:endParaRPr b="0" lang="en-HK" sz="3200" spc="-1" strike="noStrike">
+            <a:endParaRPr b="0" lang="en-US" sz="3200" spc="-1" strike="noStrike">
               <a:latin typeface="Arial"/>
             </a:endParaRPr>
           </a:p>
@@ -7001,7 +7001,7 @@
         <p:txBody>
           <a:bodyPr/>
           <a:p>
-            <a:fld id="{2859BBEB-EE5A-46D0-BA62-F76C4900642E}" type="slidenum">
+            <a:fld id="{1F95A90D-68E3-4556-A15D-18360B54345F}" type="slidenum">
               <a:t>&lt;#&gt;</a:t>
             </a:fld>
           </a:p>
@@ -7060,7 +7060,7 @@
             <a:pPr algn="ctr">
               <a:buNone/>
             </a:pPr>
-            <a:endParaRPr b="0" lang="en-HK" sz="4400" spc="-1" strike="noStrike">
+            <a:endParaRPr b="0" lang="en-US" sz="4400" spc="-1" strike="noStrike">
               <a:latin typeface="Arial"/>
             </a:endParaRPr>
           </a:p>
@@ -7094,7 +7094,7 @@
             <a:normAutofit/>
           </a:bodyPr>
           <a:p>
-            <a:endParaRPr b="0" lang="en-HK" sz="3200" spc="-1" strike="noStrike">
+            <a:endParaRPr b="0" lang="en-US" sz="3200" spc="-1" strike="noStrike">
               <a:latin typeface="Arial"/>
             </a:endParaRPr>
           </a:p>
@@ -7128,7 +7128,7 @@
             <a:normAutofit/>
           </a:bodyPr>
           <a:p>
-            <a:endParaRPr b="0" lang="en-HK" sz="3200" spc="-1" strike="noStrike">
+            <a:endParaRPr b="0" lang="en-US" sz="3200" spc="-1" strike="noStrike">
               <a:latin typeface="Arial"/>
             </a:endParaRPr>
           </a:p>
@@ -7162,7 +7162,7 @@
             <a:normAutofit/>
           </a:bodyPr>
           <a:p>
-            <a:endParaRPr b="0" lang="en-HK" sz="3200" spc="-1" strike="noStrike">
+            <a:endParaRPr b="0" lang="en-US" sz="3200" spc="-1" strike="noStrike">
               <a:latin typeface="Arial"/>
             </a:endParaRPr>
           </a:p>
@@ -7182,7 +7182,7 @@
         <p:txBody>
           <a:bodyPr/>
           <a:p>
-            <a:fld id="{B6F839F3-FCDC-45F5-8C55-B337CDE53F84}" type="slidenum">
+            <a:fld id="{DBDCF0A8-95B7-4A49-8132-220E0E98D81D}" type="slidenum">
               <a:t>&lt;#&gt;</a:t>
             </a:fld>
           </a:p>
@@ -7241,7 +7241,7 @@
             <a:pPr algn="ctr">
               <a:buNone/>
             </a:pPr>
-            <a:endParaRPr b="0" lang="en-HK" sz="4400" spc="-1" strike="noStrike">
+            <a:endParaRPr b="0" lang="en-US" sz="4400" spc="-1" strike="noStrike">
               <a:latin typeface="Arial"/>
             </a:endParaRPr>
           </a:p>
@@ -7275,7 +7275,7 @@
             <a:normAutofit/>
           </a:bodyPr>
           <a:p>
-            <a:endParaRPr b="0" lang="en-HK" sz="3200" spc="-1" strike="noStrike">
+            <a:endParaRPr b="0" lang="en-US" sz="3200" spc="-1" strike="noStrike">
               <a:latin typeface="Arial"/>
             </a:endParaRPr>
           </a:p>
@@ -7309,7 +7309,7 @@
             <a:normAutofit/>
           </a:bodyPr>
           <a:p>
-            <a:endParaRPr b="0" lang="en-HK" sz="3200" spc="-1" strike="noStrike">
+            <a:endParaRPr b="0" lang="en-US" sz="3200" spc="-1" strike="noStrike">
               <a:latin typeface="Arial"/>
             </a:endParaRPr>
           </a:p>
@@ -7329,7 +7329,7 @@
         <p:txBody>
           <a:bodyPr/>
           <a:p>
-            <a:fld id="{4A70399F-13EC-487D-BF73-20B2405D59DA}" type="slidenum">
+            <a:fld id="{9029EBFB-F1C0-4835-A762-130E4DDCCB03}" type="slidenum">
               <a:t>&lt;#&gt;</a:t>
             </a:fld>
           </a:p>
@@ -7388,7 +7388,7 @@
             <a:pPr algn="ctr">
               <a:buNone/>
             </a:pPr>
-            <a:endParaRPr b="0" lang="en-HK" sz="4400" spc="-1" strike="noStrike">
+            <a:endParaRPr b="0" lang="en-US" sz="4400" spc="-1" strike="noStrike">
               <a:latin typeface="Arial"/>
             </a:endParaRPr>
           </a:p>
@@ -7422,7 +7422,7 @@
             <a:normAutofit/>
           </a:bodyPr>
           <a:p>
-            <a:endParaRPr b="0" lang="en-HK" sz="3200" spc="-1" strike="noStrike">
+            <a:endParaRPr b="0" lang="en-US" sz="3200" spc="-1" strike="noStrike">
               <a:latin typeface="Arial"/>
             </a:endParaRPr>
           </a:p>
@@ -7456,7 +7456,7 @@
             <a:normAutofit/>
           </a:bodyPr>
           <a:p>
-            <a:endParaRPr b="0" lang="en-HK" sz="3200" spc="-1" strike="noStrike">
+            <a:endParaRPr b="0" lang="en-US" sz="3200" spc="-1" strike="noStrike">
               <a:latin typeface="Arial"/>
             </a:endParaRPr>
           </a:p>
@@ -7490,7 +7490,7 @@
             <a:normAutofit/>
           </a:bodyPr>
           <a:p>
-            <a:endParaRPr b="0" lang="en-HK" sz="3200" spc="-1" strike="noStrike">
+            <a:endParaRPr b="0" lang="en-US" sz="3200" spc="-1" strike="noStrike">
               <a:latin typeface="Arial"/>
             </a:endParaRPr>
           </a:p>
@@ -7524,7 +7524,7 @@
             <a:normAutofit/>
           </a:bodyPr>
           <a:p>
-            <a:endParaRPr b="0" lang="en-HK" sz="3200" spc="-1" strike="noStrike">
+            <a:endParaRPr b="0" lang="en-US" sz="3200" spc="-1" strike="noStrike">
               <a:latin typeface="Arial"/>
             </a:endParaRPr>
           </a:p>
@@ -7544,7 +7544,7 @@
         <p:txBody>
           <a:bodyPr/>
           <a:p>
-            <a:fld id="{0F2C6DD0-A567-4977-A247-3AB248CCE49E}" type="slidenum">
+            <a:fld id="{0C099BCC-9BE3-426C-874F-DD71F4351E92}" type="slidenum">
               <a:t>&lt;#&gt;</a:t>
             </a:fld>
           </a:p>
@@ -7603,7 +7603,7 @@
             <a:pPr algn="ctr">
               <a:buNone/>
             </a:pPr>
-            <a:endParaRPr b="0" lang="en-HK" sz="4400" spc="-1" strike="noStrike">
+            <a:endParaRPr b="0" lang="en-US" sz="4400" spc="-1" strike="noStrike">
               <a:latin typeface="Arial"/>
             </a:endParaRPr>
           </a:p>
@@ -7637,7 +7637,7 @@
             <a:normAutofit/>
           </a:bodyPr>
           <a:p>
-            <a:endParaRPr b="0" lang="en-HK" sz="3200" spc="-1" strike="noStrike">
+            <a:endParaRPr b="0" lang="en-US" sz="3200" spc="-1" strike="noStrike">
               <a:latin typeface="Arial"/>
             </a:endParaRPr>
           </a:p>
@@ -7671,7 +7671,7 @@
             <a:normAutofit/>
           </a:bodyPr>
           <a:p>
-            <a:endParaRPr b="0" lang="en-HK" sz="3200" spc="-1" strike="noStrike">
+            <a:endParaRPr b="0" lang="en-US" sz="3200" spc="-1" strike="noStrike">
               <a:latin typeface="Arial"/>
             </a:endParaRPr>
           </a:p>
@@ -7705,7 +7705,7 @@
             <a:normAutofit/>
           </a:bodyPr>
           <a:p>
-            <a:endParaRPr b="0" lang="en-HK" sz="3200" spc="-1" strike="noStrike">
+            <a:endParaRPr b="0" lang="en-US" sz="3200" spc="-1" strike="noStrike">
               <a:latin typeface="Arial"/>
             </a:endParaRPr>
           </a:p>
@@ -7739,7 +7739,7 @@
             <a:normAutofit/>
           </a:bodyPr>
           <a:p>
-            <a:endParaRPr b="0" lang="en-HK" sz="3200" spc="-1" strike="noStrike">
+            <a:endParaRPr b="0" lang="en-US" sz="3200" spc="-1" strike="noStrike">
               <a:latin typeface="Arial"/>
             </a:endParaRPr>
           </a:p>
@@ -7773,7 +7773,7 @@
             <a:normAutofit/>
           </a:bodyPr>
           <a:p>
-            <a:endParaRPr b="0" lang="en-HK" sz="3200" spc="-1" strike="noStrike">
+            <a:endParaRPr b="0" lang="en-US" sz="3200" spc="-1" strike="noStrike">
               <a:latin typeface="Arial"/>
             </a:endParaRPr>
           </a:p>
@@ -7807,7 +7807,7 @@
             <a:normAutofit/>
           </a:bodyPr>
           <a:p>
-            <a:endParaRPr b="0" lang="en-HK" sz="3200" spc="-1" strike="noStrike">
+            <a:endParaRPr b="0" lang="en-US" sz="3200" spc="-1" strike="noStrike">
               <a:latin typeface="Arial"/>
             </a:endParaRPr>
           </a:p>
@@ -7827,7 +7827,7 @@
         <p:txBody>
           <a:bodyPr/>
           <a:p>
-            <a:fld id="{17C8F8C0-DAD4-403A-9667-592E32F23AEB}" type="slidenum">
+            <a:fld id="{81586BB2-53DD-434E-82CC-F4A3B43A22F2}" type="slidenum">
               <a:t>&lt;#&gt;</a:t>
             </a:fld>
           </a:p>
@@ -7889,7 +7889,7 @@
         <p:txBody>
           <a:bodyPr/>
           <a:p>
-            <a:fld id="{BD90173A-694D-4248-B497-BC62747CC64D}" type="slidenum">
+            <a:fld id="{02AE806A-A84A-44EE-832E-73339D9FD492}" type="slidenum">
               <a:t>&lt;#&gt;</a:t>
             </a:fld>
           </a:p>
@@ -7910,7 +7910,7 @@
           <a:bodyPr/>
           <a:p>
             <a:r>
-              <a:rPr lang="en-HK"/>
+              <a:rPr lang="en-US"/>
               <a:t/>
             </a:r>
           </a:p>
@@ -7969,7 +7969,7 @@
             <a:pPr algn="ctr">
               <a:buNone/>
             </a:pPr>
-            <a:endParaRPr b="0" lang="en-HK" sz="4400" spc="-1" strike="noStrike">
+            <a:endParaRPr b="0" lang="en-US" sz="4400" spc="-1" strike="noStrike">
               <a:latin typeface="Arial"/>
             </a:endParaRPr>
           </a:p>
@@ -7989,7 +7989,7 @@
         <p:txBody>
           <a:bodyPr/>
           <a:p>
-            <a:fld id="{FF0D0B5F-8513-45E0-AE88-F804BB83AFA4}" type="slidenum">
+            <a:fld id="{17512FCE-CA5C-4FF1-966A-433C54CB8C81}" type="slidenum">
               <a:t>&lt;#&gt;</a:t>
             </a:fld>
           </a:p>
@@ -8048,7 +8048,7 @@
             <a:pPr algn="ctr">
               <a:buNone/>
             </a:pPr>
-            <a:endParaRPr b="0" lang="en-HK" sz="4400" spc="-1" strike="noStrike">
+            <a:endParaRPr b="0" lang="en-US" sz="4400" spc="-1" strike="noStrike">
               <a:latin typeface="Arial"/>
             </a:endParaRPr>
           </a:p>
@@ -8085,7 +8085,7 @@
             <a:pPr algn="ctr">
               <a:buNone/>
             </a:pPr>
-            <a:endParaRPr b="0" lang="en-HK" sz="3200" spc="-1" strike="noStrike">
+            <a:endParaRPr b="0" lang="en-US" sz="3200" spc="-1" strike="noStrike">
               <a:latin typeface="Arial"/>
             </a:endParaRPr>
           </a:p>
@@ -8125,7 +8125,7 @@
         <p:txBody>
           <a:bodyPr/>
           <a:p>
-            <a:fld id="{362A7D29-231F-4DCF-A474-B211F54E66AF}" type="slidenum">
+            <a:fld id="{28F87835-968D-4405-B948-1A4BB4B40054}" type="slidenum">
               <a:t>&lt;#&gt;</a:t>
             </a:fld>
           </a:p>
@@ -8146,7 +8146,7 @@
           <a:bodyPr/>
           <a:p>
             <a:r>
-              <a:rPr lang="en-HK"/>
+              <a:rPr lang="en-US"/>
               <a:t/>
             </a:r>
           </a:p>
@@ -8205,7 +8205,7 @@
             <a:pPr algn="ctr">
               <a:buNone/>
             </a:pPr>
-            <a:endParaRPr b="0" lang="en-HK" sz="4400" spc="-1" strike="noStrike">
+            <a:endParaRPr b="0" lang="en-US" sz="4400" spc="-1" strike="noStrike">
               <a:latin typeface="Arial"/>
             </a:endParaRPr>
           </a:p>
@@ -8239,7 +8239,7 @@
             <a:normAutofit/>
           </a:bodyPr>
           <a:p>
-            <a:endParaRPr b="0" lang="en-HK" sz="3200" spc="-1" strike="noStrike">
+            <a:endParaRPr b="0" lang="en-US" sz="3200" spc="-1" strike="noStrike">
               <a:latin typeface="Arial"/>
             </a:endParaRPr>
           </a:p>
@@ -8279,7 +8279,7 @@
         <p:txBody>
           <a:bodyPr/>
           <a:p>
-            <a:fld id="{AA1DEF14-09F7-4309-A1E4-82FE2D26F38B}" type="slidenum">
+            <a:fld id="{18DE3938-4908-47F1-9567-A033448189AA}" type="slidenum">
               <a:t>&lt;#&gt;</a:t>
             </a:fld>
           </a:p>
@@ -8300,7 +8300,7 @@
           <a:bodyPr/>
           <a:p>
             <a:r>
-              <a:rPr lang="en-HK"/>
+              <a:rPr lang="en-US"/>
               <a:t/>
             </a:r>
           </a:p>
@@ -8359,7 +8359,7 @@
             <a:pPr algn="ctr">
               <a:buNone/>
             </a:pPr>
-            <a:endParaRPr b="0" lang="en-HK" sz="4400" spc="-1" strike="noStrike">
+            <a:endParaRPr b="0" lang="en-US" sz="4400" spc="-1" strike="noStrike">
               <a:latin typeface="Arial"/>
             </a:endParaRPr>
           </a:p>
@@ -8393,7 +8393,7 @@
             <a:normAutofit/>
           </a:bodyPr>
           <a:p>
-            <a:endParaRPr b="0" lang="en-HK" sz="3200" spc="-1" strike="noStrike">
+            <a:endParaRPr b="0" lang="en-US" sz="3200" spc="-1" strike="noStrike">
               <a:latin typeface="Arial"/>
             </a:endParaRPr>
           </a:p>
@@ -8427,7 +8427,7 @@
             <a:normAutofit/>
           </a:bodyPr>
           <a:p>
-            <a:endParaRPr b="0" lang="en-HK" sz="3200" spc="-1" strike="noStrike">
+            <a:endParaRPr b="0" lang="en-US" sz="3200" spc="-1" strike="noStrike">
               <a:latin typeface="Arial"/>
             </a:endParaRPr>
           </a:p>
@@ -8467,7 +8467,7 @@
         <p:txBody>
           <a:bodyPr/>
           <a:p>
-            <a:fld id="{172DFD61-82A6-4EC3-B182-6F89E78C3639}" type="slidenum">
+            <a:fld id="{64AE5C51-D264-48BE-8570-B88746905B00}" type="slidenum">
               <a:t>&lt;#&gt;</a:t>
             </a:fld>
           </a:p>
@@ -8488,7 +8488,7 @@
           <a:bodyPr/>
           <a:p>
             <a:r>
-              <a:rPr lang="en-HK"/>
+              <a:rPr lang="en-US"/>
               <a:t/>
             </a:r>
           </a:p>
@@ -8547,7 +8547,7 @@
             <a:pPr algn="ctr">
               <a:buNone/>
             </a:pPr>
-            <a:endParaRPr b="0" lang="en-HK" sz="4400" spc="-1" strike="noStrike">
+            <a:endParaRPr b="0" lang="en-US" sz="4400" spc="-1" strike="noStrike">
               <a:latin typeface="Arial"/>
             </a:endParaRPr>
           </a:p>
@@ -8587,7 +8587,7 @@
         <p:txBody>
           <a:bodyPr/>
           <a:p>
-            <a:fld id="{A235059D-A639-412F-A202-C5D30ECB72EE}" type="slidenum">
+            <a:fld id="{F868DC56-005C-4521-91CF-18C3EBEF88D0}" type="slidenum">
               <a:t>&lt;#&gt;</a:t>
             </a:fld>
           </a:p>
@@ -8608,7 +8608,7 @@
           <a:bodyPr/>
           <a:p>
             <a:r>
-              <a:rPr lang="en-HK"/>
+              <a:rPr lang="en-US"/>
               <a:t/>
             </a:r>
           </a:p>
@@ -8667,7 +8667,7 @@
             <a:pPr algn="ctr">
               <a:buNone/>
             </a:pPr>
-            <a:endParaRPr b="0" lang="en-HK" sz="3200" spc="-1" strike="noStrike">
+            <a:endParaRPr b="0" lang="en-US" sz="3200" spc="-1" strike="noStrike">
               <a:latin typeface="Arial"/>
             </a:endParaRPr>
           </a:p>
@@ -8707,7 +8707,7 @@
         <p:txBody>
           <a:bodyPr/>
           <a:p>
-            <a:fld id="{92F97631-6635-4AFB-BD3B-D546765C1752}" type="slidenum">
+            <a:fld id="{FBE03FDC-29E2-45E5-B510-4CF8344F48B4}" type="slidenum">
               <a:t>&lt;#&gt;</a:t>
             </a:fld>
           </a:p>
@@ -8728,7 +8728,7 @@
           <a:bodyPr/>
           <a:p>
             <a:r>
-              <a:rPr lang="en-HK"/>
+              <a:rPr lang="en-US"/>
               <a:t/>
             </a:r>
           </a:p>
@@ -8787,7 +8787,7 @@
             <a:pPr algn="ctr">
               <a:buNone/>
             </a:pPr>
-            <a:endParaRPr b="0" lang="en-HK" sz="4400" spc="-1" strike="noStrike">
+            <a:endParaRPr b="0" lang="en-US" sz="4400" spc="-1" strike="noStrike">
               <a:latin typeface="Arial"/>
             </a:endParaRPr>
           </a:p>
@@ -8821,7 +8821,7 @@
             <a:normAutofit/>
           </a:bodyPr>
           <a:p>
-            <a:endParaRPr b="0" lang="en-HK" sz="3200" spc="-1" strike="noStrike">
+            <a:endParaRPr b="0" lang="en-US" sz="3200" spc="-1" strike="noStrike">
               <a:latin typeface="Arial"/>
             </a:endParaRPr>
           </a:p>
@@ -8855,7 +8855,7 @@
             <a:normAutofit/>
           </a:bodyPr>
           <a:p>
-            <a:endParaRPr b="0" lang="en-HK" sz="3200" spc="-1" strike="noStrike">
+            <a:endParaRPr b="0" lang="en-US" sz="3200" spc="-1" strike="noStrike">
               <a:latin typeface="Arial"/>
             </a:endParaRPr>
           </a:p>
@@ -8889,7 +8889,7 @@
             <a:normAutofit/>
           </a:bodyPr>
           <a:p>
-            <a:endParaRPr b="0" lang="en-HK" sz="3200" spc="-1" strike="noStrike">
+            <a:endParaRPr b="0" lang="en-US" sz="3200" spc="-1" strike="noStrike">
               <a:latin typeface="Arial"/>
             </a:endParaRPr>
           </a:p>
@@ -8929,7 +8929,7 @@
         <p:txBody>
           <a:bodyPr/>
           <a:p>
-            <a:fld id="{400EC092-5FCB-4526-8407-005C0150148C}" type="slidenum">
+            <a:fld id="{1AF77612-110D-4C46-8D72-46E51528AF0A}" type="slidenum">
               <a:t>&lt;#&gt;</a:t>
             </a:fld>
           </a:p>
@@ -8950,7 +8950,7 @@
           <a:bodyPr/>
           <a:p>
             <a:r>
-              <a:rPr lang="en-HK"/>
+              <a:rPr lang="en-US"/>
               <a:t/>
             </a:r>
           </a:p>
@@ -9009,7 +9009,7 @@
             <a:pPr algn="ctr">
               <a:buNone/>
             </a:pPr>
-            <a:endParaRPr b="0" lang="en-HK" sz="4400" spc="-1" strike="noStrike">
+            <a:endParaRPr b="0" lang="en-US" sz="4400" spc="-1" strike="noStrike">
               <a:latin typeface="Arial"/>
             </a:endParaRPr>
           </a:p>
@@ -9043,7 +9043,7 @@
             <a:normAutofit/>
           </a:bodyPr>
           <a:p>
-            <a:endParaRPr b="0" lang="en-HK" sz="3200" spc="-1" strike="noStrike">
+            <a:endParaRPr b="0" lang="en-US" sz="3200" spc="-1" strike="noStrike">
               <a:latin typeface="Arial"/>
             </a:endParaRPr>
           </a:p>
@@ -9077,7 +9077,7 @@
             <a:normAutofit/>
           </a:bodyPr>
           <a:p>
-            <a:endParaRPr b="0" lang="en-HK" sz="3200" spc="-1" strike="noStrike">
+            <a:endParaRPr b="0" lang="en-US" sz="3200" spc="-1" strike="noStrike">
               <a:latin typeface="Arial"/>
             </a:endParaRPr>
           </a:p>
@@ -9111,7 +9111,7 @@
             <a:normAutofit/>
           </a:bodyPr>
           <a:p>
-            <a:endParaRPr b="0" lang="en-HK" sz="3200" spc="-1" strike="noStrike">
+            <a:endParaRPr b="0" lang="en-US" sz="3200" spc="-1" strike="noStrike">
               <a:latin typeface="Arial"/>
             </a:endParaRPr>
           </a:p>
@@ -9151,7 +9151,7 @@
         <p:txBody>
           <a:bodyPr/>
           <a:p>
-            <a:fld id="{6B1AEFED-7938-4F4B-A2B3-8FABD380B18C}" type="slidenum">
+            <a:fld id="{DF7801CC-0455-463D-9045-B4226EFF5A5C}" type="slidenum">
               <a:t>&lt;#&gt;</a:t>
             </a:fld>
           </a:p>
@@ -9172,7 +9172,7 @@
           <a:bodyPr/>
           <a:p>
             <a:r>
-              <a:rPr lang="en-HK"/>
+              <a:rPr lang="en-US"/>
               <a:t/>
             </a:r>
           </a:p>
@@ -9231,7 +9231,7 @@
             <a:pPr algn="ctr">
               <a:buNone/>
             </a:pPr>
-            <a:endParaRPr b="0" lang="en-HK" sz="4400" spc="-1" strike="noStrike">
+            <a:endParaRPr b="0" lang="en-US" sz="4400" spc="-1" strike="noStrike">
               <a:latin typeface="Arial"/>
             </a:endParaRPr>
           </a:p>
@@ -9265,7 +9265,7 @@
             <a:normAutofit/>
           </a:bodyPr>
           <a:p>
-            <a:endParaRPr b="0" lang="en-HK" sz="3200" spc="-1" strike="noStrike">
+            <a:endParaRPr b="0" lang="en-US" sz="3200" spc="-1" strike="noStrike">
               <a:latin typeface="Arial"/>
             </a:endParaRPr>
           </a:p>
@@ -9299,7 +9299,7 @@
             <a:normAutofit/>
           </a:bodyPr>
           <a:p>
-            <a:endParaRPr b="0" lang="en-HK" sz="3200" spc="-1" strike="noStrike">
+            <a:endParaRPr b="0" lang="en-US" sz="3200" spc="-1" strike="noStrike">
               <a:latin typeface="Arial"/>
             </a:endParaRPr>
           </a:p>
@@ -9333,7 +9333,7 @@
             <a:normAutofit/>
           </a:bodyPr>
           <a:p>
-            <a:endParaRPr b="0" lang="en-HK" sz="3200" spc="-1" strike="noStrike">
+            <a:endParaRPr b="0" lang="en-US" sz="3200" spc="-1" strike="noStrike">
               <a:latin typeface="Arial"/>
             </a:endParaRPr>
           </a:p>
@@ -9373,7 +9373,7 @@
         <p:txBody>
           <a:bodyPr/>
           <a:p>
-            <a:fld id="{9A6E8B27-F317-4643-80FA-93A981630489}" type="slidenum">
+            <a:fld id="{348A6AD2-08AA-457A-960E-913972FBBA31}" type="slidenum">
               <a:t>&lt;#&gt;</a:t>
             </a:fld>
           </a:p>
@@ -9394,7 +9394,7 @@
           <a:bodyPr/>
           <a:p>
             <a:r>
-              <a:rPr lang="en-HK"/>
+              <a:rPr lang="en-US"/>
               <a:t/>
             </a:r>
           </a:p>
@@ -9453,7 +9453,7 @@
             <a:pPr algn="ctr">
               <a:buNone/>
             </a:pPr>
-            <a:endParaRPr b="0" lang="en-HK" sz="4400" spc="-1" strike="noStrike">
+            <a:endParaRPr b="0" lang="en-US" sz="4400" spc="-1" strike="noStrike">
               <a:latin typeface="Arial"/>
             </a:endParaRPr>
           </a:p>
@@ -9487,7 +9487,7 @@
             <a:normAutofit/>
           </a:bodyPr>
           <a:p>
-            <a:endParaRPr b="0" lang="en-HK" sz="3200" spc="-1" strike="noStrike">
+            <a:endParaRPr b="0" lang="en-US" sz="3200" spc="-1" strike="noStrike">
               <a:latin typeface="Arial"/>
             </a:endParaRPr>
           </a:p>
@@ -9521,7 +9521,7 @@
             <a:normAutofit/>
           </a:bodyPr>
           <a:p>
-            <a:endParaRPr b="0" lang="en-HK" sz="3200" spc="-1" strike="noStrike">
+            <a:endParaRPr b="0" lang="en-US" sz="3200" spc="-1" strike="noStrike">
               <a:latin typeface="Arial"/>
             </a:endParaRPr>
           </a:p>
@@ -9561,7 +9561,7 @@
         <p:txBody>
           <a:bodyPr/>
           <a:p>
-            <a:fld id="{D76CA674-6F03-4BE2-878B-E9C130D8AE9F}" type="slidenum">
+            <a:fld id="{3AF8B7FF-EDF2-497B-92C9-F26ABDBC13DC}" type="slidenum">
               <a:t>&lt;#&gt;</a:t>
             </a:fld>
           </a:p>
@@ -9582,7 +9582,7 @@
           <a:bodyPr/>
           <a:p>
             <a:r>
-              <a:rPr lang="en-HK"/>
+              <a:rPr lang="en-US"/>
               <a:t/>
             </a:r>
           </a:p>
@@ -9641,7 +9641,7 @@
             <a:pPr algn="ctr">
               <a:buNone/>
             </a:pPr>
-            <a:endParaRPr b="0" lang="en-HK" sz="4400" spc="-1" strike="noStrike">
+            <a:endParaRPr b="0" lang="en-US" sz="4400" spc="-1" strike="noStrike">
               <a:latin typeface="Arial"/>
             </a:endParaRPr>
           </a:p>
@@ -9675,7 +9675,7 @@
             <a:normAutofit/>
           </a:bodyPr>
           <a:p>
-            <a:endParaRPr b="0" lang="en-HK" sz="3200" spc="-1" strike="noStrike">
+            <a:endParaRPr b="0" lang="en-US" sz="3200" spc="-1" strike="noStrike">
               <a:latin typeface="Arial"/>
             </a:endParaRPr>
           </a:p>
@@ -9709,7 +9709,7 @@
             <a:normAutofit/>
           </a:bodyPr>
           <a:p>
-            <a:endParaRPr b="0" lang="en-HK" sz="3200" spc="-1" strike="noStrike">
+            <a:endParaRPr b="0" lang="en-US" sz="3200" spc="-1" strike="noStrike">
               <a:latin typeface="Arial"/>
             </a:endParaRPr>
           </a:p>
@@ -9743,7 +9743,7 @@
             <a:normAutofit/>
           </a:bodyPr>
           <a:p>
-            <a:endParaRPr b="0" lang="en-HK" sz="3200" spc="-1" strike="noStrike">
+            <a:endParaRPr b="0" lang="en-US" sz="3200" spc="-1" strike="noStrike">
               <a:latin typeface="Arial"/>
             </a:endParaRPr>
           </a:p>
@@ -9777,7 +9777,7 @@
             <a:normAutofit/>
           </a:bodyPr>
           <a:p>
-            <a:endParaRPr b="0" lang="en-HK" sz="3200" spc="-1" strike="noStrike">
+            <a:endParaRPr b="0" lang="en-US" sz="3200" spc="-1" strike="noStrike">
               <a:latin typeface="Arial"/>
             </a:endParaRPr>
           </a:p>
@@ -9817,7 +9817,7 @@
         <p:txBody>
           <a:bodyPr/>
           <a:p>
-            <a:fld id="{6E01C0D7-9DE8-4F09-A4D7-5A5DA33200C5}" type="slidenum">
+            <a:fld id="{E156F710-7CB9-4013-9BAA-9BD5E603ECEC}" type="slidenum">
               <a:t>&lt;#&gt;</a:t>
             </a:fld>
           </a:p>
@@ -9838,7 +9838,7 @@
           <a:bodyPr/>
           <a:p>
             <a:r>
-              <a:rPr lang="en-HK"/>
+              <a:rPr lang="en-US"/>
               <a:t/>
             </a:r>
           </a:p>
@@ -9897,7 +9897,7 @@
             <a:pPr algn="ctr">
               <a:buNone/>
             </a:pPr>
-            <a:endParaRPr b="0" lang="en-HK" sz="3200" spc="-1" strike="noStrike">
+            <a:endParaRPr b="0" lang="en-US" sz="3200" spc="-1" strike="noStrike">
               <a:latin typeface="Arial"/>
             </a:endParaRPr>
           </a:p>
@@ -9917,7 +9917,7 @@
         <p:txBody>
           <a:bodyPr/>
           <a:p>
-            <a:fld id="{6C9BB7CF-3D72-4FDD-8567-3695DBEEA6FD}" type="slidenum">
+            <a:fld id="{DBB13558-CE5A-4854-9704-B71251470758}" type="slidenum">
               <a:t>&lt;#&gt;</a:t>
             </a:fld>
           </a:p>
@@ -9976,7 +9976,7 @@
             <a:pPr algn="ctr">
               <a:buNone/>
             </a:pPr>
-            <a:endParaRPr b="0" lang="en-HK" sz="4400" spc="-1" strike="noStrike">
+            <a:endParaRPr b="0" lang="en-US" sz="4400" spc="-1" strike="noStrike">
               <a:latin typeface="Arial"/>
             </a:endParaRPr>
           </a:p>
@@ -10010,7 +10010,7 @@
             <a:normAutofit/>
           </a:bodyPr>
           <a:p>
-            <a:endParaRPr b="0" lang="en-HK" sz="3200" spc="-1" strike="noStrike">
+            <a:endParaRPr b="0" lang="en-US" sz="3200" spc="-1" strike="noStrike">
               <a:latin typeface="Arial"/>
             </a:endParaRPr>
           </a:p>
@@ -10044,7 +10044,7 @@
             <a:normAutofit/>
           </a:bodyPr>
           <a:p>
-            <a:endParaRPr b="0" lang="en-HK" sz="3200" spc="-1" strike="noStrike">
+            <a:endParaRPr b="0" lang="en-US" sz="3200" spc="-1" strike="noStrike">
               <a:latin typeface="Arial"/>
             </a:endParaRPr>
           </a:p>
@@ -10078,7 +10078,7 @@
             <a:normAutofit/>
           </a:bodyPr>
           <a:p>
-            <a:endParaRPr b="0" lang="en-HK" sz="3200" spc="-1" strike="noStrike">
+            <a:endParaRPr b="0" lang="en-US" sz="3200" spc="-1" strike="noStrike">
               <a:latin typeface="Arial"/>
             </a:endParaRPr>
           </a:p>
@@ -10112,7 +10112,7 @@
             <a:normAutofit/>
           </a:bodyPr>
           <a:p>
-            <a:endParaRPr b="0" lang="en-HK" sz="3200" spc="-1" strike="noStrike">
+            <a:endParaRPr b="0" lang="en-US" sz="3200" spc="-1" strike="noStrike">
               <a:latin typeface="Arial"/>
             </a:endParaRPr>
           </a:p>
@@ -10146,7 +10146,7 @@
             <a:normAutofit/>
           </a:bodyPr>
           <a:p>
-            <a:endParaRPr b="0" lang="en-HK" sz="3200" spc="-1" strike="noStrike">
+            <a:endParaRPr b="0" lang="en-US" sz="3200" spc="-1" strike="noStrike">
               <a:latin typeface="Arial"/>
             </a:endParaRPr>
           </a:p>
@@ -10180,7 +10180,7 @@
             <a:normAutofit/>
           </a:bodyPr>
           <a:p>
-            <a:endParaRPr b="0" lang="en-HK" sz="3200" spc="-1" strike="noStrike">
+            <a:endParaRPr b="0" lang="en-US" sz="3200" spc="-1" strike="noStrike">
               <a:latin typeface="Arial"/>
             </a:endParaRPr>
           </a:p>
@@ -10220,7 +10220,7 @@
         <p:txBody>
           <a:bodyPr/>
           <a:p>
-            <a:fld id="{3DC18C72-6A5D-405B-95E9-CDDAC3F13D8A}" type="slidenum">
+            <a:fld id="{8A86AB7F-4422-4790-BFC7-C3C6AFB813C7}" type="slidenum">
               <a:t>&lt;#&gt;</a:t>
             </a:fld>
           </a:p>
@@ -10241,7 +10241,7 @@
           <a:bodyPr/>
           <a:p>
             <a:r>
-              <a:rPr lang="en-HK"/>
+              <a:rPr lang="en-US"/>
               <a:t/>
             </a:r>
           </a:p>
@@ -10300,7 +10300,7 @@
             <a:pPr algn="ctr">
               <a:buNone/>
             </a:pPr>
-            <a:endParaRPr b="0" lang="en-HK" sz="4400" spc="-1" strike="noStrike">
+            <a:endParaRPr b="0" lang="en-US" sz="4400" spc="-1" strike="noStrike">
               <a:latin typeface="Arial"/>
             </a:endParaRPr>
           </a:p>
@@ -10334,7 +10334,7 @@
             <a:normAutofit/>
           </a:bodyPr>
           <a:p>
-            <a:endParaRPr b="0" lang="en-HK" sz="3200" spc="-1" strike="noStrike">
+            <a:endParaRPr b="0" lang="en-US" sz="3200" spc="-1" strike="noStrike">
               <a:latin typeface="Arial"/>
             </a:endParaRPr>
           </a:p>
@@ -10368,7 +10368,7 @@
             <a:normAutofit/>
           </a:bodyPr>
           <a:p>
-            <a:endParaRPr b="0" lang="en-HK" sz="3200" spc="-1" strike="noStrike">
+            <a:endParaRPr b="0" lang="en-US" sz="3200" spc="-1" strike="noStrike">
               <a:latin typeface="Arial"/>
             </a:endParaRPr>
           </a:p>
@@ -10402,7 +10402,7 @@
             <a:normAutofit/>
           </a:bodyPr>
           <a:p>
-            <a:endParaRPr b="0" lang="en-HK" sz="3200" spc="-1" strike="noStrike">
+            <a:endParaRPr b="0" lang="en-US" sz="3200" spc="-1" strike="noStrike">
               <a:latin typeface="Arial"/>
             </a:endParaRPr>
           </a:p>
@@ -10422,7 +10422,7 @@
         <p:txBody>
           <a:bodyPr/>
           <a:p>
-            <a:fld id="{5C86C8F6-1BF2-403C-87B0-9E1EE8628EA0}" type="slidenum">
+            <a:fld id="{67BE098D-908B-42B1-8344-C176E21DEE38}" type="slidenum">
               <a:t>&lt;#&gt;</a:t>
             </a:fld>
           </a:p>
@@ -10481,7 +10481,7 @@
             <a:pPr algn="ctr">
               <a:buNone/>
             </a:pPr>
-            <a:endParaRPr b="0" lang="en-HK" sz="4400" spc="-1" strike="noStrike">
+            <a:endParaRPr b="0" lang="en-US" sz="4400" spc="-1" strike="noStrike">
               <a:latin typeface="Arial"/>
             </a:endParaRPr>
           </a:p>
@@ -10515,7 +10515,7 @@
             <a:normAutofit/>
           </a:bodyPr>
           <a:p>
-            <a:endParaRPr b="0" lang="en-HK" sz="3200" spc="-1" strike="noStrike">
+            <a:endParaRPr b="0" lang="en-US" sz="3200" spc="-1" strike="noStrike">
               <a:latin typeface="Arial"/>
             </a:endParaRPr>
           </a:p>
@@ -10549,7 +10549,7 @@
             <a:normAutofit/>
           </a:bodyPr>
           <a:p>
-            <a:endParaRPr b="0" lang="en-HK" sz="3200" spc="-1" strike="noStrike">
+            <a:endParaRPr b="0" lang="en-US" sz="3200" spc="-1" strike="noStrike">
               <a:latin typeface="Arial"/>
             </a:endParaRPr>
           </a:p>
@@ -10583,7 +10583,7 @@
             <a:normAutofit/>
           </a:bodyPr>
           <a:p>
-            <a:endParaRPr b="0" lang="en-HK" sz="3200" spc="-1" strike="noStrike">
+            <a:endParaRPr b="0" lang="en-US" sz="3200" spc="-1" strike="noStrike">
               <a:latin typeface="Arial"/>
             </a:endParaRPr>
           </a:p>
@@ -10603,7 +10603,7 @@
         <p:txBody>
           <a:bodyPr/>
           <a:p>
-            <a:fld id="{FC966DC4-944D-44C4-9E05-82225D8B6B83}" type="slidenum">
+            <a:fld id="{3DF2EDF0-2FB7-451D-A5CC-24950BF45D96}" type="slidenum">
               <a:t>&lt;#&gt;</a:t>
             </a:fld>
           </a:p>
@@ -10662,7 +10662,7 @@
             <a:pPr algn="ctr">
               <a:buNone/>
             </a:pPr>
-            <a:endParaRPr b="0" lang="en-HK" sz="4400" spc="-1" strike="noStrike">
+            <a:endParaRPr b="0" lang="en-US" sz="4400" spc="-1" strike="noStrike">
               <a:latin typeface="Arial"/>
             </a:endParaRPr>
           </a:p>
@@ -10696,7 +10696,7 @@
             <a:normAutofit/>
           </a:bodyPr>
           <a:p>
-            <a:endParaRPr b="0" lang="en-HK" sz="3200" spc="-1" strike="noStrike">
+            <a:endParaRPr b="0" lang="en-US" sz="3200" spc="-1" strike="noStrike">
               <a:latin typeface="Arial"/>
             </a:endParaRPr>
           </a:p>
@@ -10730,7 +10730,7 @@
             <a:normAutofit/>
           </a:bodyPr>
           <a:p>
-            <a:endParaRPr b="0" lang="en-HK" sz="3200" spc="-1" strike="noStrike">
+            <a:endParaRPr b="0" lang="en-US" sz="3200" spc="-1" strike="noStrike">
               <a:latin typeface="Arial"/>
             </a:endParaRPr>
           </a:p>
@@ -10764,7 +10764,7 @@
             <a:normAutofit/>
           </a:bodyPr>
           <a:p>
-            <a:endParaRPr b="0" lang="en-HK" sz="3200" spc="-1" strike="noStrike">
+            <a:endParaRPr b="0" lang="en-US" sz="3200" spc="-1" strike="noStrike">
               <a:latin typeface="Arial"/>
             </a:endParaRPr>
           </a:p>
@@ -10784,7 +10784,7 @@
         <p:txBody>
           <a:bodyPr/>
           <a:p>
-            <a:fld id="{87880918-5ACB-49F4-9E31-E16BD139789C}" type="slidenum">
+            <a:fld id="{E3656DCF-4DB5-4821-8A2F-4FAD8B00B9EC}" type="slidenum">
               <a:t>&lt;#&gt;</a:t>
             </a:fld>
           </a:p>
@@ -10827,10 +10827,10 @@
         </p:nvGrpSpPr>
         <p:grpSpPr>
           <a:xfrm>
-            <a:off x="6100560" y="0"/>
-            <a:ext cx="3043440" cy="2030400"/>
-            <a:chOff x="6100560" y="0"/>
-            <a:chExt cx="3043440" cy="2030400"/>
+            <a:off x="6100920" y="0"/>
+            <a:ext cx="3043080" cy="2030400"/>
+            <a:chOff x="6100920" y="0"/>
+            <a:chExt cx="3043080" cy="2030400"/>
           </a:xfrm>
         </p:grpSpPr>
         <p:sp>
@@ -10842,7 +10842,7 @@
           <p:spPr>
             <a:xfrm>
               <a:off x="8128800" y="0"/>
-              <a:ext cx="1013040" cy="1013040"/>
+              <a:ext cx="1012680" cy="1012680"/>
             </a:xfrm>
             <a:prstGeom prst="rect">
               <a:avLst/>
@@ -10869,8 +10869,8 @@
           </p:nvSpPr>
           <p:spPr>
             <a:xfrm flipH="1">
-              <a:off x="7111440" y="0"/>
-              <a:ext cx="1013040" cy="1013040"/>
+              <a:off x="7110720" y="0"/>
+              <a:ext cx="1012680" cy="1012680"/>
             </a:xfrm>
             <a:prstGeom prst="rtTriangle">
               <a:avLst/>
@@ -10897,8 +10897,8 @@
           </p:nvSpPr>
           <p:spPr>
             <a:xfrm flipH="1" rot="10800000">
-              <a:off x="7113600" y="2160"/>
-              <a:ext cx="1013040" cy="1013040"/>
+              <a:off x="7113240" y="2520"/>
+              <a:ext cx="1012680" cy="1012680"/>
             </a:xfrm>
             <a:prstGeom prst="rtTriangle">
               <a:avLst/>
@@ -10925,8 +10925,8 @@
           </p:nvSpPr>
           <p:spPr>
             <a:xfrm rot="10800000">
-              <a:off x="6100560" y="2160"/>
-              <a:ext cx="1013040" cy="1013040"/>
+              <a:off x="6100920" y="2520"/>
+              <a:ext cx="1012680" cy="1012680"/>
             </a:xfrm>
             <a:prstGeom prst="rtTriangle">
               <a:avLst/>
@@ -10953,8 +10953,8 @@
           </p:nvSpPr>
           <p:spPr>
             <a:xfrm rot="10800000">
-              <a:off x="8130960" y="1017360"/>
-              <a:ext cx="1013040" cy="1013040"/>
+              <a:off x="8131320" y="1017720"/>
+              <a:ext cx="1012680" cy="1012680"/>
             </a:xfrm>
             <a:prstGeom prst="rtTriangle">
               <a:avLst/>
@@ -10987,7 +10987,7 @@
         <p:spPr>
           <a:xfrm>
             <a:off x="8460360" y="4651200"/>
-            <a:ext cx="546480" cy="391320"/>
+            <a:ext cx="546120" cy="390960"/>
           </a:xfrm>
           <a:prstGeom prst="rect">
             <a:avLst/>
@@ -11029,7 +11029,7 @@
                 <a:tab algn="l" pos="0"/>
               </a:tabLst>
             </a:pPr>
-            <a:fld id="{BE81A5A3-BEEE-4CEF-A8FF-4FBDBA3C7446}" type="slidenum">
+            <a:fld id="{75FF8E7F-F1A1-41AE-B01E-13789B310129}" type="slidenum">
               <a:rPr b="0" lang="en" sz="1000" spc="-1" strike="noStrike">
                 <a:solidFill>
                   <a:srgbClr val="ffffff"/>
@@ -11039,7 +11039,7 @@
               </a:rPr>
               <a:t>&lt;number&gt;</a:t>
             </a:fld>
-            <a:endParaRPr b="0" lang="en-HK" sz="1000" spc="-1" strike="noStrike">
+            <a:endParaRPr b="0" lang="en-US" sz="1000" spc="-1" strike="noStrike">
               <a:latin typeface="Times New Roman"/>
             </a:endParaRPr>
           </a:p>
@@ -11077,12 +11077,12 @@
               <a:buNone/>
             </a:pPr>
             <a:r>
-              <a:rPr b="0" lang="en-HK" sz="4400" spc="-1" strike="noStrike">
+              <a:rPr b="0" lang="en-US" sz="4400" spc="-1" strike="noStrike">
                 <a:latin typeface="Arial"/>
               </a:rPr>
               <a:t>Click to edit the title text format</a:t>
             </a:r>
-            <a:endParaRPr b="0" lang="en-HK" sz="4400" spc="-1" strike="noStrike">
+            <a:endParaRPr b="0" lang="en-US" sz="4400" spc="-1" strike="noStrike">
               <a:latin typeface="Arial"/>
             </a:endParaRPr>
           </a:p>
@@ -11128,12 +11128,12 @@
               <a:buChar char=""/>
             </a:pPr>
             <a:r>
-              <a:rPr b="0" lang="en-HK" sz="3200" spc="-1" strike="noStrike">
+              <a:rPr b="0" lang="en-US" sz="3200" spc="-1" strike="noStrike">
                 <a:latin typeface="Arial"/>
               </a:rPr>
               <a:t>Click to edit the outline text format</a:t>
             </a:r>
-            <a:endParaRPr b="0" lang="en-HK" sz="3200" spc="-1" strike="noStrike">
+            <a:endParaRPr b="0" lang="en-US" sz="3200" spc="-1" strike="noStrike">
               <a:latin typeface="Arial"/>
             </a:endParaRPr>
           </a:p>
@@ -11150,12 +11150,12 @@
               <a:buChar char=""/>
             </a:pPr>
             <a:r>
-              <a:rPr b="0" lang="en-HK" sz="2800" spc="-1" strike="noStrike">
+              <a:rPr b="0" lang="en-US" sz="2800" spc="-1" strike="noStrike">
                 <a:latin typeface="Arial"/>
               </a:rPr>
               <a:t>Second Outline Level</a:t>
             </a:r>
-            <a:endParaRPr b="0" lang="en-HK" sz="2800" spc="-1" strike="noStrike">
+            <a:endParaRPr b="0" lang="en-US" sz="2800" spc="-1" strike="noStrike">
               <a:latin typeface="Arial"/>
             </a:endParaRPr>
           </a:p>
@@ -11172,12 +11172,12 @@
               <a:buChar char=""/>
             </a:pPr>
             <a:r>
-              <a:rPr b="0" lang="en-HK" sz="2400" spc="-1" strike="noStrike">
+              <a:rPr b="0" lang="en-US" sz="2400" spc="-1" strike="noStrike">
                 <a:latin typeface="Arial"/>
               </a:rPr>
               <a:t>Third Outline Level</a:t>
             </a:r>
-            <a:endParaRPr b="0" lang="en-HK" sz="2400" spc="-1" strike="noStrike">
+            <a:endParaRPr b="0" lang="en-US" sz="2400" spc="-1" strike="noStrike">
               <a:latin typeface="Arial"/>
             </a:endParaRPr>
           </a:p>
@@ -11194,12 +11194,12 @@
               <a:buChar char=""/>
             </a:pPr>
             <a:r>
-              <a:rPr b="0" lang="en-HK" sz="2000" spc="-1" strike="noStrike">
+              <a:rPr b="0" lang="en-US" sz="2000" spc="-1" strike="noStrike">
                 <a:latin typeface="Arial"/>
               </a:rPr>
               <a:t>Fourth Outline Level</a:t>
             </a:r>
-            <a:endParaRPr b="0" lang="en-HK" sz="2000" spc="-1" strike="noStrike">
+            <a:endParaRPr b="0" lang="en-US" sz="2000" spc="-1" strike="noStrike">
               <a:latin typeface="Arial"/>
             </a:endParaRPr>
           </a:p>
@@ -11216,12 +11216,12 @@
               <a:buChar char=""/>
             </a:pPr>
             <a:r>
-              <a:rPr b="0" lang="en-HK" sz="2000" spc="-1" strike="noStrike">
+              <a:rPr b="0" lang="en-US" sz="2000" spc="-1" strike="noStrike">
                 <a:latin typeface="Arial"/>
               </a:rPr>
               <a:t>Fifth Outline Level</a:t>
             </a:r>
-            <a:endParaRPr b="0" lang="en-HK" sz="2000" spc="-1" strike="noStrike">
+            <a:endParaRPr b="0" lang="en-US" sz="2000" spc="-1" strike="noStrike">
               <a:latin typeface="Arial"/>
             </a:endParaRPr>
           </a:p>
@@ -11238,12 +11238,12 @@
               <a:buChar char=""/>
             </a:pPr>
             <a:r>
-              <a:rPr b="0" lang="en-HK" sz="2000" spc="-1" strike="noStrike">
+              <a:rPr b="0" lang="en-US" sz="2000" spc="-1" strike="noStrike">
                 <a:latin typeface="Arial"/>
               </a:rPr>
               <a:t>Sixth Outline Level</a:t>
             </a:r>
-            <a:endParaRPr b="0" lang="en-HK" sz="2000" spc="-1" strike="noStrike">
+            <a:endParaRPr b="0" lang="en-US" sz="2000" spc="-1" strike="noStrike">
               <a:latin typeface="Arial"/>
             </a:endParaRPr>
           </a:p>
@@ -11260,12 +11260,12 @@
               <a:buChar char=""/>
             </a:pPr>
             <a:r>
-              <a:rPr b="0" lang="en-HK" sz="2000" spc="-1" strike="noStrike">
+              <a:rPr b="0" lang="en-US" sz="2000" spc="-1" strike="noStrike">
                 <a:latin typeface="Arial"/>
               </a:rPr>
               <a:t>Seventh Outline Level</a:t>
             </a:r>
-            <a:endParaRPr b="0" lang="en-HK" sz="2000" spc="-1" strike="noStrike">
+            <a:endParaRPr b="0" lang="en-US" sz="2000" spc="-1" strike="noStrike">
               <a:latin typeface="Arial"/>
             </a:endParaRPr>
           </a:p>
@@ -11324,7 +11324,7 @@
         <p:spPr>
           <a:xfrm>
             <a:off x="4572000" y="0"/>
-            <a:ext cx="4569840" cy="5141520"/>
+            <a:ext cx="4569480" cy="5141160"/>
           </a:xfrm>
           <a:prstGeom prst="rect">
             <a:avLst/>
@@ -11352,7 +11352,7 @@
         <p:spPr>
           <a:xfrm>
             <a:off x="5029560" y="4495680"/>
-            <a:ext cx="466200" cy="360"/>
+            <a:ext cx="465840" cy="360"/>
           </a:xfrm>
           <a:custGeom>
             <a:avLst/>
@@ -11398,7 +11398,7 @@
         <p:spPr>
           <a:xfrm>
             <a:off x="8460360" y="4651200"/>
-            <a:ext cx="546480" cy="391320"/>
+            <a:ext cx="546120" cy="390960"/>
           </a:xfrm>
           <a:prstGeom prst="rect">
             <a:avLst/>
@@ -11440,7 +11440,7 @@
                 <a:tab algn="l" pos="0"/>
               </a:tabLst>
             </a:pPr>
-            <a:fld id="{BCD40742-8379-42CB-A1B5-12EB4489ADE8}" type="slidenum">
+            <a:fld id="{171985AC-D629-49D9-A809-87FEC784754C}" type="slidenum">
               <a:rPr b="0" lang="en" sz="1000" spc="-1" strike="noStrike">
                 <a:solidFill>
                   <a:srgbClr val="ffffff"/>
@@ -11450,7 +11450,7 @@
               </a:rPr>
               <a:t>&lt;number&gt;</a:t>
             </a:fld>
-            <a:endParaRPr b="0" lang="en-HK" sz="1000" spc="-1" strike="noStrike">
+            <a:endParaRPr b="0" lang="en-US" sz="1000" spc="-1" strike="noStrike">
               <a:latin typeface="Times New Roman"/>
             </a:endParaRPr>
           </a:p>
@@ -11488,12 +11488,12 @@
               <a:buNone/>
             </a:pPr>
             <a:r>
-              <a:rPr b="0" lang="en-HK" sz="4400" spc="-1" strike="noStrike">
+              <a:rPr b="0" lang="en-US" sz="4400" spc="-1" strike="noStrike">
                 <a:latin typeface="Arial"/>
               </a:rPr>
               <a:t>Click to edit the title text format</a:t>
             </a:r>
-            <a:endParaRPr b="0" lang="en-HK" sz="4400" spc="-1" strike="noStrike">
+            <a:endParaRPr b="0" lang="en-US" sz="4400" spc="-1" strike="noStrike">
               <a:latin typeface="Arial"/>
             </a:endParaRPr>
           </a:p>
@@ -11539,12 +11539,12 @@
               <a:buChar char=""/>
             </a:pPr>
             <a:r>
-              <a:rPr b="0" lang="en-HK" sz="3200" spc="-1" strike="noStrike">
+              <a:rPr b="0" lang="en-US" sz="3200" spc="-1" strike="noStrike">
                 <a:latin typeface="Arial"/>
               </a:rPr>
               <a:t>Click to edit the outline text format</a:t>
             </a:r>
-            <a:endParaRPr b="0" lang="en-HK" sz="3200" spc="-1" strike="noStrike">
+            <a:endParaRPr b="0" lang="en-US" sz="3200" spc="-1" strike="noStrike">
               <a:latin typeface="Arial"/>
             </a:endParaRPr>
           </a:p>
@@ -11561,12 +11561,12 @@
               <a:buChar char=""/>
             </a:pPr>
             <a:r>
-              <a:rPr b="0" lang="en-HK" sz="2800" spc="-1" strike="noStrike">
+              <a:rPr b="0" lang="en-US" sz="2800" spc="-1" strike="noStrike">
                 <a:latin typeface="Arial"/>
               </a:rPr>
               <a:t>Second Outline Level</a:t>
             </a:r>
-            <a:endParaRPr b="0" lang="en-HK" sz="2800" spc="-1" strike="noStrike">
+            <a:endParaRPr b="0" lang="en-US" sz="2800" spc="-1" strike="noStrike">
               <a:latin typeface="Arial"/>
             </a:endParaRPr>
           </a:p>
@@ -11583,12 +11583,12 @@
               <a:buChar char=""/>
             </a:pPr>
             <a:r>
-              <a:rPr b="0" lang="en-HK" sz="2400" spc="-1" strike="noStrike">
+              <a:rPr b="0" lang="en-US" sz="2400" spc="-1" strike="noStrike">
                 <a:latin typeface="Arial"/>
               </a:rPr>
               <a:t>Third Outline Level</a:t>
             </a:r>
-            <a:endParaRPr b="0" lang="en-HK" sz="2400" spc="-1" strike="noStrike">
+            <a:endParaRPr b="0" lang="en-US" sz="2400" spc="-1" strike="noStrike">
               <a:latin typeface="Arial"/>
             </a:endParaRPr>
           </a:p>
@@ -11605,12 +11605,12 @@
               <a:buChar char=""/>
             </a:pPr>
             <a:r>
-              <a:rPr b="0" lang="en-HK" sz="2000" spc="-1" strike="noStrike">
+              <a:rPr b="0" lang="en-US" sz="2000" spc="-1" strike="noStrike">
                 <a:latin typeface="Arial"/>
               </a:rPr>
               <a:t>Fourth Outline Level</a:t>
             </a:r>
-            <a:endParaRPr b="0" lang="en-HK" sz="2000" spc="-1" strike="noStrike">
+            <a:endParaRPr b="0" lang="en-US" sz="2000" spc="-1" strike="noStrike">
               <a:latin typeface="Arial"/>
             </a:endParaRPr>
           </a:p>
@@ -11627,12 +11627,12 @@
               <a:buChar char=""/>
             </a:pPr>
             <a:r>
-              <a:rPr b="0" lang="en-HK" sz="2000" spc="-1" strike="noStrike">
+              <a:rPr b="0" lang="en-US" sz="2000" spc="-1" strike="noStrike">
                 <a:latin typeface="Arial"/>
               </a:rPr>
               <a:t>Fifth Outline Level</a:t>
             </a:r>
-            <a:endParaRPr b="0" lang="en-HK" sz="2000" spc="-1" strike="noStrike">
+            <a:endParaRPr b="0" lang="en-US" sz="2000" spc="-1" strike="noStrike">
               <a:latin typeface="Arial"/>
             </a:endParaRPr>
           </a:p>
@@ -11649,12 +11649,12 @@
               <a:buChar char=""/>
             </a:pPr>
             <a:r>
-              <a:rPr b="0" lang="en-HK" sz="2000" spc="-1" strike="noStrike">
+              <a:rPr b="0" lang="en-US" sz="2000" spc="-1" strike="noStrike">
                 <a:latin typeface="Arial"/>
               </a:rPr>
               <a:t>Sixth Outline Level</a:t>
             </a:r>
-            <a:endParaRPr b="0" lang="en-HK" sz="2000" spc="-1" strike="noStrike">
+            <a:endParaRPr b="0" lang="en-US" sz="2000" spc="-1" strike="noStrike">
               <a:latin typeface="Arial"/>
             </a:endParaRPr>
           </a:p>
@@ -11671,12 +11671,12 @@
               <a:buChar char=""/>
             </a:pPr>
             <a:r>
-              <a:rPr b="0" lang="en-HK" sz="2000" spc="-1" strike="noStrike">
+              <a:rPr b="0" lang="en-US" sz="2000" spc="-1" strike="noStrike">
                 <a:latin typeface="Arial"/>
               </a:rPr>
               <a:t>Seventh Outline Level</a:t>
             </a:r>
-            <a:endParaRPr b="0" lang="en-HK" sz="2000" spc="-1" strike="noStrike">
+            <a:endParaRPr b="0" lang="en-US" sz="2000" spc="-1" strike="noStrike">
               <a:latin typeface="Arial"/>
             </a:endParaRPr>
           </a:p>
@@ -11739,7 +11739,7 @@
         <p:spPr>
           <a:xfrm>
             <a:off x="380880" y="4629240"/>
-            <a:ext cx="3629520" cy="340920"/>
+            <a:ext cx="3629160" cy="340560"/>
           </a:xfrm>
           <a:prstGeom prst="rect">
             <a:avLst/>
@@ -11762,7 +11762,7 @@
         <p:spPr>
           <a:xfrm>
             <a:off x="5867280" y="4625280"/>
-            <a:ext cx="1960920" cy="409320"/>
+            <a:ext cx="1960560" cy="408960"/>
           </a:xfrm>
           <a:prstGeom prst="rect">
             <a:avLst/>
@@ -11785,7 +11785,7 @@
         <p:spPr>
           <a:xfrm>
             <a:off x="3124080" y="4767120"/>
-            <a:ext cx="2893320" cy="271800"/>
+            <a:ext cx="2892960" cy="271440"/>
           </a:xfrm>
           <a:prstGeom prst="rect">
             <a:avLst/>
@@ -11823,7 +11823,7 @@
               </a:rPr>
               <a:t>&lt;footer&gt;</a:t>
             </a:r>
-            <a:endParaRPr b="0" lang="en-HK" sz="1400" spc="-1" strike="noStrike">
+            <a:endParaRPr b="0" lang="en-US" sz="1400" spc="-1" strike="noStrike">
               <a:latin typeface="Times New Roman"/>
             </a:endParaRPr>
           </a:p>
@@ -11842,7 +11842,7 @@
         <p:spPr>
           <a:xfrm>
             <a:off x="6553080" y="4767120"/>
-            <a:ext cx="2131560" cy="271800"/>
+            <a:ext cx="2131200" cy="271440"/>
           </a:xfrm>
           <a:prstGeom prst="rect">
             <a:avLst/>
@@ -11884,7 +11884,7 @@
                 <a:tab algn="l" pos="0"/>
               </a:tabLst>
             </a:pPr>
-            <a:fld id="{F4DE9EE4-4700-46B3-B148-F00984A33FA0}" type="slidenum">
+            <a:fld id="{4DFDD513-EF68-4358-97BF-BD02CDC1D32C}" type="slidenum">
               <a:rPr b="0" lang="en" sz="1800" spc="-1" strike="noStrike">
                 <a:solidFill>
                   <a:srgbClr val="000000"/>
@@ -11894,7 +11894,7 @@
               </a:rPr>
               <a:t>&lt;number&gt;</a:t>
             </a:fld>
-            <a:endParaRPr b="0" lang="en-HK" sz="1800" spc="-1" strike="noStrike">
+            <a:endParaRPr b="0" lang="en-US" sz="1800" spc="-1" strike="noStrike">
               <a:latin typeface="Times New Roman"/>
             </a:endParaRPr>
           </a:p>
@@ -11913,7 +11913,7 @@
         <p:spPr>
           <a:xfrm>
             <a:off x="457200" y="4767120"/>
-            <a:ext cx="2131560" cy="271800"/>
+            <a:ext cx="2131200" cy="271440"/>
           </a:xfrm>
           <a:prstGeom prst="rect">
             <a:avLst/>
@@ -11929,19 +11929,19 @@
           </a:bodyPr>
           <a:lstStyle>
             <a:lvl1pPr>
-              <a:defRPr b="0" lang="en-HK" sz="1400" spc="-1" strike="noStrike">
+              <a:defRPr b="0" lang="en-US" sz="1400" spc="-1" strike="noStrike">
                 <a:latin typeface="Times New Roman"/>
               </a:defRPr>
             </a:lvl1pPr>
           </a:lstStyle>
           <a:p>
             <a:r>
-              <a:rPr b="0" lang="en-HK" sz="1400" spc="-1" strike="noStrike">
+              <a:rPr b="0" lang="en-US" sz="1400" spc="-1" strike="noStrike">
                 <a:latin typeface="Times New Roman"/>
               </a:rPr>
               <a:t>&lt;date/time&gt;</a:t>
             </a:r>
-            <a:endParaRPr b="0" lang="en-HK" sz="1400" spc="-1" strike="noStrike">
+            <a:endParaRPr b="0" lang="en-US" sz="1400" spc="-1" strike="noStrike">
               <a:latin typeface="Times New Roman"/>
             </a:endParaRPr>
           </a:p>
@@ -11979,12 +11979,12 @@
               <a:buNone/>
             </a:pPr>
             <a:r>
-              <a:rPr b="0" lang="en-HK" sz="4400" spc="-1" strike="noStrike">
+              <a:rPr b="0" lang="en-US" sz="4400" spc="-1" strike="noStrike">
                 <a:latin typeface="Arial"/>
               </a:rPr>
               <a:t>Click to edit the title text format</a:t>
             </a:r>
-            <a:endParaRPr b="0" lang="en-HK" sz="4400" spc="-1" strike="noStrike">
+            <a:endParaRPr b="0" lang="en-US" sz="4400" spc="-1" strike="noStrike">
               <a:latin typeface="Arial"/>
             </a:endParaRPr>
           </a:p>
@@ -12030,12 +12030,12 @@
               <a:buChar char=""/>
             </a:pPr>
             <a:r>
-              <a:rPr b="0" lang="en-HK" sz="3200" spc="-1" strike="noStrike">
+              <a:rPr b="0" lang="en-US" sz="3200" spc="-1" strike="noStrike">
                 <a:latin typeface="Arial"/>
               </a:rPr>
               <a:t>Click to edit the outline text format</a:t>
             </a:r>
-            <a:endParaRPr b="0" lang="en-HK" sz="3200" spc="-1" strike="noStrike">
+            <a:endParaRPr b="0" lang="en-US" sz="3200" spc="-1" strike="noStrike">
               <a:latin typeface="Arial"/>
             </a:endParaRPr>
           </a:p>
@@ -12052,12 +12052,12 @@
               <a:buChar char=""/>
             </a:pPr>
             <a:r>
-              <a:rPr b="0" lang="en-HK" sz="2800" spc="-1" strike="noStrike">
+              <a:rPr b="0" lang="en-US" sz="2800" spc="-1" strike="noStrike">
                 <a:latin typeface="Arial"/>
               </a:rPr>
               <a:t>Second Outline Level</a:t>
             </a:r>
-            <a:endParaRPr b="0" lang="en-HK" sz="2800" spc="-1" strike="noStrike">
+            <a:endParaRPr b="0" lang="en-US" sz="2800" spc="-1" strike="noStrike">
               <a:latin typeface="Arial"/>
             </a:endParaRPr>
           </a:p>
@@ -12074,12 +12074,12 @@
               <a:buChar char=""/>
             </a:pPr>
             <a:r>
-              <a:rPr b="0" lang="en-HK" sz="2400" spc="-1" strike="noStrike">
+              <a:rPr b="0" lang="en-US" sz="2400" spc="-1" strike="noStrike">
                 <a:latin typeface="Arial"/>
               </a:rPr>
               <a:t>Third Outline Level</a:t>
             </a:r>
-            <a:endParaRPr b="0" lang="en-HK" sz="2400" spc="-1" strike="noStrike">
+            <a:endParaRPr b="0" lang="en-US" sz="2400" spc="-1" strike="noStrike">
               <a:latin typeface="Arial"/>
             </a:endParaRPr>
           </a:p>
@@ -12096,12 +12096,12 @@
               <a:buChar char=""/>
             </a:pPr>
             <a:r>
-              <a:rPr b="0" lang="en-HK" sz="2000" spc="-1" strike="noStrike">
+              <a:rPr b="0" lang="en-US" sz="2000" spc="-1" strike="noStrike">
                 <a:latin typeface="Arial"/>
               </a:rPr>
               <a:t>Fourth Outline Level</a:t>
             </a:r>
-            <a:endParaRPr b="0" lang="en-HK" sz="2000" spc="-1" strike="noStrike">
+            <a:endParaRPr b="0" lang="en-US" sz="2000" spc="-1" strike="noStrike">
               <a:latin typeface="Arial"/>
             </a:endParaRPr>
           </a:p>
@@ -12118,12 +12118,12 @@
               <a:buChar char=""/>
             </a:pPr>
             <a:r>
-              <a:rPr b="0" lang="en-HK" sz="2000" spc="-1" strike="noStrike">
+              <a:rPr b="0" lang="en-US" sz="2000" spc="-1" strike="noStrike">
                 <a:latin typeface="Arial"/>
               </a:rPr>
               <a:t>Fifth Outline Level</a:t>
             </a:r>
-            <a:endParaRPr b="0" lang="en-HK" sz="2000" spc="-1" strike="noStrike">
+            <a:endParaRPr b="0" lang="en-US" sz="2000" spc="-1" strike="noStrike">
               <a:latin typeface="Arial"/>
             </a:endParaRPr>
           </a:p>
@@ -12140,12 +12140,12 @@
               <a:buChar char=""/>
             </a:pPr>
             <a:r>
-              <a:rPr b="0" lang="en-HK" sz="2000" spc="-1" strike="noStrike">
+              <a:rPr b="0" lang="en-US" sz="2000" spc="-1" strike="noStrike">
                 <a:latin typeface="Arial"/>
               </a:rPr>
               <a:t>Sixth Outline Level</a:t>
             </a:r>
-            <a:endParaRPr b="0" lang="en-HK" sz="2000" spc="-1" strike="noStrike">
+            <a:endParaRPr b="0" lang="en-US" sz="2000" spc="-1" strike="noStrike">
               <a:latin typeface="Arial"/>
             </a:endParaRPr>
           </a:p>
@@ -12162,12 +12162,12 @@
               <a:buChar char=""/>
             </a:pPr>
             <a:r>
-              <a:rPr b="0" lang="en-HK" sz="2000" spc="-1" strike="noStrike">
+              <a:rPr b="0" lang="en-US" sz="2000" spc="-1" strike="noStrike">
                 <a:latin typeface="Arial"/>
               </a:rPr>
               <a:t>Seventh Outline Level</a:t>
             </a:r>
-            <a:endParaRPr b="0" lang="en-HK" sz="2000" spc="-1" strike="noStrike">
+            <a:endParaRPr b="0" lang="en-US" sz="2000" spc="-1" strike="noStrike">
               <a:latin typeface="Arial"/>
             </a:endParaRPr>
           </a:p>
@@ -12226,9 +12226,9 @@
         <p:grpSpPr>
           <a:xfrm>
             <a:off x="0" y="3903840"/>
-            <a:ext cx="9144000" cy="1237680"/>
+            <a:ext cx="9144000" cy="1237320"/>
             <a:chOff x="0" y="3903840"/>
-            <a:chExt cx="9144000" cy="1237680"/>
+            <a:chExt cx="9144000" cy="1237320"/>
           </a:xfrm>
         </p:grpSpPr>
         <p:sp>
@@ -12240,7 +12240,7 @@
           <p:spPr>
             <a:xfrm>
               <a:off x="8154720" y="3903840"/>
-              <a:ext cx="987120" cy="985680"/>
+              <a:ext cx="986760" cy="985320"/>
             </a:xfrm>
             <a:prstGeom prst="rtTriangle">
               <a:avLst/>
@@ -12267,8 +12267,8 @@
           </p:nvSpPr>
           <p:spPr>
             <a:xfrm flipH="1">
-              <a:off x="6179040" y="3903840"/>
-              <a:ext cx="987120" cy="985680"/>
+              <a:off x="6178320" y="3903840"/>
+              <a:ext cx="986760" cy="985320"/>
             </a:xfrm>
             <a:prstGeom prst="rtTriangle">
               <a:avLst/>
@@ -12296,7 +12296,7 @@
           <p:spPr>
             <a:xfrm>
               <a:off x="7170120" y="3903840"/>
-              <a:ext cx="987120" cy="985680"/>
+              <a:ext cx="986760" cy="985320"/>
             </a:xfrm>
             <a:prstGeom prst="rect">
               <a:avLst/>
@@ -12323,8 +12323,8 @@
           </p:nvSpPr>
           <p:spPr>
             <a:xfrm rot="10800000">
-              <a:off x="8156880" y="3906000"/>
-              <a:ext cx="987120" cy="985680"/>
+              <a:off x="8157240" y="3906360"/>
+              <a:ext cx="986760" cy="985320"/>
             </a:xfrm>
             <a:prstGeom prst="rtTriangle">
               <a:avLst/>
@@ -12352,7 +12352,7 @@
           <p:spPr>
             <a:xfrm>
               <a:off x="0" y="4891680"/>
-              <a:ext cx="9141840" cy="249840"/>
+              <a:ext cx="9141480" cy="249480"/>
             </a:xfrm>
             <a:prstGeom prst="rect">
               <a:avLst/>
@@ -12385,7 +12385,7 @@
         <p:spPr>
           <a:xfrm>
             <a:off x="8460360" y="4651200"/>
-            <a:ext cx="546480" cy="391320"/>
+            <a:ext cx="546120" cy="390960"/>
           </a:xfrm>
           <a:prstGeom prst="rect">
             <a:avLst/>
@@ -12427,7 +12427,7 @@
                 <a:tab algn="l" pos="0"/>
               </a:tabLst>
             </a:pPr>
-            <a:fld id="{5C41B1E4-C5DF-4CC3-A8D5-271A0B066E9C}" type="slidenum">
+            <a:fld id="{506F80FC-2282-49E8-8342-B42B70119B01}" type="slidenum">
               <a:rPr b="0" lang="en" sz="1000" spc="-1" strike="noStrike">
                 <a:solidFill>
                   <a:srgbClr val="ffffff"/>
@@ -12437,7 +12437,7 @@
               </a:rPr>
               <a:t>&lt;number&gt;</a:t>
             </a:fld>
-            <a:endParaRPr b="0" lang="en-HK" sz="1000" spc="-1" strike="noStrike">
+            <a:endParaRPr b="0" lang="en-US" sz="1000" spc="-1" strike="noStrike">
               <a:latin typeface="Times New Roman"/>
             </a:endParaRPr>
           </a:p>
@@ -12475,12 +12475,12 @@
               <a:buNone/>
             </a:pPr>
             <a:r>
-              <a:rPr b="0" lang="en-HK" sz="4400" spc="-1" strike="noStrike">
+              <a:rPr b="0" lang="en-US" sz="4400" spc="-1" strike="noStrike">
                 <a:latin typeface="Arial"/>
               </a:rPr>
               <a:t>Click to edit the title text format</a:t>
             </a:r>
-            <a:endParaRPr b="0" lang="en-HK" sz="4400" spc="-1" strike="noStrike">
+            <a:endParaRPr b="0" lang="en-US" sz="4400" spc="-1" strike="noStrike">
               <a:latin typeface="Arial"/>
             </a:endParaRPr>
           </a:p>
@@ -12526,12 +12526,12 @@
               <a:buChar char=""/>
             </a:pPr>
             <a:r>
-              <a:rPr b="0" lang="en-HK" sz="3200" spc="-1" strike="noStrike">
+              <a:rPr b="0" lang="en-US" sz="3200" spc="-1" strike="noStrike">
                 <a:latin typeface="Arial"/>
               </a:rPr>
               <a:t>Click to edit the outline text format</a:t>
             </a:r>
-            <a:endParaRPr b="0" lang="en-HK" sz="3200" spc="-1" strike="noStrike">
+            <a:endParaRPr b="0" lang="en-US" sz="3200" spc="-1" strike="noStrike">
               <a:latin typeface="Arial"/>
             </a:endParaRPr>
           </a:p>
@@ -12548,12 +12548,12 @@
               <a:buChar char=""/>
             </a:pPr>
             <a:r>
-              <a:rPr b="0" lang="en-HK" sz="2800" spc="-1" strike="noStrike">
+              <a:rPr b="0" lang="en-US" sz="2800" spc="-1" strike="noStrike">
                 <a:latin typeface="Arial"/>
               </a:rPr>
               <a:t>Second Outline Level</a:t>
             </a:r>
-            <a:endParaRPr b="0" lang="en-HK" sz="2800" spc="-1" strike="noStrike">
+            <a:endParaRPr b="0" lang="en-US" sz="2800" spc="-1" strike="noStrike">
               <a:latin typeface="Arial"/>
             </a:endParaRPr>
           </a:p>
@@ -12570,12 +12570,12 @@
               <a:buChar char=""/>
             </a:pPr>
             <a:r>
-              <a:rPr b="0" lang="en-HK" sz="2400" spc="-1" strike="noStrike">
+              <a:rPr b="0" lang="en-US" sz="2400" spc="-1" strike="noStrike">
                 <a:latin typeface="Arial"/>
               </a:rPr>
               <a:t>Third Outline Level</a:t>
             </a:r>
-            <a:endParaRPr b="0" lang="en-HK" sz="2400" spc="-1" strike="noStrike">
+            <a:endParaRPr b="0" lang="en-US" sz="2400" spc="-1" strike="noStrike">
               <a:latin typeface="Arial"/>
             </a:endParaRPr>
           </a:p>
@@ -12592,12 +12592,12 @@
               <a:buChar char=""/>
             </a:pPr>
             <a:r>
-              <a:rPr b="0" lang="en-HK" sz="2000" spc="-1" strike="noStrike">
+              <a:rPr b="0" lang="en-US" sz="2000" spc="-1" strike="noStrike">
                 <a:latin typeface="Arial"/>
               </a:rPr>
               <a:t>Fourth Outline Level</a:t>
             </a:r>
-            <a:endParaRPr b="0" lang="en-HK" sz="2000" spc="-1" strike="noStrike">
+            <a:endParaRPr b="0" lang="en-US" sz="2000" spc="-1" strike="noStrike">
               <a:latin typeface="Arial"/>
             </a:endParaRPr>
           </a:p>
@@ -12614,12 +12614,12 @@
               <a:buChar char=""/>
             </a:pPr>
             <a:r>
-              <a:rPr b="0" lang="en-HK" sz="2000" spc="-1" strike="noStrike">
+              <a:rPr b="0" lang="en-US" sz="2000" spc="-1" strike="noStrike">
                 <a:latin typeface="Arial"/>
               </a:rPr>
               <a:t>Fifth Outline Level</a:t>
             </a:r>
-            <a:endParaRPr b="0" lang="en-HK" sz="2000" spc="-1" strike="noStrike">
+            <a:endParaRPr b="0" lang="en-US" sz="2000" spc="-1" strike="noStrike">
               <a:latin typeface="Arial"/>
             </a:endParaRPr>
           </a:p>
@@ -12636,12 +12636,12 @@
               <a:buChar char=""/>
             </a:pPr>
             <a:r>
-              <a:rPr b="0" lang="en-HK" sz="2000" spc="-1" strike="noStrike">
+              <a:rPr b="0" lang="en-US" sz="2000" spc="-1" strike="noStrike">
                 <a:latin typeface="Arial"/>
               </a:rPr>
               <a:t>Sixth Outline Level</a:t>
             </a:r>
-            <a:endParaRPr b="0" lang="en-HK" sz="2000" spc="-1" strike="noStrike">
+            <a:endParaRPr b="0" lang="en-US" sz="2000" spc="-1" strike="noStrike">
               <a:latin typeface="Arial"/>
             </a:endParaRPr>
           </a:p>
@@ -12658,12 +12658,12 @@
               <a:buChar char=""/>
             </a:pPr>
             <a:r>
-              <a:rPr b="0" lang="en-HK" sz="2000" spc="-1" strike="noStrike">
+              <a:rPr b="0" lang="en-US" sz="2000" spc="-1" strike="noStrike">
                 <a:latin typeface="Arial"/>
               </a:rPr>
               <a:t>Seventh Outline Level</a:t>
             </a:r>
-            <a:endParaRPr b="0" lang="en-HK" sz="2000" spc="-1" strike="noStrike">
+            <a:endParaRPr b="0" lang="en-US" sz="2000" spc="-1" strike="noStrike">
               <a:latin typeface="Arial"/>
             </a:endParaRPr>
           </a:p>
@@ -12726,7 +12726,7 @@
         <p:spPr>
           <a:xfrm>
             <a:off x="380880" y="4629240"/>
-            <a:ext cx="3629520" cy="340920"/>
+            <a:ext cx="3629160" cy="340560"/>
           </a:xfrm>
           <a:prstGeom prst="rect">
             <a:avLst/>
@@ -12749,7 +12749,7 @@
         <p:spPr>
           <a:xfrm>
             <a:off x="5867280" y="4625280"/>
-            <a:ext cx="1960920" cy="409320"/>
+            <a:ext cx="1960560" cy="408960"/>
           </a:xfrm>
           <a:prstGeom prst="rect">
             <a:avLst/>
@@ -12788,12 +12788,12 @@
           </a:bodyPr>
           <a:p>
             <a:r>
-              <a:rPr b="0" lang="en-HK" sz="1800" spc="-1" strike="noStrike">
+              <a:rPr b="0" lang="en-US" sz="1800" spc="-1" strike="noStrike">
                 <a:latin typeface="Arial"/>
               </a:rPr>
               <a:t>Click to edit the title text format</a:t>
             </a:r>
-            <a:endParaRPr b="0" lang="en-HK" sz="1800" spc="-1" strike="noStrike">
+            <a:endParaRPr b="0" lang="en-US" sz="1800" spc="-1" strike="noStrike">
               <a:latin typeface="Arial"/>
             </a:endParaRPr>
           </a:p>
@@ -12839,12 +12839,12 @@
               <a:buChar char=""/>
             </a:pPr>
             <a:r>
-              <a:rPr b="0" lang="en-HK" sz="1800" spc="-1" strike="noStrike">
+              <a:rPr b="0" lang="en-US" sz="1800" spc="-1" strike="noStrike">
                 <a:latin typeface="Arial"/>
               </a:rPr>
               <a:t>Click to edit the outline text format</a:t>
             </a:r>
-            <a:endParaRPr b="0" lang="en-HK" sz="1800" spc="-1" strike="noStrike">
+            <a:endParaRPr b="0" lang="en-US" sz="1800" spc="-1" strike="noStrike">
               <a:latin typeface="Arial"/>
             </a:endParaRPr>
           </a:p>
@@ -12861,12 +12861,12 @@
               <a:buChar char=""/>
             </a:pPr>
             <a:r>
-              <a:rPr b="0" lang="en-HK" sz="1800" spc="-1" strike="noStrike">
+              <a:rPr b="0" lang="en-US" sz="1800" spc="-1" strike="noStrike">
                 <a:latin typeface="Arial"/>
               </a:rPr>
               <a:t>Second Outline Level</a:t>
             </a:r>
-            <a:endParaRPr b="0" lang="en-HK" sz="1800" spc="-1" strike="noStrike">
+            <a:endParaRPr b="0" lang="en-US" sz="1800" spc="-1" strike="noStrike">
               <a:latin typeface="Arial"/>
             </a:endParaRPr>
           </a:p>
@@ -12883,12 +12883,12 @@
               <a:buChar char=""/>
             </a:pPr>
             <a:r>
-              <a:rPr b="0" lang="en-HK" sz="1800" spc="-1" strike="noStrike">
+              <a:rPr b="0" lang="en-US" sz="1800" spc="-1" strike="noStrike">
                 <a:latin typeface="Arial"/>
               </a:rPr>
               <a:t>Third Outline Level</a:t>
             </a:r>
-            <a:endParaRPr b="0" lang="en-HK" sz="1800" spc="-1" strike="noStrike">
+            <a:endParaRPr b="0" lang="en-US" sz="1800" spc="-1" strike="noStrike">
               <a:latin typeface="Arial"/>
             </a:endParaRPr>
           </a:p>
@@ -12905,12 +12905,12 @@
               <a:buChar char=""/>
             </a:pPr>
             <a:r>
-              <a:rPr b="0" lang="en-HK" sz="1800" spc="-1" strike="noStrike">
+              <a:rPr b="0" lang="en-US" sz="1800" spc="-1" strike="noStrike">
                 <a:latin typeface="Arial"/>
               </a:rPr>
               <a:t>Fourth Outline Level</a:t>
             </a:r>
-            <a:endParaRPr b="0" lang="en-HK" sz="1800" spc="-1" strike="noStrike">
+            <a:endParaRPr b="0" lang="en-US" sz="1800" spc="-1" strike="noStrike">
               <a:latin typeface="Arial"/>
             </a:endParaRPr>
           </a:p>
@@ -12927,12 +12927,12 @@
               <a:buChar char=""/>
             </a:pPr>
             <a:r>
-              <a:rPr b="0" lang="en-HK" sz="1800" spc="-1" strike="noStrike">
+              <a:rPr b="0" lang="en-US" sz="1800" spc="-1" strike="noStrike">
                 <a:latin typeface="Arial"/>
               </a:rPr>
               <a:t>Fifth Outline Level</a:t>
             </a:r>
-            <a:endParaRPr b="0" lang="en-HK" sz="1800" spc="-1" strike="noStrike">
+            <a:endParaRPr b="0" lang="en-US" sz="1800" spc="-1" strike="noStrike">
               <a:latin typeface="Arial"/>
             </a:endParaRPr>
           </a:p>
@@ -12949,12 +12949,12 @@
               <a:buChar char=""/>
             </a:pPr>
             <a:r>
-              <a:rPr b="0" lang="en-HK" sz="1800" spc="-1" strike="noStrike">
+              <a:rPr b="0" lang="en-US" sz="1800" spc="-1" strike="noStrike">
                 <a:latin typeface="Arial"/>
               </a:rPr>
               <a:t>Sixth Outline Level</a:t>
             </a:r>
-            <a:endParaRPr b="0" lang="en-HK" sz="1800" spc="-1" strike="noStrike">
+            <a:endParaRPr b="0" lang="en-US" sz="1800" spc="-1" strike="noStrike">
               <a:latin typeface="Arial"/>
             </a:endParaRPr>
           </a:p>
@@ -12971,12 +12971,12 @@
               <a:buChar char=""/>
             </a:pPr>
             <a:r>
-              <a:rPr b="0" lang="en-HK" sz="1800" spc="-1" strike="noStrike">
+              <a:rPr b="0" lang="en-US" sz="1800" spc="-1" strike="noStrike">
                 <a:latin typeface="Arial"/>
               </a:rPr>
               <a:t>Seventh Outline Level</a:t>
             </a:r>
-            <a:endParaRPr b="0" lang="en-HK" sz="1800" spc="-1" strike="noStrike">
+            <a:endParaRPr b="0" lang="en-US" sz="1800" spc="-1" strike="noStrike">
               <a:latin typeface="Arial"/>
             </a:endParaRPr>
           </a:p>
@@ -13022,12 +13022,12 @@
               <a:buChar char=""/>
             </a:pPr>
             <a:r>
-              <a:rPr b="0" lang="en-HK" sz="1800" spc="-1" strike="noStrike">
+              <a:rPr b="0" lang="en-US" sz="1800" spc="-1" strike="noStrike">
                 <a:latin typeface="Arial"/>
               </a:rPr>
               <a:t>Click to edit the outline text format</a:t>
             </a:r>
-            <a:endParaRPr b="0" lang="en-HK" sz="1800" spc="-1" strike="noStrike">
+            <a:endParaRPr b="0" lang="en-US" sz="1800" spc="-1" strike="noStrike">
               <a:latin typeface="Arial"/>
             </a:endParaRPr>
           </a:p>
@@ -13044,12 +13044,12 @@
               <a:buChar char=""/>
             </a:pPr>
             <a:r>
-              <a:rPr b="0" lang="en-HK" sz="1800" spc="-1" strike="noStrike">
+              <a:rPr b="0" lang="en-US" sz="1800" spc="-1" strike="noStrike">
                 <a:latin typeface="Arial"/>
               </a:rPr>
               <a:t>Second Outline Level</a:t>
             </a:r>
-            <a:endParaRPr b="0" lang="en-HK" sz="1800" spc="-1" strike="noStrike">
+            <a:endParaRPr b="0" lang="en-US" sz="1800" spc="-1" strike="noStrike">
               <a:latin typeface="Arial"/>
             </a:endParaRPr>
           </a:p>
@@ -13066,12 +13066,12 @@
               <a:buChar char=""/>
             </a:pPr>
             <a:r>
-              <a:rPr b="0" lang="en-HK" sz="1800" spc="-1" strike="noStrike">
+              <a:rPr b="0" lang="en-US" sz="1800" spc="-1" strike="noStrike">
                 <a:latin typeface="Arial"/>
               </a:rPr>
               <a:t>Third Outline Level</a:t>
             </a:r>
-            <a:endParaRPr b="0" lang="en-HK" sz="1800" spc="-1" strike="noStrike">
+            <a:endParaRPr b="0" lang="en-US" sz="1800" spc="-1" strike="noStrike">
               <a:latin typeface="Arial"/>
             </a:endParaRPr>
           </a:p>
@@ -13088,12 +13088,12 @@
               <a:buChar char=""/>
             </a:pPr>
             <a:r>
-              <a:rPr b="0" lang="en-HK" sz="1800" spc="-1" strike="noStrike">
+              <a:rPr b="0" lang="en-US" sz="1800" spc="-1" strike="noStrike">
                 <a:latin typeface="Arial"/>
               </a:rPr>
               <a:t>Fourth Outline Level</a:t>
             </a:r>
-            <a:endParaRPr b="0" lang="en-HK" sz="1800" spc="-1" strike="noStrike">
+            <a:endParaRPr b="0" lang="en-US" sz="1800" spc="-1" strike="noStrike">
               <a:latin typeface="Arial"/>
             </a:endParaRPr>
           </a:p>
@@ -13110,12 +13110,12 @@
               <a:buChar char=""/>
             </a:pPr>
             <a:r>
-              <a:rPr b="0" lang="en-HK" sz="1800" spc="-1" strike="noStrike">
+              <a:rPr b="0" lang="en-US" sz="1800" spc="-1" strike="noStrike">
                 <a:latin typeface="Arial"/>
               </a:rPr>
               <a:t>Fifth Outline Level</a:t>
             </a:r>
-            <a:endParaRPr b="0" lang="en-HK" sz="1800" spc="-1" strike="noStrike">
+            <a:endParaRPr b="0" lang="en-US" sz="1800" spc="-1" strike="noStrike">
               <a:latin typeface="Arial"/>
             </a:endParaRPr>
           </a:p>
@@ -13132,12 +13132,12 @@
               <a:buChar char=""/>
             </a:pPr>
             <a:r>
-              <a:rPr b="0" lang="en-HK" sz="1800" spc="-1" strike="noStrike">
+              <a:rPr b="0" lang="en-US" sz="1800" spc="-1" strike="noStrike">
                 <a:latin typeface="Arial"/>
               </a:rPr>
               <a:t>Sixth Outline Level</a:t>
             </a:r>
-            <a:endParaRPr b="0" lang="en-HK" sz="1800" spc="-1" strike="noStrike">
+            <a:endParaRPr b="0" lang="en-US" sz="1800" spc="-1" strike="noStrike">
               <a:latin typeface="Arial"/>
             </a:endParaRPr>
           </a:p>
@@ -13154,12 +13154,12 @@
               <a:buChar char=""/>
             </a:pPr>
             <a:r>
-              <a:rPr b="0" lang="en-HK" sz="1800" spc="-1" strike="noStrike">
+              <a:rPr b="0" lang="en-US" sz="1800" spc="-1" strike="noStrike">
                 <a:latin typeface="Arial"/>
               </a:rPr>
               <a:t>Seventh Outline Level</a:t>
             </a:r>
-            <a:endParaRPr b="0" lang="en-HK" sz="1800" spc="-1" strike="noStrike">
+            <a:endParaRPr b="0" lang="en-US" sz="1800" spc="-1" strike="noStrike">
               <a:latin typeface="Arial"/>
             </a:endParaRPr>
           </a:p>
@@ -13178,7 +13178,7 @@
         <p:spPr>
           <a:xfrm>
             <a:off x="3124080" y="4767120"/>
-            <a:ext cx="2893320" cy="271800"/>
+            <a:ext cx="2892960" cy="271440"/>
           </a:xfrm>
           <a:prstGeom prst="rect">
             <a:avLst/>
@@ -13216,7 +13216,7 @@
               </a:rPr>
               <a:t>&lt;footer&gt;</a:t>
             </a:r>
-            <a:endParaRPr b="0" lang="en-HK" sz="1400" spc="-1" strike="noStrike">
+            <a:endParaRPr b="0" lang="en-US" sz="1400" spc="-1" strike="noStrike">
               <a:latin typeface="Times New Roman"/>
             </a:endParaRPr>
           </a:p>
@@ -13235,7 +13235,7 @@
         <p:spPr>
           <a:xfrm>
             <a:off x="6553080" y="4767120"/>
-            <a:ext cx="2131560" cy="271800"/>
+            <a:ext cx="2131200" cy="271440"/>
           </a:xfrm>
           <a:prstGeom prst="rect">
             <a:avLst/>
@@ -13277,7 +13277,7 @@
                 <a:tab algn="l" pos="0"/>
               </a:tabLst>
             </a:pPr>
-            <a:fld id="{C245FB44-9C9C-418A-BDBE-E0A8730F352A}" type="slidenum">
+            <a:fld id="{92EED3EE-8014-41CC-B90F-4A5DC7A41832}" type="slidenum">
               <a:rPr b="0" lang="en" sz="1800" spc="-1" strike="noStrike">
                 <a:solidFill>
                   <a:srgbClr val="000000"/>
@@ -13287,7 +13287,7 @@
               </a:rPr>
               <a:t>&lt;number&gt;</a:t>
             </a:fld>
-            <a:endParaRPr b="0" lang="en-HK" sz="1800" spc="-1" strike="noStrike">
+            <a:endParaRPr b="0" lang="en-US" sz="1800" spc="-1" strike="noStrike">
               <a:latin typeface="Times New Roman"/>
             </a:endParaRPr>
           </a:p>
@@ -13306,7 +13306,7 @@
         <p:spPr>
           <a:xfrm>
             <a:off x="457200" y="4767120"/>
-            <a:ext cx="2131560" cy="271800"/>
+            <a:ext cx="2131200" cy="271440"/>
           </a:xfrm>
           <a:prstGeom prst="rect">
             <a:avLst/>
@@ -13322,19 +13322,19 @@
           </a:bodyPr>
           <a:lstStyle>
             <a:lvl1pPr>
-              <a:defRPr b="0" lang="en-HK" sz="1400" spc="-1" strike="noStrike">
+              <a:defRPr b="0" lang="en-US" sz="1400" spc="-1" strike="noStrike">
                 <a:latin typeface="Times New Roman"/>
               </a:defRPr>
             </a:lvl1pPr>
           </a:lstStyle>
           <a:p>
             <a:r>
-              <a:rPr b="0" lang="en-HK" sz="1400" spc="-1" strike="noStrike">
+              <a:rPr b="0" lang="en-US" sz="1400" spc="-1" strike="noStrike">
                 <a:latin typeface="Times New Roman"/>
               </a:rPr>
               <a:t>&lt;date/time&gt;</a:t>
             </a:r>
-            <a:endParaRPr b="0" lang="en-HK" sz="1400" spc="-1" strike="noStrike">
+            <a:endParaRPr b="0" lang="en-US" sz="1400" spc="-1" strike="noStrike">
               <a:latin typeface="Times New Roman"/>
             </a:endParaRPr>
           </a:p>
@@ -13390,7 +13390,7 @@
         <p:spPr>
           <a:xfrm>
             <a:off x="597960" y="1775160"/>
-            <a:ext cx="8219880" cy="836640"/>
+            <a:ext cx="8219520" cy="836280"/>
           </a:xfrm>
           <a:prstGeom prst="rect">
             <a:avLst/>
@@ -13424,7 +13424,7 @@
               </a:rPr>
               <a:t>How to Write an Outline</a:t>
             </a:r>
-            <a:endParaRPr b="0" lang="en-HK" sz="4200" spc="-1" strike="noStrike">
+            <a:endParaRPr b="0" lang="en-US" sz="4200" spc="-1" strike="noStrike">
               <a:latin typeface="Arial"/>
             </a:endParaRPr>
           </a:p>
@@ -13443,7 +13443,7 @@
         <p:spPr>
           <a:xfrm>
             <a:off x="597960" y="2715840"/>
-            <a:ext cx="8219880" cy="430920"/>
+            <a:ext cx="8219520" cy="430560"/>
           </a:xfrm>
           <a:prstGeom prst="rect">
             <a:avLst/>
@@ -13477,7 +13477,7 @@
               </a:rPr>
               <a:t>URI Graduate Writing Center, Spring 2021</a:t>
             </a:r>
-            <a:endParaRPr b="0" lang="en-HK" sz="2100" spc="-1" strike="noStrike">
+            <a:endParaRPr b="0" lang="en-US" sz="2100" spc="-1" strike="noStrike">
               <a:latin typeface="Arial"/>
             </a:endParaRPr>
           </a:p>
@@ -13491,13 +13491,13 @@
         </p:nvPicPr>
         <p:blipFill>
           <a:blip r:embed="rId1"/>
-          <a:srcRect l="23150" t="15779" r="24682" b="9781"/>
+          <a:srcRect l="23148" t="15780" r="24682" b="9781"/>
           <a:stretch/>
         </p:blipFill>
         <p:spPr>
           <a:xfrm>
             <a:off x="7125840" y="2481480"/>
-            <a:ext cx="1450080" cy="2322000"/>
+            <a:ext cx="1449720" cy="2321640"/>
           </a:xfrm>
           <a:prstGeom prst="rect">
             <a:avLst/>
@@ -13516,7 +13516,7 @@
         <p:spPr>
           <a:xfrm>
             <a:off x="357120" y="1448280"/>
-            <a:ext cx="6239160" cy="2031480"/>
+            <a:ext cx="6238800" cy="2031120"/>
           </a:xfrm>
           <a:prstGeom prst="roundRect">
             <a:avLst>
@@ -13547,7 +13547,7 @@
         <p:spPr>
           <a:xfrm flipH="1">
             <a:off x="6595920" y="2579760"/>
-            <a:ext cx="1800" cy="351720"/>
+            <a:ext cx="1440" cy="351360"/>
           </a:xfrm>
           <a:custGeom>
             <a:avLst/>
@@ -13589,7 +13589,7 @@
         <p:spPr>
           <a:xfrm>
             <a:off x="6598080" y="2571840"/>
-            <a:ext cx="699120" cy="519480"/>
+            <a:ext cx="698760" cy="519120"/>
           </a:xfrm>
           <a:custGeom>
             <a:avLst/>
@@ -13668,7 +13668,7 @@
         <p:spPr>
           <a:xfrm>
             <a:off x="457200" y="205920"/>
-            <a:ext cx="8227440" cy="855360"/>
+            <a:ext cx="8227080" cy="855000"/>
           </a:xfrm>
           <a:prstGeom prst="rect">
             <a:avLst/>
@@ -13702,7 +13702,7 @@
               </a:rPr>
               <a:t>Compare &amp; Contrast</a:t>
             </a:r>
-            <a:endParaRPr b="0" lang="en-HK" sz="4400" spc="-1" strike="noStrike">
+            <a:endParaRPr b="0" lang="en-US" sz="4400" spc="-1" strike="noStrike">
               <a:latin typeface="Arial"/>
             </a:endParaRPr>
           </a:p>
@@ -13721,7 +13721,7 @@
         <p:spPr>
           <a:xfrm>
             <a:off x="457200" y="1200240"/>
-            <a:ext cx="4672440" cy="3392280"/>
+            <a:ext cx="4672080" cy="3391920"/>
           </a:xfrm>
           <a:prstGeom prst="rect">
             <a:avLst/>
@@ -13756,7 +13756,7 @@
               </a:rPr>
               <a:t>How are they alike</a:t>
             </a:r>
-            <a:endParaRPr b="0" lang="en-HK" sz="3200" spc="-1" strike="noStrike">
+            <a:endParaRPr b="0" lang="en-US" sz="3200" spc="-1" strike="noStrike">
               <a:latin typeface="Arial"/>
             </a:endParaRPr>
           </a:p>
@@ -13779,19 +13779,9 @@
                 <a:latin typeface="Roboto Light"/>
                 <a:ea typeface="Roboto Light"/>
               </a:rPr>
-              <a:t>How are they </a:t>
+              <a:t>How are they different</a:t>
             </a:r>
-            <a:r>
-              <a:rPr b="0" lang="en" sz="3200" spc="-1" strike="noStrike">
-                <a:solidFill>
-                  <a:srgbClr val="000000"/>
-                </a:solidFill>
-                <a:latin typeface="Roboto Light"/>
-                <a:ea typeface="Roboto Light"/>
-              </a:rPr>
-              <a:t>different</a:t>
-            </a:r>
-            <a:endParaRPr b="0" lang="en-HK" sz="3200" spc="-1" strike="noStrike">
+            <a:endParaRPr b="0" lang="en-US" sz="3200" spc="-1" strike="noStrike">
               <a:latin typeface="Arial"/>
             </a:endParaRPr>
           </a:p>
@@ -13814,19 +13804,9 @@
                 <a:latin typeface="Roboto Light"/>
                 <a:ea typeface="Roboto Light"/>
               </a:rPr>
-              <a:t>Where circles </a:t>
+              <a:t>Where circles overlap, </a:t>
             </a:r>
-            <a:r>
-              <a:rPr b="0" lang="en" sz="3200" spc="-1" strike="noStrike">
-                <a:solidFill>
-                  <a:srgbClr val="000000"/>
-                </a:solidFill>
-                <a:latin typeface="Roboto Light"/>
-                <a:ea typeface="Roboto Light"/>
-              </a:rPr>
-              <a:t>overlap, </a:t>
-            </a:r>
-            <a:endParaRPr b="0" lang="en-HK" sz="3200" spc="-1" strike="noStrike">
+            <a:endParaRPr b="0" lang="en-US" sz="3200" spc="-1" strike="noStrike">
               <a:latin typeface="Arial"/>
             </a:endParaRPr>
           </a:p>
@@ -13853,7 +13833,7 @@
               </a:rPr>
               <a:t>similarities</a:t>
             </a:r>
-            <a:endParaRPr b="0" lang="en-HK" sz="3200" spc="-1" strike="noStrike">
+            <a:endParaRPr b="0" lang="en-US" sz="3200" spc="-1" strike="noStrike">
               <a:latin typeface="Arial"/>
             </a:endParaRPr>
           </a:p>
@@ -13884,7 +13864,7 @@
               </a:rPr>
               <a:t>Venn Diagram</a:t>
             </a:r>
-            <a:endParaRPr b="0" lang="en-HK" sz="3200" spc="-1" strike="noStrike">
+            <a:endParaRPr b="0" lang="en-US" sz="3200" spc="-1" strike="noStrike">
               <a:latin typeface="Arial"/>
             </a:endParaRPr>
           </a:p>
@@ -13903,7 +13883,7 @@
         <p:spPr>
           <a:xfrm>
             <a:off x="4752720" y="953280"/>
-            <a:ext cx="4389120" cy="3392280"/>
+            <a:ext cx="4388760" cy="3391920"/>
           </a:xfrm>
           <a:prstGeom prst="rect">
             <a:avLst/>
@@ -13956,7 +13936,7 @@
         <p:spPr>
           <a:xfrm>
             <a:off x="265680" y="1576080"/>
-            <a:ext cx="4043160" cy="1989360"/>
+            <a:ext cx="4042800" cy="1989000"/>
           </a:xfrm>
           <a:prstGeom prst="rect">
             <a:avLst/>
@@ -13990,7 +13970,7 @@
               </a:rPr>
               <a:t>Why should you prepare an outline?</a:t>
             </a:r>
-            <a:endParaRPr b="0" lang="en-HK" sz="4200" spc="-1" strike="noStrike">
+            <a:endParaRPr b="0" lang="en-US" sz="4200" spc="-1" strike="noStrike">
               <a:latin typeface="Arial"/>
             </a:endParaRPr>
           </a:p>
@@ -14005,7 +13985,7 @@
         <p:spPr>
           <a:xfrm>
             <a:off x="6133320" y="2082600"/>
-            <a:ext cx="1321200" cy="1318680"/>
+            <a:ext cx="1320840" cy="1318320"/>
           </a:xfrm>
           <a:prstGeom prst="ellipse">
             <a:avLst/>
@@ -14047,7 +14027,7 @@
               </a:rPr>
               <a:t>?</a:t>
             </a:r>
-            <a:endParaRPr b="0" lang="en-HK" sz="3000" spc="-1" strike="noStrike">
+            <a:endParaRPr b="0" lang="en-US" sz="3000" spc="-1" strike="noStrike">
               <a:latin typeface="Arial"/>
             </a:endParaRPr>
           </a:p>
@@ -14061,10 +14041,10 @@
         </p:nvGrpSpPr>
         <p:grpSpPr>
           <a:xfrm>
-            <a:off x="6417000" y="1719360"/>
-            <a:ext cx="2955600" cy="3295440"/>
-            <a:chOff x="6417000" y="1719360"/>
-            <a:chExt cx="2955600" cy="3295440"/>
+            <a:off x="6416640" y="1719360"/>
+            <a:ext cx="2954880" cy="3294720"/>
+            <a:chOff x="6416640" y="1719360"/>
+            <a:chExt cx="2954880" cy="3294720"/>
           </a:xfrm>
         </p:grpSpPr>
         <p:sp>
@@ -14075,8 +14055,8 @@
           </p:nvSpPr>
           <p:spPr>
             <a:xfrm rot="18319800">
-              <a:off x="6367680" y="2761920"/>
-              <a:ext cx="3182040" cy="1209600"/>
+              <a:off x="6367320" y="2761920"/>
+              <a:ext cx="3181680" cy="1209240"/>
             </a:xfrm>
             <a:custGeom>
               <a:avLst/>
@@ -14147,8 +14127,8 @@
           </p:nvSpPr>
           <p:spPr>
             <a:xfrm rot="18319800">
-              <a:off x="6332400" y="2658600"/>
-              <a:ext cx="2727360" cy="1203120"/>
+              <a:off x="6332040" y="2658600"/>
+              <a:ext cx="2727000" cy="1202760"/>
             </a:xfrm>
             <a:custGeom>
               <a:avLst/>
@@ -14219,8 +14199,8 @@
           </p:nvSpPr>
           <p:spPr>
             <a:xfrm rot="17820600">
-              <a:off x="6964560" y="3062160"/>
-              <a:ext cx="1575720" cy="561240"/>
+              <a:off x="6964200" y="3062160"/>
+              <a:ext cx="1575360" cy="560880"/>
             </a:xfrm>
             <a:prstGeom prst="rect">
               <a:avLst/>
@@ -14270,7 +14250,7 @@
                 </a:rPr>
                 <a:t> </a:t>
               </a:r>
-              <a:endParaRPr b="0" lang="en-HK" sz="1000" spc="-1" strike="noStrike">
+              <a:endParaRPr b="0" lang="en-US" sz="1000" spc="-1" strike="noStrike">
                 <a:latin typeface="Arial"/>
               </a:endParaRPr>
             </a:p>
@@ -14285,10 +14265,10 @@
         </p:nvGrpSpPr>
         <p:grpSpPr>
           <a:xfrm>
-            <a:off x="5089680" y="127080"/>
-            <a:ext cx="3290400" cy="3220200"/>
-            <a:chOff x="5089680" y="127080"/>
-            <a:chExt cx="3290400" cy="3220200"/>
+            <a:off x="5089320" y="127440"/>
+            <a:ext cx="3290040" cy="3219480"/>
+            <a:chOff x="5089320" y="127440"/>
+            <a:chExt cx="3290040" cy="3219480"/>
           </a:xfrm>
         </p:grpSpPr>
         <p:sp>
@@ -14299,8 +14279,8 @@
           </p:nvSpPr>
           <p:spPr>
             <a:xfrm rot="18319800">
-              <a:off x="5641560" y="495360"/>
-              <a:ext cx="2186280" cy="2483640"/>
+              <a:off x="5641200" y="495360"/>
+              <a:ext cx="2185920" cy="2483280"/>
             </a:xfrm>
             <a:custGeom>
               <a:avLst/>
@@ -14381,8 +14361,8 @@
           </p:nvSpPr>
           <p:spPr>
             <a:xfrm rot="18319800">
-              <a:off x="5899320" y="779400"/>
-              <a:ext cx="1788120" cy="2183760"/>
+              <a:off x="5898960" y="779400"/>
+              <a:ext cx="1787760" cy="2183400"/>
             </a:xfrm>
             <a:custGeom>
               <a:avLst/>
@@ -14459,7 +14439,7 @@
           <p:spPr>
             <a:xfrm>
               <a:off x="6015600" y="1351440"/>
-              <a:ext cx="1575720" cy="560880"/>
+              <a:ext cx="1575360" cy="560520"/>
             </a:xfrm>
             <a:prstGeom prst="rect">
               <a:avLst/>
@@ -14499,7 +14479,7 @@
                 </a:rPr>
                 <a:t>Organize Your Ideas</a:t>
               </a:r>
-              <a:endParaRPr b="0" lang="en-HK" sz="1400" spc="-1" strike="noStrike">
+              <a:endParaRPr b="0" lang="en-US" sz="1400" spc="-1" strike="noStrike">
                 <a:latin typeface="Arial"/>
               </a:endParaRPr>
             </a:p>
@@ -14514,10 +14494,10 @@
         </p:nvGrpSpPr>
         <p:grpSpPr>
           <a:xfrm>
-            <a:off x="4191480" y="1883880"/>
-            <a:ext cx="3421440" cy="3119040"/>
-            <a:chOff x="4191480" y="1883880"/>
-            <a:chExt cx="3421440" cy="3119040"/>
+            <a:off x="4191120" y="1884240"/>
+            <a:ext cx="3421080" cy="3117960"/>
+            <a:chOff x="4191120" y="1884240"/>
+            <a:chExt cx="3421080" cy="3117960"/>
           </a:xfrm>
         </p:grpSpPr>
         <p:sp>
@@ -14528,8 +14508,8 @@
           </p:nvSpPr>
           <p:spPr>
             <a:xfrm rot="18319800">
-              <a:off x="5090400" y="1938960"/>
-              <a:ext cx="1622880" cy="3043440"/>
+              <a:off x="5090040" y="1938960"/>
+              <a:ext cx="1622520" cy="3043080"/>
             </a:xfrm>
             <a:custGeom>
               <a:avLst/>
@@ -14600,8 +14580,8 @@
           </p:nvSpPr>
           <p:spPr>
             <a:xfrm rot="18319800">
-              <a:off x="5268240" y="1988280"/>
-              <a:ext cx="1573560" cy="2548440"/>
+              <a:off x="5267880" y="1988280"/>
+              <a:ext cx="1573200" cy="2548080"/>
             </a:xfrm>
             <a:custGeom>
               <a:avLst/>
@@ -14673,7 +14653,7 @@
           <p:spPr>
             <a:xfrm flipH="1" rot="3725400">
               <a:off x="5095080" y="3061800"/>
-              <a:ext cx="1575360" cy="561600"/>
+              <a:ext cx="1575000" cy="561240"/>
             </a:xfrm>
             <a:prstGeom prst="rect">
               <a:avLst/>
@@ -14713,7 +14693,7 @@
                 </a:rPr>
                 <a:t>Accountability </a:t>
               </a:r>
-              <a:endParaRPr b="0" lang="en-HK" sz="1400" spc="-1" strike="noStrike">
+              <a:endParaRPr b="0" lang="en-US" sz="1400" spc="-1" strike="noStrike">
                 <a:latin typeface="Arial"/>
               </a:endParaRPr>
             </a:p>
@@ -14763,7 +14743,7 @@
         <p:spPr>
           <a:xfrm>
             <a:off x="457200" y="205920"/>
-            <a:ext cx="5190120" cy="855360"/>
+            <a:ext cx="5189760" cy="855000"/>
           </a:xfrm>
           <a:prstGeom prst="rect">
             <a:avLst/>
@@ -14797,7 +14777,7 @@
               </a:rPr>
               <a:t>Concept Map</a:t>
             </a:r>
-            <a:endParaRPr b="0" lang="en-HK" sz="4400" spc="-1" strike="noStrike">
+            <a:endParaRPr b="0" lang="en-US" sz="4400" spc="-1" strike="noStrike">
               <a:latin typeface="Arial"/>
             </a:endParaRPr>
           </a:p>
@@ -14816,7 +14796,7 @@
         <p:spPr>
           <a:xfrm>
             <a:off x="457200" y="1200240"/>
-            <a:ext cx="4684320" cy="3392280"/>
+            <a:ext cx="4683960" cy="3391920"/>
           </a:xfrm>
           <a:prstGeom prst="rect">
             <a:avLst/>
@@ -14851,7 +14831,7 @@
               </a:rPr>
               <a:t>Main idea</a:t>
             </a:r>
-            <a:endParaRPr b="0" lang="en-HK" sz="3200" spc="-1" strike="noStrike">
+            <a:endParaRPr b="0" lang="en-US" sz="3200" spc="-1" strike="noStrike">
               <a:latin typeface="Arial"/>
             </a:endParaRPr>
           </a:p>
@@ -14876,7 +14856,7 @@
               </a:rPr>
               <a:t>Sub topics</a:t>
             </a:r>
-            <a:endParaRPr b="0" lang="en-HK" sz="3200" spc="-1" strike="noStrike">
+            <a:endParaRPr b="0" lang="en-US" sz="3200" spc="-1" strike="noStrike">
               <a:latin typeface="Arial"/>
             </a:endParaRPr>
           </a:p>
@@ -14901,7 +14881,7 @@
               </a:rPr>
               <a:t>first point of sub topics</a:t>
             </a:r>
-            <a:endParaRPr b="0" lang="en-HK" sz="2800" spc="-1" strike="noStrike">
+            <a:endParaRPr b="0" lang="en-US" sz="2800" spc="-1" strike="noStrike">
               <a:latin typeface="Arial"/>
             </a:endParaRPr>
           </a:p>
@@ -14926,16 +14906,15 @@
               </a:rPr>
               <a:t>second point of sub topics</a:t>
             </a:r>
-            <a:endParaRPr b="0" lang="en-HK" sz="2800" spc="-1" strike="noStrike">
-              <a:latin typeface="Arial"/>
-            </a:endParaRPr>
-          </a:p>
-          <a:p>
-            <a:pPr marL="457200" indent="0">
+            <a:endParaRPr b="0" lang="en-US" sz="2800" spc="-1" strike="noStrike">
+              <a:latin typeface="Arial"/>
+            </a:endParaRPr>
+          </a:p>
+          <a:p>
+            <a:pPr marL="457200" indent="-431640">
               <a:lnSpc>
                 <a:spcPct val="100000"/>
               </a:lnSpc>
-              <a:buNone/>
             </a:pPr>
             <a:r>
               <a:rPr b="0" lang="en" sz="3200" spc="-1" strike="noStrike">
@@ -14947,7 +14926,7 @@
               </a:rPr>
               <a:t>continuation of the sub topics</a:t>
             </a:r>
-            <a:endParaRPr b="0" lang="en-HK" sz="3200" spc="-1" strike="noStrike">
+            <a:endParaRPr b="0" lang="en-US" sz="3200" spc="-1" strike="noStrike">
               <a:latin typeface="Arial"/>
             </a:endParaRPr>
           </a:p>
@@ -14961,7 +14940,7 @@
                 <a:tab algn="l" pos="0"/>
               </a:tabLst>
             </a:pPr>
-            <a:endParaRPr b="0" lang="en-HK" sz="3200" spc="-1" strike="noStrike">
+            <a:endParaRPr b="0" lang="en-US" sz="3200" spc="-1" strike="noStrike">
               <a:latin typeface="Arial"/>
             </a:endParaRPr>
           </a:p>
@@ -14980,7 +14959,7 @@
         <p:spPr>
           <a:xfrm>
             <a:off x="5437800" y="115200"/>
-            <a:ext cx="3026160" cy="4243680"/>
+            <a:ext cx="3025800" cy="4243320"/>
           </a:xfrm>
           <a:prstGeom prst="rect">
             <a:avLst/>
@@ -15033,7 +15012,7 @@
         <p:spPr>
           <a:xfrm>
             <a:off x="311760" y="410040"/>
-            <a:ext cx="8518320" cy="605520"/>
+            <a:ext cx="8517960" cy="605160"/>
           </a:xfrm>
           <a:prstGeom prst="rect">
             <a:avLst/>
@@ -15067,7 +15046,7 @@
               </a:rPr>
               <a:t>Structuring your outline:</a:t>
             </a:r>
-            <a:endParaRPr b="0" lang="en-HK" sz="2600" spc="-1" strike="noStrike">
+            <a:endParaRPr b="0" lang="en-US" sz="2600" spc="-1" strike="noStrike">
               <a:latin typeface="Arial"/>
             </a:endParaRPr>
           </a:p>
@@ -15086,7 +15065,7 @@
         <p:spPr>
           <a:xfrm>
             <a:off x="311760" y="1218960"/>
-            <a:ext cx="8518320" cy="3336840"/>
+            <a:ext cx="8517960" cy="3336480"/>
           </a:xfrm>
           <a:prstGeom prst="rect">
             <a:avLst/>
@@ -15121,7 +15100,7 @@
               </a:rPr>
               <a:t>Introduction</a:t>
             </a:r>
-            <a:endParaRPr b="0" lang="en-HK" sz="1600" spc="-1" strike="noStrike">
+            <a:endParaRPr b="0" lang="en-US" sz="1600" spc="-1" strike="noStrike">
               <a:latin typeface="Arial"/>
             </a:endParaRPr>
           </a:p>
@@ -15146,7 +15125,7 @@
               </a:rPr>
               <a:t>Interesting opening “hook”</a:t>
             </a:r>
-            <a:endParaRPr b="0" lang="en-HK" sz="1400" spc="-1" strike="noStrike">
+            <a:endParaRPr b="0" lang="en-US" sz="1400" spc="-1" strike="noStrike">
               <a:latin typeface="Arial"/>
             </a:endParaRPr>
           </a:p>
@@ -15171,7 +15150,7 @@
               </a:rPr>
               <a:t>Background info</a:t>
             </a:r>
-            <a:endParaRPr b="0" lang="en-HK" sz="1400" spc="-1" strike="noStrike">
+            <a:endParaRPr b="0" lang="en-US" sz="1400" spc="-1" strike="noStrike">
               <a:latin typeface="Arial"/>
             </a:endParaRPr>
           </a:p>
@@ -15196,7 +15175,7 @@
               </a:rPr>
               <a:t>Thesis statement</a:t>
             </a:r>
-            <a:endParaRPr b="0" lang="en-HK" sz="1400" spc="-1" strike="noStrike">
+            <a:endParaRPr b="0" lang="en-US" sz="1400" spc="-1" strike="noStrike">
               <a:latin typeface="Arial"/>
             </a:endParaRPr>
           </a:p>
@@ -15221,7 +15200,7 @@
               </a:rPr>
               <a:t>Body</a:t>
             </a:r>
-            <a:endParaRPr b="0" lang="en-HK" sz="1600" spc="-1" strike="noStrike">
+            <a:endParaRPr b="0" lang="en-US" sz="1600" spc="-1" strike="noStrike">
               <a:latin typeface="Arial"/>
             </a:endParaRPr>
           </a:p>
@@ -15246,7 +15225,7 @@
               </a:rPr>
               <a:t>1st main supporting point → topic sentence(s)</a:t>
             </a:r>
-            <a:endParaRPr b="0" lang="en-HK" sz="1400" spc="-1" strike="noStrike">
+            <a:endParaRPr b="0" lang="en-US" sz="1400" spc="-1" strike="noStrike">
               <a:latin typeface="Arial"/>
             </a:endParaRPr>
           </a:p>
@@ -15271,7 +15250,7 @@
               </a:rPr>
               <a:t>Supporting arguments and information</a:t>
             </a:r>
-            <a:endParaRPr b="0" lang="en-HK" sz="1400" spc="-1" strike="noStrike">
+            <a:endParaRPr b="0" lang="en-US" sz="1400" spc="-1" strike="noStrike">
               <a:latin typeface="Arial"/>
             </a:endParaRPr>
           </a:p>
@@ -15296,7 +15275,7 @@
               </a:rPr>
               <a:t>2nd main supporting point → topic sentence(s)</a:t>
             </a:r>
-            <a:endParaRPr b="0" lang="en-HK" sz="1400" spc="-1" strike="noStrike">
+            <a:endParaRPr b="0" lang="en-US" sz="1400" spc="-1" strike="noStrike">
               <a:latin typeface="Arial"/>
             </a:endParaRPr>
           </a:p>
@@ -15321,7 +15300,7 @@
               </a:rPr>
               <a:t>Supporting arguments and information</a:t>
             </a:r>
-            <a:endParaRPr b="0" lang="en-HK" sz="1400" spc="-1" strike="noStrike">
+            <a:endParaRPr b="0" lang="en-US" sz="1400" spc="-1" strike="noStrike">
               <a:latin typeface="Arial"/>
             </a:endParaRPr>
           </a:p>
@@ -15346,7 +15325,7 @@
               </a:rPr>
               <a:t>Conclusion</a:t>
             </a:r>
-            <a:endParaRPr b="0" lang="en-HK" sz="1600" spc="-1" strike="noStrike">
+            <a:endParaRPr b="0" lang="en-US" sz="1600" spc="-1" strike="noStrike">
               <a:latin typeface="Arial"/>
             </a:endParaRPr>
           </a:p>
@@ -15371,7 +15350,7 @@
               </a:rPr>
               <a:t>Reiterate thesis statement</a:t>
             </a:r>
-            <a:endParaRPr b="0" lang="en-HK" sz="1400" spc="-1" strike="noStrike">
+            <a:endParaRPr b="0" lang="en-US" sz="1400" spc="-1" strike="noStrike">
               <a:latin typeface="Arial"/>
             </a:endParaRPr>
           </a:p>
@@ -15396,7 +15375,7 @@
               </a:rPr>
               <a:t>Summarize supporting arguments</a:t>
             </a:r>
-            <a:endParaRPr b="0" lang="en-HK" sz="1400" spc="-1" strike="noStrike">
+            <a:endParaRPr b="0" lang="en-US" sz="1400" spc="-1" strike="noStrike">
               <a:latin typeface="Arial"/>
             </a:endParaRPr>
           </a:p>
@@ -15413,7 +15392,7 @@
                 <a:tab algn="l" pos="0"/>
               </a:tabLst>
             </a:pPr>
-            <a:endParaRPr b="0" lang="en-HK" sz="1800" spc="-1" strike="noStrike">
+            <a:endParaRPr b="0" lang="en-US" sz="1800" spc="-1" strike="noStrike">
               <a:latin typeface="Arial"/>
             </a:endParaRPr>
           </a:p>
@@ -15430,7 +15409,7 @@
                 <a:tab algn="l" pos="0"/>
               </a:tabLst>
             </a:pPr>
-            <a:endParaRPr b="0" lang="en-HK" sz="1800" spc="-1" strike="noStrike">
+            <a:endParaRPr b="0" lang="en-US" sz="1800" spc="-1" strike="noStrike">
               <a:latin typeface="Arial"/>
             </a:endParaRPr>
           </a:p>
@@ -15444,8 +15423,8 @@
         </p:nvSpPr>
         <p:spPr>
           <a:xfrm flipH="1">
-            <a:off x="4723920" y="410040"/>
-            <a:ext cx="3312000" cy="1574280"/>
+            <a:off x="4723200" y="410040"/>
+            <a:ext cx="3311640" cy="1573920"/>
           </a:xfrm>
           <a:prstGeom prst="wedgeEllipseCallout">
             <a:avLst>
@@ -15491,7 +15470,7 @@
               </a:rPr>
               <a:t>You don’t have to draft the paper in this same order! Try writing the body, then intro, then conclusion. </a:t>
             </a:r>
-            <a:endParaRPr b="0" lang="en-HK" sz="1400" spc="-1" strike="noStrike">
+            <a:endParaRPr b="0" lang="en-US" sz="1400" spc="-1" strike="noStrike">
               <a:latin typeface="Arial"/>
             </a:endParaRPr>
           </a:p>
@@ -15505,13 +15484,13 @@
         </p:nvPicPr>
         <p:blipFill>
           <a:blip r:embed="rId1"/>
-          <a:srcRect l="23150" t="15779" r="24682" b="9781"/>
+          <a:srcRect l="23148" t="15780" r="24682" b="9781"/>
           <a:stretch/>
         </p:blipFill>
         <p:spPr>
           <a:xfrm>
             <a:off x="7115040" y="1641960"/>
-            <a:ext cx="1450080" cy="2322000"/>
+            <a:ext cx="1449720" cy="2321640"/>
           </a:xfrm>
           <a:prstGeom prst="rect">
             <a:avLst/>
@@ -15564,7 +15543,7 @@
         <p:spPr>
           <a:xfrm>
             <a:off x="311760" y="147600"/>
-            <a:ext cx="8518320" cy="605520"/>
+            <a:ext cx="8517960" cy="605160"/>
           </a:xfrm>
           <a:prstGeom prst="rect">
             <a:avLst/>
@@ -15598,7 +15577,7 @@
               </a:rPr>
               <a:t>Structuring your outline: IMRAD formatted manuscripts*</a:t>
             </a:r>
-            <a:endParaRPr b="0" lang="en-HK" sz="2600" spc="-1" strike="noStrike">
+            <a:endParaRPr b="0" lang="en-US" sz="2600" spc="-1" strike="noStrike">
               <a:latin typeface="Arial"/>
             </a:endParaRPr>
           </a:p>
@@ -15617,7 +15596,7 @@
         <p:spPr>
           <a:xfrm>
             <a:off x="311760" y="755280"/>
-            <a:ext cx="5330880" cy="4159440"/>
+            <a:ext cx="5330520" cy="4159080"/>
           </a:xfrm>
           <a:prstGeom prst="rect">
             <a:avLst/>
@@ -15652,7 +15631,7 @@
               </a:rPr>
               <a:t>Introduction</a:t>
             </a:r>
-            <a:endParaRPr b="0" lang="en-HK" sz="1800" spc="-1" strike="noStrike">
+            <a:endParaRPr b="0" lang="en-US" sz="1800" spc="-1" strike="noStrike">
               <a:latin typeface="Arial"/>
             </a:endParaRPr>
           </a:p>
@@ -15677,7 +15656,7 @@
               </a:rPr>
               <a:t>Set the context</a:t>
             </a:r>
-            <a:endParaRPr b="0" lang="en-HK" sz="1300" spc="-1" strike="noStrike">
+            <a:endParaRPr b="0" lang="en-US" sz="1300" spc="-1" strike="noStrike">
               <a:latin typeface="Arial"/>
             </a:endParaRPr>
           </a:p>
@@ -15702,7 +15681,7 @@
               </a:rPr>
               <a:t>Credible background information</a:t>
             </a:r>
-            <a:endParaRPr b="0" lang="en-HK" sz="1300" spc="-1" strike="noStrike">
+            <a:endParaRPr b="0" lang="en-US" sz="1300" spc="-1" strike="noStrike">
               <a:latin typeface="Arial"/>
             </a:endParaRPr>
           </a:p>
@@ -15727,7 +15706,7 @@
               </a:rPr>
               <a:t>Previous research</a:t>
             </a:r>
-            <a:endParaRPr b="0" lang="en-HK" sz="1300" spc="-1" strike="noStrike">
+            <a:endParaRPr b="0" lang="en-US" sz="1300" spc="-1" strike="noStrike">
               <a:latin typeface="Arial"/>
             </a:endParaRPr>
           </a:p>
@@ -15752,7 +15731,7 @@
               </a:rPr>
               <a:t>Define the knowledge gap</a:t>
             </a:r>
-            <a:endParaRPr b="0" lang="en-HK" sz="1300" spc="-1" strike="noStrike">
+            <a:endParaRPr b="0" lang="en-US" sz="1300" spc="-1" strike="noStrike">
               <a:latin typeface="Arial"/>
             </a:endParaRPr>
           </a:p>
@@ -15777,7 +15756,7 @@
               </a:rPr>
               <a:t>Outline your objectives, hypotheses, or research questions</a:t>
             </a:r>
-            <a:endParaRPr b="0" lang="en-HK" sz="1300" spc="-1" strike="noStrike">
+            <a:endParaRPr b="0" lang="en-US" sz="1300" spc="-1" strike="noStrike">
               <a:latin typeface="Arial"/>
             </a:endParaRPr>
           </a:p>
@@ -15802,7 +15781,7 @@
               </a:rPr>
               <a:t>Methods</a:t>
             </a:r>
-            <a:endParaRPr b="0" lang="en-HK" sz="1800" spc="-1" strike="noStrike">
+            <a:endParaRPr b="0" lang="en-US" sz="1800" spc="-1" strike="noStrike">
               <a:latin typeface="Arial"/>
             </a:endParaRPr>
           </a:p>
@@ -15827,7 +15806,7 @@
               </a:rPr>
               <a:t>Study site</a:t>
             </a:r>
-            <a:endParaRPr b="0" lang="en-HK" sz="1400" spc="-1" strike="noStrike">
+            <a:endParaRPr b="0" lang="en-US" sz="1400" spc="-1" strike="noStrike">
               <a:latin typeface="Arial"/>
             </a:endParaRPr>
           </a:p>
@@ -15852,7 +15831,7 @@
               </a:rPr>
               <a:t>Study population</a:t>
             </a:r>
-            <a:endParaRPr b="0" lang="en-HK" sz="1400" spc="-1" strike="noStrike">
+            <a:endParaRPr b="0" lang="en-US" sz="1400" spc="-1" strike="noStrike">
               <a:latin typeface="Arial"/>
             </a:endParaRPr>
           </a:p>
@@ -15877,7 +15856,7 @@
               </a:rPr>
               <a:t>Research steps</a:t>
             </a:r>
-            <a:endParaRPr b="0" lang="en-HK" sz="1400" spc="-1" strike="noStrike">
+            <a:endParaRPr b="0" lang="en-US" sz="1400" spc="-1" strike="noStrike">
               <a:latin typeface="Arial"/>
             </a:endParaRPr>
           </a:p>
@@ -15902,7 +15881,7 @@
               </a:rPr>
               <a:t>Results</a:t>
             </a:r>
-            <a:endParaRPr b="0" lang="en-HK" sz="1800" spc="-1" strike="noStrike">
+            <a:endParaRPr b="0" lang="en-US" sz="1800" spc="-1" strike="noStrike">
               <a:latin typeface="Arial"/>
             </a:endParaRPr>
           </a:p>
@@ -15927,7 +15906,7 @@
               </a:rPr>
               <a:t>Follow the same layout as the methods section</a:t>
             </a:r>
-            <a:endParaRPr b="0" lang="en-HK" sz="1400" spc="-1" strike="noStrike">
+            <a:endParaRPr b="0" lang="en-US" sz="1400" spc="-1" strike="noStrike">
               <a:latin typeface="Arial"/>
             </a:endParaRPr>
           </a:p>
@@ -15952,7 +15931,7 @@
               </a:rPr>
               <a:t>Discussion/Conclusion</a:t>
             </a:r>
-            <a:endParaRPr b="0" lang="en-HK" sz="1800" spc="-1" strike="noStrike">
+            <a:endParaRPr b="0" lang="en-US" sz="1800" spc="-1" strike="noStrike">
               <a:latin typeface="Arial"/>
             </a:endParaRPr>
           </a:p>
@@ -15977,7 +15956,7 @@
               </a:rPr>
               <a:t>link back to introduction, come full circle</a:t>
             </a:r>
-            <a:endParaRPr b="0" lang="en-HK" sz="1400" spc="-1" strike="noStrike">
+            <a:endParaRPr b="0" lang="en-US" sz="1400" spc="-1" strike="noStrike">
               <a:latin typeface="Arial"/>
             </a:endParaRPr>
           </a:p>
@@ -16002,7 +15981,7 @@
               </a:rPr>
               <a:t>How did this research fill a knowledge gap</a:t>
             </a:r>
-            <a:endParaRPr b="0" lang="en-HK" sz="1400" spc="-1" strike="noStrike">
+            <a:endParaRPr b="0" lang="en-US" sz="1400" spc="-1" strike="noStrike">
               <a:latin typeface="Arial"/>
             </a:endParaRPr>
           </a:p>
@@ -16021,7 +16000,7 @@
         <p:spPr>
           <a:xfrm>
             <a:off x="4635720" y="755280"/>
-            <a:ext cx="4194360" cy="3047400"/>
+            <a:ext cx="4194000" cy="3047040"/>
           </a:xfrm>
           <a:prstGeom prst="rect">
             <a:avLst/>
@@ -16074,7 +16053,7 @@
         <p:spPr>
           <a:xfrm>
             <a:off x="311760" y="410040"/>
-            <a:ext cx="8518320" cy="605520"/>
+            <a:ext cx="8517960" cy="605160"/>
           </a:xfrm>
           <a:prstGeom prst="rect">
             <a:avLst/>
@@ -16108,7 +16087,7 @@
               </a:rPr>
               <a:t>Reverse Outlines: Produce an outline from a draft</a:t>
             </a:r>
-            <a:endParaRPr b="0" lang="en-HK" sz="3000" spc="-1" strike="noStrike">
+            <a:endParaRPr b="0" lang="en-US" sz="3000" spc="-1" strike="noStrike">
               <a:latin typeface="Arial"/>
             </a:endParaRPr>
           </a:p>
@@ -16127,7 +16106,7 @@
         <p:spPr>
           <a:xfrm>
             <a:off x="311760" y="1229760"/>
-            <a:ext cx="4258080" cy="3336840"/>
+            <a:ext cx="4257720" cy="3336480"/>
           </a:xfrm>
           <a:prstGeom prst="rect">
             <a:avLst/>
@@ -16162,7 +16141,7 @@
               </a:rPr>
               <a:t>Ideas evolve as you write, so sometimes a reverse outline may better suit your needs</a:t>
             </a:r>
-            <a:endParaRPr b="0" lang="en-HK" sz="1800" spc="-1" strike="noStrike">
+            <a:endParaRPr b="0" lang="en-US" sz="1800" spc="-1" strike="noStrike">
               <a:latin typeface="Arial"/>
             </a:endParaRPr>
           </a:p>
@@ -16187,7 +16166,7 @@
               </a:rPr>
               <a:t>If you write to think</a:t>
             </a:r>
-            <a:endParaRPr b="0" lang="en-HK" sz="1400" spc="-1" strike="noStrike">
+            <a:endParaRPr b="0" lang="en-US" sz="1400" spc="-1" strike="noStrike">
               <a:latin typeface="Arial"/>
             </a:endParaRPr>
           </a:p>
@@ -16212,7 +16191,7 @@
               </a:rPr>
               <a:t>Checks your organization</a:t>
             </a:r>
-            <a:endParaRPr b="0" lang="en-HK" sz="1800" spc="-1" strike="noStrike">
+            <a:endParaRPr b="0" lang="en-US" sz="1800" spc="-1" strike="noStrike">
               <a:latin typeface="Arial"/>
             </a:endParaRPr>
           </a:p>
@@ -16237,7 +16216,7 @@
               </a:rPr>
               <a:t>Identify main points to easily move sections around in your draft</a:t>
             </a:r>
-            <a:endParaRPr b="0" lang="en-HK" sz="1400" spc="-1" strike="noStrike">
+            <a:endParaRPr b="0" lang="en-US" sz="1400" spc="-1" strike="noStrike">
               <a:latin typeface="Arial"/>
             </a:endParaRPr>
           </a:p>
@@ -16262,7 +16241,7 @@
               </a:rPr>
               <a:t>You can do both! </a:t>
             </a:r>
-            <a:endParaRPr b="0" lang="en-HK" sz="1800" spc="-1" strike="noStrike">
+            <a:endParaRPr b="0" lang="en-US" sz="1800" spc="-1" strike="noStrike">
               <a:latin typeface="Arial"/>
             </a:endParaRPr>
           </a:p>
@@ -16287,7 +16266,7 @@
               </a:rPr>
               <a:t>Compare your reverse outline to your original outline</a:t>
             </a:r>
-            <a:endParaRPr b="0" lang="en-HK" sz="1400" spc="-1" strike="noStrike">
+            <a:endParaRPr b="0" lang="en-US" sz="1400" spc="-1" strike="noStrike">
               <a:latin typeface="Arial"/>
             </a:endParaRPr>
           </a:p>
@@ -16314,7 +16293,7 @@
               </a:rPr>
               <a:t> </a:t>
             </a:r>
-            <a:endParaRPr b="0" lang="en-HK" sz="1800" spc="-1" strike="noStrike">
+            <a:endParaRPr b="0" lang="en-US" sz="1800" spc="-1" strike="noStrike">
               <a:latin typeface="Arial"/>
             </a:endParaRPr>
           </a:p>
@@ -16329,7 +16308,7 @@
         <p:spPr>
           <a:xfrm>
             <a:off x="4715280" y="1351440"/>
-            <a:ext cx="1881000" cy="2590920"/>
+            <a:ext cx="1880640" cy="2590560"/>
           </a:xfrm>
           <a:prstGeom prst="rect">
             <a:avLst/>
@@ -16358,7 +16337,7 @@
         <p:spPr>
           <a:xfrm>
             <a:off x="4844520" y="1620360"/>
-            <a:ext cx="1504440" cy="360"/>
+            <a:ext cx="1504080" cy="360"/>
           </a:xfrm>
           <a:custGeom>
             <a:avLst/>
@@ -16400,7 +16379,7 @@
         <p:spPr>
           <a:xfrm>
             <a:off x="5091840" y="1921680"/>
-            <a:ext cx="1257120" cy="360"/>
+            <a:ext cx="1256760" cy="360"/>
           </a:xfrm>
           <a:custGeom>
             <a:avLst/>
@@ -16442,7 +16421,7 @@
         <p:spPr>
           <a:xfrm>
             <a:off x="4844520" y="2118960"/>
-            <a:ext cx="1504440" cy="360"/>
+            <a:ext cx="1504080" cy="360"/>
           </a:xfrm>
           <a:custGeom>
             <a:avLst/>
@@ -16484,7 +16463,7 @@
         <p:spPr>
           <a:xfrm>
             <a:off x="4844520" y="2292840"/>
-            <a:ext cx="1504440" cy="360"/>
+            <a:ext cx="1504080" cy="360"/>
           </a:xfrm>
           <a:custGeom>
             <a:avLst/>
@@ -16526,7 +16505,7 @@
         <p:spPr>
           <a:xfrm>
             <a:off x="4844520" y="2445480"/>
-            <a:ext cx="1504440" cy="360"/>
+            <a:ext cx="1504080" cy="360"/>
           </a:xfrm>
           <a:custGeom>
             <a:avLst/>
@@ -16568,7 +16547,7 @@
         <p:spPr>
           <a:xfrm>
             <a:off x="5091840" y="2597760"/>
-            <a:ext cx="1257120" cy="360"/>
+            <a:ext cx="1256760" cy="360"/>
           </a:xfrm>
           <a:custGeom>
             <a:avLst/>
@@ -16610,7 +16589,7 @@
         <p:spPr>
           <a:xfrm>
             <a:off x="4844520" y="2795040"/>
-            <a:ext cx="1504440" cy="360"/>
+            <a:ext cx="1504080" cy="360"/>
           </a:xfrm>
           <a:custGeom>
             <a:avLst/>
@@ -16652,7 +16631,7 @@
         <p:spPr>
           <a:xfrm>
             <a:off x="4844520" y="2968920"/>
-            <a:ext cx="1504440" cy="360"/>
+            <a:ext cx="1504080" cy="360"/>
           </a:xfrm>
           <a:custGeom>
             <a:avLst/>
@@ -16694,7 +16673,7 @@
         <p:spPr>
           <a:xfrm>
             <a:off x="4844520" y="3121200"/>
-            <a:ext cx="1504440" cy="360"/>
+            <a:ext cx="1504080" cy="360"/>
           </a:xfrm>
           <a:custGeom>
             <a:avLst/>
@@ -16736,7 +16715,7 @@
         <p:spPr>
           <a:xfrm>
             <a:off x="5091840" y="3273480"/>
-            <a:ext cx="1257120" cy="360"/>
+            <a:ext cx="1256760" cy="360"/>
           </a:xfrm>
           <a:custGeom>
             <a:avLst/>
@@ -16778,7 +16757,7 @@
         <p:spPr>
           <a:xfrm>
             <a:off x="4844520" y="3470760"/>
-            <a:ext cx="1504440" cy="360"/>
+            <a:ext cx="1504080" cy="360"/>
           </a:xfrm>
           <a:custGeom>
             <a:avLst/>
@@ -16820,7 +16799,7 @@
         <p:spPr>
           <a:xfrm>
             <a:off x="4844520" y="3644640"/>
-            <a:ext cx="1504440" cy="360"/>
+            <a:ext cx="1504080" cy="360"/>
           </a:xfrm>
           <a:custGeom>
             <a:avLst/>
@@ -16862,7 +16841,7 @@
         <p:spPr>
           <a:xfrm>
             <a:off x="4844520" y="3797280"/>
-            <a:ext cx="1504440" cy="360"/>
+            <a:ext cx="1504080" cy="360"/>
           </a:xfrm>
           <a:custGeom>
             <a:avLst/>
@@ -16904,7 +16883,7 @@
         <p:spPr>
           <a:xfrm>
             <a:off x="6469200" y="1932480"/>
-            <a:ext cx="740160" cy="503640"/>
+            <a:ext cx="739800" cy="503280"/>
           </a:xfrm>
           <a:custGeom>
             <a:avLst/>
@@ -16949,7 +16928,7 @@
         <p:spPr>
           <a:xfrm>
             <a:off x="7329960" y="1787040"/>
-            <a:ext cx="1343160" cy="503640"/>
+            <a:ext cx="1342800" cy="503280"/>
           </a:xfrm>
           <a:prstGeom prst="wedgeRoundRectCallout">
             <a:avLst>
@@ -16983,7 +16962,7 @@
         <p:spPr>
           <a:xfrm>
             <a:off x="6469200" y="2630520"/>
-            <a:ext cx="740160" cy="503640"/>
+            <a:ext cx="739800" cy="503280"/>
           </a:xfrm>
           <a:custGeom>
             <a:avLst/>
@@ -17028,7 +17007,7 @@
         <p:spPr>
           <a:xfrm>
             <a:off x="7329960" y="2587680"/>
-            <a:ext cx="1343160" cy="503640"/>
+            <a:ext cx="1342800" cy="503280"/>
           </a:xfrm>
           <a:prstGeom prst="wedgeRoundRectCallout">
             <a:avLst>
@@ -17062,7 +17041,7 @@
         <p:spPr>
           <a:xfrm>
             <a:off x="6469200" y="3328560"/>
-            <a:ext cx="740160" cy="503640"/>
+            <a:ext cx="739800" cy="503280"/>
           </a:xfrm>
           <a:custGeom>
             <a:avLst/>
@@ -17107,7 +17086,7 @@
         <p:spPr>
           <a:xfrm>
             <a:off x="7329960" y="3210840"/>
-            <a:ext cx="1343160" cy="503640"/>
+            <a:ext cx="1342800" cy="503280"/>
           </a:xfrm>
           <a:prstGeom prst="wedgeRoundRectCallout">
             <a:avLst>
@@ -17175,7 +17154,7 @@
         <p:spPr>
           <a:xfrm>
             <a:off x="265680" y="1151280"/>
-            <a:ext cx="4043160" cy="1562400"/>
+            <a:ext cx="4042800" cy="1562040"/>
           </a:xfrm>
           <a:prstGeom prst="rect">
             <a:avLst/>
@@ -17209,7 +17188,7 @@
               </a:rPr>
               <a:t>Using Graphic Organizers</a:t>
             </a:r>
-            <a:endParaRPr b="0" lang="en-HK" sz="4200" spc="-1" strike="noStrike">
+            <a:endParaRPr b="0" lang="en-US" sz="4200" spc="-1" strike="noStrike">
               <a:latin typeface="Arial"/>
             </a:endParaRPr>
           </a:p>
@@ -17228,7 +17207,7 @@
         <p:spPr>
           <a:xfrm>
             <a:off x="265680" y="2769120"/>
-            <a:ext cx="4043160" cy="1267200"/>
+            <a:ext cx="4042800" cy="1266840"/>
           </a:xfrm>
           <a:prstGeom prst="rect">
             <a:avLst/>
@@ -17262,7 +17241,7 @@
               </a:rPr>
               <a:t>Visual Strategies for Outlining</a:t>
             </a:r>
-            <a:endParaRPr b="0" lang="en-HK" sz="2100" spc="-1" strike="noStrike">
+            <a:endParaRPr b="0" lang="en-US" sz="2100" spc="-1" strike="noStrike">
               <a:latin typeface="Arial"/>
             </a:endParaRPr>
           </a:p>
@@ -17277,7 +17256,7 @@
         <p:spPr>
           <a:xfrm>
             <a:off x="5199480" y="1028880"/>
-            <a:ext cx="3225960" cy="309960"/>
+            <a:ext cx="3225600" cy="309600"/>
           </a:xfrm>
           <a:prstGeom prst="rect">
             <a:avLst/>
@@ -17320,7 +17299,7 @@
               </a:rPr>
               <a:t>1.</a:t>
             </a:r>
-            <a:endParaRPr b="0" lang="en-HK" sz="1400" spc="-1" strike="noStrike">
+            <a:endParaRPr b="0" lang="en-US" sz="1400" spc="-1" strike="noStrike">
               <a:latin typeface="Arial"/>
             </a:endParaRPr>
           </a:p>
@@ -17335,7 +17314,7 @@
         <p:spPr>
           <a:xfrm>
             <a:off x="5586840" y="1536120"/>
-            <a:ext cx="2838600" cy="309960"/>
+            <a:ext cx="2838240" cy="309600"/>
           </a:xfrm>
           <a:prstGeom prst="rect">
             <a:avLst/>
@@ -17378,7 +17357,7 @@
               </a:rPr>
               <a:t>a)</a:t>
             </a:r>
-            <a:endParaRPr b="0" lang="en-HK" sz="1400" spc="-1" strike="noStrike">
+            <a:endParaRPr b="0" lang="en-US" sz="1400" spc="-1" strike="noStrike">
               <a:latin typeface="Arial"/>
             </a:endParaRPr>
           </a:p>
@@ -17393,7 +17372,7 @@
         <p:spPr>
           <a:xfrm>
             <a:off x="5586840" y="2043720"/>
-            <a:ext cx="2838600" cy="309960"/>
+            <a:ext cx="2838240" cy="309600"/>
           </a:xfrm>
           <a:prstGeom prst="rect">
             <a:avLst/>
@@ -17436,7 +17415,7 @@
               </a:rPr>
               <a:t>b)</a:t>
             </a:r>
-            <a:endParaRPr b="0" lang="en-HK" sz="1400" spc="-1" strike="noStrike">
+            <a:endParaRPr b="0" lang="en-US" sz="1400" spc="-1" strike="noStrike">
               <a:latin typeface="Arial"/>
             </a:endParaRPr>
           </a:p>
@@ -17451,7 +17430,7 @@
         <p:spPr>
           <a:xfrm>
             <a:off x="5145480" y="2769120"/>
-            <a:ext cx="2149920" cy="1625760"/>
+            <a:ext cx="2149560" cy="1625400"/>
           </a:xfrm>
           <a:prstGeom prst="ellipse">
             <a:avLst/>
@@ -17480,7 +17459,7 @@
         <p:spPr>
           <a:xfrm>
             <a:off x="6404760" y="2768760"/>
-            <a:ext cx="2020680" cy="1625760"/>
+            <a:ext cx="2020320" cy="1625400"/>
           </a:xfrm>
           <a:prstGeom prst="ellipse">
             <a:avLst/>
@@ -17544,7 +17523,7 @@
         <p:spPr>
           <a:xfrm>
             <a:off x="2634480" y="100080"/>
-            <a:ext cx="6507360" cy="855360"/>
+            <a:ext cx="6507000" cy="855000"/>
           </a:xfrm>
           <a:prstGeom prst="rect">
             <a:avLst/>
@@ -17578,7 +17557,7 @@
               </a:rPr>
               <a:t>Sequence</a:t>
             </a:r>
-            <a:endParaRPr b="0" lang="en-HK" sz="4400" spc="-1" strike="noStrike">
+            <a:endParaRPr b="0" lang="en-US" sz="4400" spc="-1" strike="noStrike">
               <a:latin typeface="Arial"/>
             </a:endParaRPr>
           </a:p>
@@ -17597,7 +17576,7 @@
         <p:spPr>
           <a:xfrm>
             <a:off x="3884040" y="1200240"/>
-            <a:ext cx="4800240" cy="3171240"/>
+            <a:ext cx="4799880" cy="3170880"/>
           </a:xfrm>
           <a:prstGeom prst="rect">
             <a:avLst/>
@@ -17632,7 +17611,7 @@
               </a:rPr>
               <a:t>Order events</a:t>
             </a:r>
-            <a:endParaRPr b="0" lang="en-HK" sz="3200" spc="-1" strike="noStrike">
+            <a:endParaRPr b="0" lang="en-US" sz="3200" spc="-1" strike="noStrike">
               <a:latin typeface="Arial"/>
             </a:endParaRPr>
           </a:p>
@@ -17657,7 +17636,7 @@
               </a:rPr>
               <a:t>Timeline of events </a:t>
             </a:r>
-            <a:endParaRPr b="0" lang="en-HK" sz="3200" spc="-1" strike="noStrike">
+            <a:endParaRPr b="0" lang="en-US" sz="3200" spc="-1" strike="noStrike">
               <a:latin typeface="Arial"/>
             </a:endParaRPr>
           </a:p>
@@ -17682,7 +17661,7 @@
               </a:rPr>
               <a:t>Steps in a process</a:t>
             </a:r>
-            <a:endParaRPr b="0" lang="en-HK" sz="3200" spc="-1" strike="noStrike">
+            <a:endParaRPr b="0" lang="en-US" sz="3200" spc="-1" strike="noStrike">
               <a:latin typeface="Arial"/>
             </a:endParaRPr>
           </a:p>
@@ -17707,7 +17686,7 @@
               </a:rPr>
               <a:t>Relationship between cause &amp; effect</a:t>
             </a:r>
-            <a:endParaRPr b="0" lang="en-HK" sz="3200" spc="-1" strike="noStrike">
+            <a:endParaRPr b="0" lang="en-US" sz="3200" spc="-1" strike="noStrike">
               <a:latin typeface="Arial"/>
             </a:endParaRPr>
           </a:p>
@@ -17726,7 +17705,7 @@
         <p:spPr>
           <a:xfrm>
             <a:off x="553320" y="308520"/>
-            <a:ext cx="3328920" cy="4256640"/>
+            <a:ext cx="3328560" cy="4256280"/>
           </a:xfrm>
           <a:prstGeom prst="rect">
             <a:avLst/>
@@ -17779,7 +17758,7 @@
         <p:spPr>
           <a:xfrm>
             <a:off x="457200" y="205920"/>
-            <a:ext cx="8227440" cy="855360"/>
+            <a:ext cx="8227080" cy="855000"/>
           </a:xfrm>
           <a:prstGeom prst="rect">
             <a:avLst/>
@@ -17813,7 +17792,7 @@
               </a:rPr>
               <a:t>Story Map</a:t>
             </a:r>
-            <a:endParaRPr b="0" lang="en-HK" sz="4400" spc="-1" strike="noStrike">
+            <a:endParaRPr b="0" lang="en-US" sz="4400" spc="-1" strike="noStrike">
               <a:latin typeface="Arial"/>
             </a:endParaRPr>
           </a:p>
@@ -17832,7 +17811,7 @@
         <p:spPr>
           <a:xfrm>
             <a:off x="1365480" y="2290320"/>
-            <a:ext cx="3128400" cy="2302200"/>
+            <a:ext cx="3128040" cy="2301840"/>
           </a:xfrm>
           <a:prstGeom prst="rect">
             <a:avLst/>
@@ -17847,7 +17826,7 @@
             <a:noAutofit/>
           </a:bodyPr>
           <a:p>
-            <a:endParaRPr b="0" lang="en-HK" sz="3200" spc="-1" strike="noStrike">
+            <a:endParaRPr b="0" lang="en-US" sz="3200" spc="-1" strike="noStrike">
               <a:latin typeface="Arial"/>
             </a:endParaRPr>
           </a:p>
@@ -17866,7 +17845,7 @@
         <p:spPr>
           <a:xfrm>
             <a:off x="4648320" y="1200240"/>
-            <a:ext cx="4036320" cy="3392280"/>
+            <a:ext cx="4035960" cy="3391920"/>
           </a:xfrm>
           <a:prstGeom prst="rect">
             <a:avLst/>
@@ -17901,7 +17880,7 @@
               </a:rPr>
               <a:t>Helps students identify &amp; examine different parts of the reading</a:t>
             </a:r>
-            <a:endParaRPr b="0" lang="en-HK" sz="2800" spc="-1" strike="noStrike">
+            <a:endParaRPr b="0" lang="en-US" sz="2800" spc="-1" strike="noStrike">
               <a:latin typeface="Arial"/>
             </a:endParaRPr>
           </a:p>
@@ -17926,7 +17905,7 @@
               </a:rPr>
               <a:t>Non-fiction and fiction</a:t>
             </a:r>
-            <a:endParaRPr b="0" lang="en-HK" sz="2800" spc="-1" strike="noStrike">
+            <a:endParaRPr b="0" lang="en-US" sz="2800" spc="-1" strike="noStrike">
               <a:latin typeface="Arial"/>
             </a:endParaRPr>
           </a:p>
@@ -17951,7 +17930,7 @@
               </a:rPr>
               <a:t>Learn to summarize the reading</a:t>
             </a:r>
-            <a:endParaRPr b="0" lang="en-HK" sz="2800" spc="-1" strike="noStrike">
+            <a:endParaRPr b="0" lang="en-US" sz="2800" spc="-1" strike="noStrike">
               <a:latin typeface="Arial"/>
             </a:endParaRPr>
           </a:p>
@@ -17970,7 +17949,7 @@
         <p:spPr>
           <a:xfrm>
             <a:off x="386640" y="1200240"/>
-            <a:ext cx="4036320" cy="3113280"/>
+            <a:ext cx="4035960" cy="3112920"/>
           </a:xfrm>
           <a:prstGeom prst="rect">
             <a:avLst/>
